--- a/Group A Presentation .pptx
+++ b/Group A Presentation .pptx
@@ -1,18 +1,20 @@
 
 <file path=ppt/presentation.xml><?xml version="1.0" encoding="utf-8"?>
-<p:presentation xmlns:a="http://schemas.openxmlformats.org/drawingml/2006/main" xmlns:r="http://schemas.openxmlformats.org/officeDocument/2006/relationships" xmlns:p="http://schemas.openxmlformats.org/presentationml/2006/main" xmlns:m="http://schemas.openxmlformats.org/officeDocument/2006/math" xmlns:a14="http://schemas.microsoft.com/office/drawing/2010/main">
+<p:presentation xmlns:a="http://schemas.openxmlformats.org/drawingml/2006/main" xmlns:r="http://schemas.openxmlformats.org/officeDocument/2006/relationships" xmlns:p="http://schemas.openxmlformats.org/presentationml/2006/main">
   <p:sldMasterIdLst>
-    <p:sldMasterId id="2147483648" r:id="rId5"/>
+    <p:sldMasterId id="2147483648" r:id="rId1"/>
   </p:sldMasterIdLst>
   <p:notesMasterIdLst>
-    <p:notesMasterId r:id="rId7"/>
+    <p:notesMasterId r:id="rId9"/>
   </p:notesMasterIdLst>
   <p:sldIdLst>
-    <p:sldId id="256" r:id="rId8"/>
-    <p:sldId id="257" r:id="rId9"/>
-    <p:sldId id="258" r:id="rId10"/>
-    <p:sldId id="259" r:id="rId11"/>
-    <p:sldId id="260" r:id="rId12"/>
+    <p:sldId id="256" r:id="rId2"/>
+    <p:sldId id="257" r:id="rId3"/>
+    <p:sldId id="258" r:id="rId4"/>
+    <p:sldId id="259" r:id="rId5"/>
+    <p:sldId id="261" r:id="rId6"/>
+    <p:sldId id="260" r:id="rId7"/>
+    <p:sldId id="262" r:id="rId8"/>
   </p:sldIdLst>
   <p:sldSz cx="12192000" cy="6858000"/>
   <p:notesSz cx="6858000" cy="9144000"/>
@@ -32,7 +34,7 @@
       <a:buFontTx/>
       <a:buNone/>
       <a:tabLst/>
-      <a:defRPr b="0" baseline="0" cap="none" i="0" spc="0" strike="noStrike" sz="1800" u="none" kumimoji="0" normalizeH="0">
+      <a:defRPr kumimoji="0" sz="1800" b="0" i="0" u="none" strike="noStrike" cap="none" spc="0" normalizeH="0" baseline="0">
         <a:ln>
           <a:noFill/>
         </a:ln>
@@ -58,7 +60,7 @@
       <a:buFontTx/>
       <a:buNone/>
       <a:tabLst/>
-      <a:defRPr b="0" baseline="0" cap="none" i="0" spc="0" strike="noStrike" sz="1800" u="none" kumimoji="0" normalizeH="0">
+      <a:defRPr kumimoji="0" sz="1800" b="0" i="0" u="none" strike="noStrike" cap="none" spc="0" normalizeH="0" baseline="0">
         <a:ln>
           <a:noFill/>
         </a:ln>
@@ -88,7 +90,7 @@
       <a:buFontTx/>
       <a:buNone/>
       <a:tabLst/>
-      <a:defRPr b="0" baseline="0" cap="none" i="0" spc="0" strike="noStrike" sz="1800" u="none" kumimoji="0" normalizeH="0">
+      <a:defRPr kumimoji="0" sz="1800" b="0" i="0" u="none" strike="noStrike" cap="none" spc="0" normalizeH="0" baseline="0">
         <a:ln>
           <a:noFill/>
         </a:ln>
@@ -118,7 +120,7 @@
       <a:buFontTx/>
       <a:buNone/>
       <a:tabLst/>
-      <a:defRPr b="0" baseline="0" cap="none" i="0" spc="0" strike="noStrike" sz="1800" u="none" kumimoji="0" normalizeH="0">
+      <a:defRPr kumimoji="0" sz="1800" b="0" i="0" u="none" strike="noStrike" cap="none" spc="0" normalizeH="0" baseline="0">
         <a:ln>
           <a:noFill/>
         </a:ln>
@@ -148,7 +150,7 @@
       <a:buFontTx/>
       <a:buNone/>
       <a:tabLst/>
-      <a:defRPr b="0" baseline="0" cap="none" i="0" spc="0" strike="noStrike" sz="1800" u="none" kumimoji="0" normalizeH="0">
+      <a:defRPr kumimoji="0" sz="1800" b="0" i="0" u="none" strike="noStrike" cap="none" spc="0" normalizeH="0" baseline="0">
         <a:ln>
           <a:noFill/>
         </a:ln>
@@ -178,7 +180,7 @@
       <a:buFontTx/>
       <a:buNone/>
       <a:tabLst/>
-      <a:defRPr b="0" baseline="0" cap="none" i="0" spc="0" strike="noStrike" sz="1800" u="none" kumimoji="0" normalizeH="0">
+      <a:defRPr kumimoji="0" sz="1800" b="0" i="0" u="none" strike="noStrike" cap="none" spc="0" normalizeH="0" baseline="0">
         <a:ln>
           <a:noFill/>
         </a:ln>
@@ -208,7 +210,7 @@
       <a:buFontTx/>
       <a:buNone/>
       <a:tabLst/>
-      <a:defRPr b="0" baseline="0" cap="none" i="0" spc="0" strike="noStrike" sz="1800" u="none" kumimoji="0" normalizeH="0">
+      <a:defRPr kumimoji="0" sz="1800" b="0" i="0" u="none" strike="noStrike" cap="none" spc="0" normalizeH="0" baseline="0">
         <a:ln>
           <a:noFill/>
         </a:ln>
@@ -238,7 +240,7 @@
       <a:buFontTx/>
       <a:buNone/>
       <a:tabLst/>
-      <a:defRPr b="0" baseline="0" cap="none" i="0" spc="0" strike="noStrike" sz="1800" u="none" kumimoji="0" normalizeH="0">
+      <a:defRPr kumimoji="0" sz="1800" b="0" i="0" u="none" strike="noStrike" cap="none" spc="0" normalizeH="0" baseline="0">
         <a:ln>
           <a:noFill/>
         </a:ln>
@@ -268,7 +270,7 @@
       <a:buFontTx/>
       <a:buNone/>
       <a:tabLst/>
-      <a:defRPr b="0" baseline="0" cap="none" i="0" spc="0" strike="noStrike" sz="1800" u="none" kumimoji="0" normalizeH="0">
+      <a:defRPr kumimoji="0" sz="1800" b="0" i="0" u="none" strike="noStrike" cap="none" spc="0" normalizeH="0" baseline="0">
         <a:ln>
           <a:noFill/>
         </a:ln>
@@ -298,7 +300,7 @@
       <a:buFontTx/>
       <a:buNone/>
       <a:tabLst/>
-      <a:defRPr b="0" baseline="0" cap="none" i="0" spc="0" strike="noStrike" sz="1800" u="none" kumimoji="0" normalizeH="0">
+      <a:defRPr kumimoji="0" sz="1800" b="0" i="0" u="none" strike="noStrike" cap="none" spc="0" normalizeH="0" baseline="0">
         <a:ln>
           <a:noFill/>
         </a:ln>
@@ -317,13 +319,82 @@
 </p:presentation>
 </file>
 
-<file path=ppt/commentAuthors.xml><?xml version="1.0" encoding="utf-8"?>
-<p:cmAuthorLst xmlns:a="http://schemas.openxmlformats.org/drawingml/2006/main" xmlns:r="http://schemas.openxmlformats.org/officeDocument/2006/relationships" xmlns:p="http://schemas.openxmlformats.org/presentationml/2006/main" xmlns:m="http://schemas.openxmlformats.org/officeDocument/2006/math" xmlns:a14="http://schemas.microsoft.com/office/drawing/2010/main"/>
+<file path=ppt/revisionInfo.xml><?xml version="1.0" encoding="utf-8"?>
+<p1510:revInfo xmlns:a="http://schemas.openxmlformats.org/drawingml/2006/main" xmlns:r="http://schemas.openxmlformats.org/officeDocument/2006/relationships" xmlns:p1510="http://schemas.microsoft.com/office/powerpoint/2015/10/main">
+  <p1510:revLst>
+    <p1510:client id="{47699F05-FD46-4CB1-9464-080B8D90D703}" v="2" dt="2026-03-26T15:43:36.247"/>
+  </p1510:revLst>
+</p1510:revInfo>
+</file>
+
+<file path=ppt/changesInfos/changesInfo1.xml><?xml version="1.0" encoding="utf-8"?>
+<pc:chgInfo xmlns:a="http://schemas.openxmlformats.org/drawingml/2006/main" xmlns:r="http://schemas.openxmlformats.org/officeDocument/2006/relationships" xmlns:ac="http://schemas.microsoft.com/office/drawing/2013/main/command" xmlns:pc="http://schemas.microsoft.com/office/powerpoint/2013/main/command">
+  <pc:docChgLst>
+    <pc:chgData name="Richard Badea" userId="07c04ef0-c08c-4801-9d58-0bd6cd9d1bec" providerId="ADAL" clId="{2FD2290B-C2BF-4F69-B8F8-6CE6D96C7FD1}"/>
+    <pc:docChg chg="addSld modSld sldOrd">
+      <pc:chgData name="Richard Badea" userId="07c04ef0-c08c-4801-9d58-0bd6cd9d1bec" providerId="ADAL" clId="{2FD2290B-C2BF-4F69-B8F8-6CE6D96C7FD1}" dt="2026-03-26T15:47:18.838" v="158"/>
+      <pc:docMkLst>
+        <pc:docMk/>
+      </pc:docMkLst>
+      <pc:sldChg chg="modSp new mod">
+        <pc:chgData name="Richard Badea" userId="07c04ef0-c08c-4801-9d58-0bd6cd9d1bec" providerId="ADAL" clId="{2FD2290B-C2BF-4F69-B8F8-6CE6D96C7FD1}" dt="2026-03-26T15:47:00.679" v="156" actId="20577"/>
+        <pc:sldMkLst>
+          <pc:docMk/>
+          <pc:sldMk cId="3371590908" sldId="261"/>
+        </pc:sldMkLst>
+        <pc:spChg chg="mod">
+          <ac:chgData name="Richard Badea" userId="07c04ef0-c08c-4801-9d58-0bd6cd9d1bec" providerId="ADAL" clId="{2FD2290B-C2BF-4F69-B8F8-6CE6D96C7FD1}" dt="2026-03-26T15:47:00.679" v="156" actId="20577"/>
+          <ac:spMkLst>
+            <pc:docMk/>
+            <pc:sldMk cId="3371590908" sldId="261"/>
+            <ac:spMk id="2" creationId="{636DD14C-603D-0526-7293-C1CF9E2B4D18}"/>
+          </ac:spMkLst>
+        </pc:spChg>
+        <pc:spChg chg="mod">
+          <ac:chgData name="Richard Badea" userId="07c04ef0-c08c-4801-9d58-0bd6cd9d1bec" providerId="ADAL" clId="{2FD2290B-C2BF-4F69-B8F8-6CE6D96C7FD1}" dt="2026-03-26T15:46:54.215" v="137" actId="20577"/>
+          <ac:spMkLst>
+            <pc:docMk/>
+            <pc:sldMk cId="3371590908" sldId="261"/>
+            <ac:spMk id="3" creationId="{89C30586-4049-47F7-D1CB-3A2696329ED6}"/>
+          </ac:spMkLst>
+        </pc:spChg>
+      </pc:sldChg>
+      <pc:sldChg chg="modSp new mod ord">
+        <pc:chgData name="Richard Badea" userId="07c04ef0-c08c-4801-9d58-0bd6cd9d1bec" providerId="ADAL" clId="{2FD2290B-C2BF-4F69-B8F8-6CE6D96C7FD1}" dt="2026-03-26T15:47:18.838" v="158"/>
+        <pc:sldMkLst>
+          <pc:docMk/>
+          <pc:sldMk cId="3590883194" sldId="262"/>
+        </pc:sldMkLst>
+        <pc:spChg chg="mod">
+          <ac:chgData name="Richard Badea" userId="07c04ef0-c08c-4801-9d58-0bd6cd9d1bec" providerId="ADAL" clId="{2FD2290B-C2BF-4F69-B8F8-6CE6D96C7FD1}" dt="2026-03-26T15:43:28.810" v="68" actId="20577"/>
+          <ac:spMkLst>
+            <pc:docMk/>
+            <pc:sldMk cId="3590883194" sldId="262"/>
+            <ac:spMk id="2" creationId="{A86C8A0A-38B2-FDC9-961C-42D793C2BCCB}"/>
+          </ac:spMkLst>
+        </pc:spChg>
+        <pc:spChg chg="mod">
+          <ac:chgData name="Richard Badea" userId="07c04ef0-c08c-4801-9d58-0bd6cd9d1bec" providerId="ADAL" clId="{2FD2290B-C2BF-4F69-B8F8-6CE6D96C7FD1}" dt="2026-03-26T15:43:43.976" v="78" actId="20577"/>
+          <ac:spMkLst>
+            <pc:docMk/>
+            <pc:sldMk cId="3590883194" sldId="262"/>
+            <ac:spMk id="3" creationId="{B995E8E6-8731-D993-014E-DF9F7849CC6C}"/>
+          </ac:spMkLst>
+        </pc:spChg>
+      </pc:sldChg>
+    </pc:docChg>
+  </pc:docChgLst>
+</pc:chgInfo>
 </file>
 
 <file path=ppt/notesMasters/notesMaster1.xml><?xml version="1.0" encoding="utf-8"?>
-<p:notesMaster xmlns:a="http://schemas.openxmlformats.org/drawingml/2006/main" xmlns:r="http://schemas.openxmlformats.org/officeDocument/2006/relationships" xmlns:p="http://schemas.openxmlformats.org/presentationml/2006/main" xmlns:m="http://schemas.openxmlformats.org/officeDocument/2006/math" xmlns:a14="http://schemas.microsoft.com/office/drawing/2010/main">
+<p:notesMaster xmlns:a="http://schemas.openxmlformats.org/drawingml/2006/main" xmlns:r="http://schemas.openxmlformats.org/officeDocument/2006/relationships" xmlns:p="http://schemas.openxmlformats.org/presentationml/2006/main">
   <p:cSld>
+    <p:bg>
+      <p:bgRef idx="1001">
+        <a:schemeClr val="bg1"/>
+      </p:bgRef>
+    </p:bg>
     <p:spTree>
       <p:nvGrpSpPr>
         <p:cNvPr id="1" name=""/>
@@ -341,7 +412,9 @@
       <p:sp>
         <p:nvSpPr>
           <p:cNvPr id="320" name="Shape 320"/>
-          <p:cNvSpPr/>
+          <p:cNvSpPr>
+            <a:spLocks noGrp="1" noRot="1" noChangeAspect="1"/>
+          </p:cNvSpPr>
           <p:nvPr>
             <p:ph type="sldImg"/>
           </p:nvPr>
@@ -359,14 +432,16 @@
           <a:bodyPr/>
           <a:lstStyle/>
           <a:p>
-            <a:pPr/>
+            <a:endParaRPr/>
           </a:p>
         </p:txBody>
       </p:sp>
       <p:sp>
         <p:nvSpPr>
           <p:cNvPr id="321" name="Shape 321"/>
-          <p:cNvSpPr/>
+          <p:cNvSpPr>
+            <a:spLocks noGrp="1"/>
+          </p:cNvSpPr>
           <p:nvPr>
             <p:ph type="body" sz="quarter" idx="1"/>
           </p:nvPr>
@@ -384,7 +459,7 @@
           <a:bodyPr/>
           <a:lstStyle/>
           <a:p>
-            <a:pPr/>
+            <a:endParaRPr/>
           </a:p>
         </p:txBody>
       </p:sp>
@@ -469,7 +544,7 @@
 </file>
 
 <file path=ppt/slideLayouts/slideLayout1.xml><?xml version="1.0" encoding="utf-8"?>
-<p:sldLayout xmlns:a="http://schemas.openxmlformats.org/drawingml/2006/main" xmlns:r="http://schemas.openxmlformats.org/officeDocument/2006/relationships" xmlns:p="http://schemas.openxmlformats.org/presentationml/2006/main" xmlns:m="http://schemas.openxmlformats.org/officeDocument/2006/math" xmlns:a14="http://schemas.microsoft.com/office/drawing/2010/main" type="title" showMasterSp="0" showMasterPhAnim="1">
+<p:sldLayout xmlns:a="http://schemas.openxmlformats.org/drawingml/2006/main" xmlns:r="http://schemas.openxmlformats.org/officeDocument/2006/relationships" xmlns:p="http://schemas.openxmlformats.org/presentationml/2006/main" showMasterSp="0" type="title">
   <p:cSld name="Title Slide">
     <p:spTree>
       <p:nvGrpSpPr>
@@ -488,7 +563,9 @@
       <p:sp>
         <p:nvSpPr>
           <p:cNvPr id="12" name="CLICK TO EDIT MASTER TITLE STYLE"/>
-          <p:cNvSpPr txBox="1"/>
+          <p:cNvSpPr txBox="1">
+            <a:spLocks noGrp="1"/>
+          </p:cNvSpPr>
           <p:nvPr>
             <p:ph type="title" hasCustomPrompt="1"/>
           </p:nvPr>
@@ -506,7 +583,6 @@
           <a:bodyPr anchor="b"/>
           <a:lstStyle/>
           <a:p>
-            <a:pPr/>
             <a:r>
               <a:t>CLICK TO EDIT MASTER TITLE STYLE</a:t>
             </a:r>
@@ -516,7 +592,9 @@
       <p:sp>
         <p:nvSpPr>
           <p:cNvPr id="13" name="Body Level One…"/>
-          <p:cNvSpPr txBox="1"/>
+          <p:cNvSpPr txBox="1">
+            <a:spLocks noGrp="1"/>
+          </p:cNvSpPr>
           <p:nvPr>
             <p:ph type="body" sz="quarter" idx="1"/>
           </p:nvPr>
@@ -580,7 +658,6 @@
             </a:lvl5pPr>
           </a:lstStyle>
           <a:p>
-            <a:pPr/>
             <a:r>
               <a:t>Body Level One</a:t>
             </a:r>
@@ -620,10 +697,8 @@
           <p:nvPr/>
         </p:nvPicPr>
         <p:blipFill>
-          <a:blip r:embed="rId2">
-            <a:extLst/>
-          </a:blip>
-          <a:srcRect l="9358" t="23650" r="0" b="0"/>
+          <a:blip r:embed="rId2"/>
+          <a:srcRect l="9358" t="23650"/>
           <a:stretch>
             <a:fillRect/>
           </a:stretch>
@@ -644,7 +719,9 @@
       <p:sp>
         <p:nvSpPr>
           <p:cNvPr id="15" name="Slide Number"/>
-          <p:cNvSpPr txBox="1"/>
+          <p:cNvSpPr txBox="1">
+            <a:spLocks noGrp="1"/>
+          </p:cNvSpPr>
           <p:nvPr>
             <p:ph type="sldNum" sz="quarter" idx="2"/>
           </p:nvPr>
@@ -658,8 +735,10 @@
           <a:bodyPr/>
           <a:lstStyle/>
           <a:p>
-            <a:pPr/>
-            <a:fld id="{86CB4B4D-7CA3-9044-876B-883B54F8677D}" type="slidenum"/>
+            <a:fld id="{86CB4B4D-7CA3-9044-876B-883B54F8677D}" type="slidenum">
+              <a:t>‹#›</a:t>
+            </a:fld>
+            <a:endParaRPr/>
           </a:p>
         </p:txBody>
       </p:sp>
@@ -668,12 +747,12 @@
   <p:clrMapOvr>
     <a:masterClrMapping/>
   </p:clrMapOvr>
-  <p:transition xmlns:p14="http://schemas.microsoft.com/office/powerpoint/2010/main" spd="med" advClick="1"/>
+  <p:transition spd="med"/>
 </p:sldLayout>
 </file>
 
 <file path=ppt/slideLayouts/slideLayout10.xml><?xml version="1.0" encoding="utf-8"?>
-<p:sldLayout xmlns:a="http://schemas.openxmlformats.org/drawingml/2006/main" xmlns:r="http://schemas.openxmlformats.org/officeDocument/2006/relationships" xmlns:p="http://schemas.openxmlformats.org/presentationml/2006/main" xmlns:m="http://schemas.openxmlformats.org/officeDocument/2006/math" xmlns:a14="http://schemas.microsoft.com/office/drawing/2010/main" type="tx" showMasterSp="0" showMasterPhAnim="1">
+<p:sldLayout xmlns:a="http://schemas.openxmlformats.org/drawingml/2006/main" xmlns:r="http://schemas.openxmlformats.org/officeDocument/2006/relationships" xmlns:p="http://schemas.openxmlformats.org/presentationml/2006/main" showMasterSp="0" type="tx">
   <p:cSld name="Market comparison">
     <p:spTree>
       <p:nvGrpSpPr>
@@ -692,7 +771,9 @@
       <p:sp>
         <p:nvSpPr>
           <p:cNvPr id="138" name="CLICK TO EDIT MASTER TITLE STYLE"/>
-          <p:cNvSpPr txBox="1"/>
+          <p:cNvSpPr txBox="1">
+            <a:spLocks noGrp="1"/>
+          </p:cNvSpPr>
           <p:nvPr>
             <p:ph type="title" hasCustomPrompt="1"/>
           </p:nvPr>
@@ -714,7 +795,6 @@
             </a:lvl1pPr>
           </a:lstStyle>
           <a:p>
-            <a:pPr/>
             <a:r>
               <a:t>CLICK TO EDIT MASTER TITLE STYLE</a:t>
             </a:r>
@@ -724,7 +804,9 @@
       <p:sp>
         <p:nvSpPr>
           <p:cNvPr id="139" name="Body Level One…"/>
-          <p:cNvSpPr txBox="1"/>
+          <p:cNvSpPr txBox="1">
+            <a:spLocks noGrp="1"/>
+          </p:cNvSpPr>
           <p:nvPr>
             <p:ph type="body" sz="quarter" idx="1" hasCustomPrompt="1"/>
           </p:nvPr>
@@ -745,69 +827,62 @@
               <a:buSzTx/>
               <a:buFontTx/>
               <a:buNone/>
-              <a:defRPr cap="all" spc="150" sz="4000"/>
+              <a:defRPr sz="4000" cap="all" spc="150"/>
             </a:lvl1pPr>
             <a:lvl2pPr marL="0" indent="457200" algn="ctr">
               <a:buSzTx/>
               <a:buFontTx/>
               <a:buNone/>
-              <a:defRPr cap="all" spc="150" sz="4000"/>
+              <a:defRPr sz="4000" cap="all" spc="150"/>
             </a:lvl2pPr>
             <a:lvl3pPr marL="0" indent="914400" algn="ctr">
               <a:buSzTx/>
               <a:buFontTx/>
               <a:buNone/>
-              <a:defRPr cap="all" spc="150" sz="4000"/>
+              <a:defRPr sz="4000" cap="all" spc="150"/>
             </a:lvl3pPr>
             <a:lvl4pPr marL="0" indent="1371600" algn="ctr">
               <a:buSzTx/>
               <a:buFontTx/>
               <a:buNone/>
-              <a:defRPr cap="all" spc="150" sz="4000"/>
+              <a:defRPr sz="4000" cap="all" spc="150"/>
             </a:lvl4pPr>
             <a:lvl5pPr marL="0" indent="1828800" algn="ctr">
               <a:buSzTx/>
               <a:buFontTx/>
               <a:buNone/>
-              <a:defRPr cap="all" spc="150" sz="4000"/>
+              <a:defRPr sz="4000" cap="all" spc="150"/>
             </a:lvl5pPr>
           </a:lstStyle>
           <a:p>
-            <a:pPr/>
             <a:r>
               <a:t>#</a:t>
             </a:r>
           </a:p>
           <a:p>
             <a:pPr lvl="1"/>
-            <a:r>
-              <a:t/>
-            </a:r>
+            <a:endParaRPr/>
           </a:p>
           <a:p>
             <a:pPr lvl="2"/>
-            <a:r>
-              <a:t/>
-            </a:r>
+            <a:endParaRPr/>
           </a:p>
           <a:p>
             <a:pPr lvl="3"/>
-            <a:r>
-              <a:t/>
-            </a:r>
+            <a:endParaRPr/>
           </a:p>
           <a:p>
             <a:pPr lvl="4"/>
-            <a:r>
-              <a:t/>
-            </a:r>
+            <a:endParaRPr/>
           </a:p>
         </p:txBody>
       </p:sp>
       <p:sp>
         <p:nvSpPr>
           <p:cNvPr id="140" name="Text Placeholder 2"/>
-          <p:cNvSpPr/>
+          <p:cNvSpPr>
+            <a:spLocks noGrp="1"/>
+          </p:cNvSpPr>
           <p:nvPr>
             <p:ph type="body" sz="quarter" idx="21" hasCustomPrompt="1"/>
           </p:nvPr>
@@ -828,11 +903,10 @@
               <a:buSzTx/>
               <a:buFontTx/>
               <a:buNone/>
-              <a:defRPr cap="all" spc="100" sz="4000"/>
-            </a:lvl1pPr>
-          </a:lstStyle>
-          <a:p>
-            <a:pPr/>
+              <a:defRPr sz="4000" cap="all" spc="100"/>
+            </a:lvl1pPr>
+          </a:lstStyle>
+          <a:p>
             <a:r>
               <a:t>#</a:t>
             </a:r>
@@ -842,7 +916,9 @@
       <p:sp>
         <p:nvSpPr>
           <p:cNvPr id="141" name="Text Placeholder 2"/>
-          <p:cNvSpPr/>
+          <p:cNvSpPr>
+            <a:spLocks noGrp="1"/>
+          </p:cNvSpPr>
           <p:nvPr>
             <p:ph type="body" sz="quarter" idx="22" hasCustomPrompt="1"/>
           </p:nvPr>
@@ -863,11 +939,10 @@
               <a:buSzTx/>
               <a:buFontTx/>
               <a:buNone/>
-              <a:defRPr cap="all" spc="100" sz="4000"/>
-            </a:lvl1pPr>
-          </a:lstStyle>
-          <a:p>
-            <a:pPr/>
+              <a:defRPr sz="4000" cap="all" spc="100"/>
+            </a:lvl1pPr>
+          </a:lstStyle>
+          <a:p>
             <a:r>
               <a:t>#</a:t>
             </a:r>
@@ -883,9 +958,7 @@
           <p:nvPr/>
         </p:nvPicPr>
         <p:blipFill>
-          <a:blip r:embed="rId2">
-            <a:extLst/>
-          </a:blip>
+          <a:blip r:embed="rId2"/>
           <a:stretch>
             <a:fillRect/>
           </a:stretch>
@@ -912,9 +985,7 @@
           <p:nvPr/>
         </p:nvPicPr>
         <p:blipFill>
-          <a:blip r:embed="rId3">
-            <a:extLst/>
-          </a:blip>
+          <a:blip r:embed="rId3"/>
           <a:stretch>
             <a:fillRect/>
           </a:stretch>
@@ -941,9 +1012,7 @@
           <p:nvPr/>
         </p:nvPicPr>
         <p:blipFill>
-          <a:blip r:embed="rId4">
-            <a:extLst/>
-          </a:blip>
+          <a:blip r:embed="rId4"/>
           <a:stretch>
             <a:fillRect/>
           </a:stretch>
@@ -964,7 +1033,9 @@
       <p:sp>
         <p:nvSpPr>
           <p:cNvPr id="145" name="Slide Number"/>
-          <p:cNvSpPr txBox="1"/>
+          <p:cNvSpPr txBox="1">
+            <a:spLocks noGrp="1"/>
+          </p:cNvSpPr>
           <p:nvPr>
             <p:ph type="sldNum" sz="quarter" idx="2"/>
           </p:nvPr>
@@ -982,8 +1053,10 @@
           <a:bodyPr/>
           <a:lstStyle/>
           <a:p>
-            <a:pPr/>
-            <a:fld id="{86CB4B4D-7CA3-9044-876B-883B54F8677D}" type="slidenum"/>
+            <a:fld id="{86CB4B4D-7CA3-9044-876B-883B54F8677D}" type="slidenum">
+              <a:t>‹#›</a:t>
+            </a:fld>
+            <a:endParaRPr/>
           </a:p>
         </p:txBody>
       </p:sp>
@@ -992,18 +1065,19 @@
   <p:clrMapOvr>
     <a:masterClrMapping/>
   </p:clrMapOvr>
-  <p:transition xmlns:p14="http://schemas.microsoft.com/office/powerpoint/2010/main" spd="med" advClick="1"/>
+  <p:transition spd="med"/>
 </p:sldLayout>
 </file>
 
 <file path=ppt/slideLayouts/slideLayout11.xml><?xml version="1.0" encoding="utf-8"?>
-<p:sldLayout xmlns:a="http://schemas.openxmlformats.org/drawingml/2006/main" xmlns:r="http://schemas.openxmlformats.org/officeDocument/2006/relationships" xmlns:p="http://schemas.openxmlformats.org/presentationml/2006/main" xmlns:m="http://schemas.openxmlformats.org/officeDocument/2006/math" xmlns:a14="http://schemas.microsoft.com/office/drawing/2010/main" type="tx" showMasterSp="0" showMasterPhAnim="1">
+<p:sldLayout xmlns:a="http://schemas.openxmlformats.org/drawingml/2006/main" xmlns:r="http://schemas.openxmlformats.org/officeDocument/2006/relationships" xmlns:p="http://schemas.openxmlformats.org/presentationml/2006/main" showMasterSp="0" type="tx">
   <p:cSld name="Two Content">
     <p:bg>
       <p:bgPr>
         <a:solidFill>
           <a:schemeClr val="accent1"/>
         </a:solidFill>
+        <a:effectLst/>
       </p:bgPr>
     </p:bg>
     <p:spTree>
@@ -1023,7 +1097,9 @@
       <p:sp>
         <p:nvSpPr>
           <p:cNvPr id="152" name="CLICK TO EDIT MASTER TITLE STYLE"/>
-          <p:cNvSpPr txBox="1"/>
+          <p:cNvSpPr txBox="1">
+            <a:spLocks noGrp="1"/>
+          </p:cNvSpPr>
           <p:nvPr>
             <p:ph type="title" hasCustomPrompt="1"/>
           </p:nvPr>
@@ -1045,7 +1121,6 @@
             </a:lvl1pPr>
           </a:lstStyle>
           <a:p>
-            <a:pPr/>
             <a:r>
               <a:t>CLICK TO EDIT MASTER TITLE STYLE</a:t>
             </a:r>
@@ -1055,7 +1130,9 @@
       <p:sp>
         <p:nvSpPr>
           <p:cNvPr id="153" name="Body Level One…"/>
-          <p:cNvSpPr txBox="1"/>
+          <p:cNvSpPr txBox="1">
+            <a:spLocks noGrp="1"/>
+          </p:cNvSpPr>
           <p:nvPr>
             <p:ph type="body" sz="quarter" idx="1" hasCustomPrompt="1"/>
           </p:nvPr>
@@ -1076,69 +1153,62 @@
               <a:buSzTx/>
               <a:buFontTx/>
               <a:buNone/>
-              <a:defRPr spc="150" sz="2000"/>
+              <a:defRPr sz="2000" spc="150"/>
             </a:lvl1pPr>
             <a:lvl2pPr marL="0" indent="457200">
               <a:buSzTx/>
               <a:buFontTx/>
               <a:buNone/>
-              <a:defRPr spc="150" sz="2000"/>
+              <a:defRPr sz="2000" spc="150"/>
             </a:lvl2pPr>
             <a:lvl3pPr marL="0" indent="914400">
               <a:buSzTx/>
               <a:buFontTx/>
               <a:buNone/>
-              <a:defRPr spc="150" sz="2000"/>
+              <a:defRPr sz="2000" spc="150"/>
             </a:lvl3pPr>
             <a:lvl4pPr marL="0" indent="1371600">
               <a:buSzTx/>
               <a:buFontTx/>
               <a:buNone/>
-              <a:defRPr spc="150" sz="2000"/>
+              <a:defRPr sz="2000" spc="150"/>
             </a:lvl4pPr>
             <a:lvl5pPr marL="0" indent="1828800">
               <a:buSzTx/>
               <a:buFontTx/>
               <a:buNone/>
-              <a:defRPr spc="150" sz="2000"/>
+              <a:defRPr sz="2000" spc="150"/>
             </a:lvl5pPr>
           </a:lstStyle>
           <a:p>
-            <a:pPr/>
             <a:r>
               <a:t>CLICK TO EDIT MASTER TEXT</a:t>
             </a:r>
           </a:p>
           <a:p>
             <a:pPr lvl="1"/>
-            <a:r>
-              <a:t/>
-            </a:r>
+            <a:endParaRPr/>
           </a:p>
           <a:p>
             <a:pPr lvl="2"/>
-            <a:r>
-              <a:t/>
-            </a:r>
+            <a:endParaRPr/>
           </a:p>
           <a:p>
             <a:pPr lvl="3"/>
-            <a:r>
-              <a:t/>
-            </a:r>
+            <a:endParaRPr/>
           </a:p>
           <a:p>
             <a:pPr lvl="4"/>
-            <a:r>
-              <a:t/>
-            </a:r>
+            <a:endParaRPr/>
           </a:p>
         </p:txBody>
       </p:sp>
       <p:sp>
         <p:nvSpPr>
           <p:cNvPr id="154" name="Text Placeholder 4"/>
-          <p:cNvSpPr/>
+          <p:cNvSpPr>
+            <a:spLocks noGrp="1"/>
+          </p:cNvSpPr>
           <p:nvPr>
             <p:ph type="body" sz="quarter" idx="21" hasCustomPrompt="1"/>
           </p:nvPr>
@@ -1159,11 +1229,10 @@
               <a:buSzTx/>
               <a:buFontTx/>
               <a:buNone/>
-              <a:defRPr spc="100" sz="2000"/>
-            </a:lvl1pPr>
-          </a:lstStyle>
-          <a:p>
-            <a:pPr/>
+              <a:defRPr sz="2000" spc="100"/>
+            </a:lvl1pPr>
+          </a:lstStyle>
+          <a:p>
             <a:r>
               <a:t>CLICK TO EDIT MASTER TEXT</a:t>
             </a:r>
@@ -1173,7 +1242,9 @@
       <p:sp>
         <p:nvSpPr>
           <p:cNvPr id="155" name="Slide Number"/>
-          <p:cNvSpPr txBox="1"/>
+          <p:cNvSpPr txBox="1">
+            <a:spLocks noGrp="1"/>
+          </p:cNvSpPr>
           <p:nvPr>
             <p:ph type="sldNum" sz="quarter" idx="2"/>
           </p:nvPr>
@@ -1191,8 +1262,10 @@
           <a:bodyPr/>
           <a:lstStyle/>
           <a:p>
-            <a:pPr/>
-            <a:fld id="{86CB4B4D-7CA3-9044-876B-883B54F8677D}" type="slidenum"/>
+            <a:fld id="{86CB4B4D-7CA3-9044-876B-883B54F8677D}" type="slidenum">
+              <a:t>‹#›</a:t>
+            </a:fld>
+            <a:endParaRPr/>
           </a:p>
         </p:txBody>
       </p:sp>
@@ -1205,10 +1278,8 @@
           <p:nvPr/>
         </p:nvPicPr>
         <p:blipFill>
-          <a:blip r:embed="rId2">
-            <a:extLst/>
-          </a:blip>
-          <a:srcRect l="39434" t="20278" r="0" b="22673"/>
+          <a:blip r:embed="rId2"/>
+          <a:srcRect l="39434" t="20278" b="22673"/>
           <a:stretch>
             <a:fillRect/>
           </a:stretch>
@@ -1231,12 +1302,12 @@
   <p:clrMapOvr>
     <a:masterClrMapping/>
   </p:clrMapOvr>
-  <p:transition xmlns:p14="http://schemas.microsoft.com/office/powerpoint/2010/main" spd="med" advClick="1"/>
+  <p:transition spd="med"/>
 </p:sldLayout>
 </file>
 
 <file path=ppt/slideLayouts/slideLayout12.xml><?xml version="1.0" encoding="utf-8"?>
-<p:sldLayout xmlns:a="http://schemas.openxmlformats.org/drawingml/2006/main" xmlns:r="http://schemas.openxmlformats.org/officeDocument/2006/relationships" xmlns:p="http://schemas.openxmlformats.org/presentationml/2006/main" xmlns:m="http://schemas.openxmlformats.org/officeDocument/2006/math" xmlns:a14="http://schemas.microsoft.com/office/drawing/2010/main" type="tx" showMasterSp="0" showMasterPhAnim="1">
+<p:sldLayout xmlns:a="http://schemas.openxmlformats.org/drawingml/2006/main" xmlns:r="http://schemas.openxmlformats.org/officeDocument/2006/relationships" xmlns:p="http://schemas.openxmlformats.org/presentationml/2006/main" showMasterSp="0" type="tx">
   <p:cSld name="Content">
     <p:bg>
       <p:bgPr>
@@ -1247,6 +1318,7 @@
             <a:lumOff val="3921"/>
           </a:schemeClr>
         </a:solidFill>
+        <a:effectLst/>
       </p:bgPr>
     </p:bg>
     <p:spTree>
@@ -1272,10 +1344,8 @@
           <p:nvPr/>
         </p:nvPicPr>
         <p:blipFill>
-          <a:blip r:embed="rId2">
-            <a:extLst/>
-          </a:blip>
-          <a:srcRect l="0" t="18301" r="41825" b="23071"/>
+          <a:blip r:embed="rId2"/>
+          <a:srcRect t="18301" r="41825" b="23071"/>
           <a:stretch>
             <a:fillRect/>
           </a:stretch>
@@ -1296,7 +1366,9 @@
       <p:sp>
         <p:nvSpPr>
           <p:cNvPr id="164" name="CLICK TO EDIT MASTER TITLE STYLE"/>
-          <p:cNvSpPr txBox="1"/>
+          <p:cNvSpPr txBox="1">
+            <a:spLocks noGrp="1"/>
+          </p:cNvSpPr>
           <p:nvPr>
             <p:ph type="title" hasCustomPrompt="1"/>
           </p:nvPr>
@@ -1318,7 +1390,6 @@
             </a:lvl1pPr>
           </a:lstStyle>
           <a:p>
-            <a:pPr/>
             <a:r>
               <a:t>CLICK TO EDIT MASTER TITLE STYLE</a:t>
             </a:r>
@@ -1328,7 +1399,9 @@
       <p:sp>
         <p:nvSpPr>
           <p:cNvPr id="165" name="Body Level One…"/>
-          <p:cNvSpPr txBox="1"/>
+          <p:cNvSpPr txBox="1">
+            <a:spLocks noGrp="1"/>
+          </p:cNvSpPr>
           <p:nvPr>
             <p:ph type="body" sz="quarter" idx="1" hasCustomPrompt="1"/>
           </p:nvPr>
@@ -1349,61 +1422,54 @@
               <a:buSzTx/>
               <a:buFontTx/>
               <a:buNone/>
-              <a:defRPr cap="all" spc="150" sz="2000"/>
+              <a:defRPr sz="2000" cap="all" spc="150"/>
             </a:lvl1pPr>
             <a:lvl2pPr marL="647700" indent="-190500">
               <a:buFontTx/>
-              <a:defRPr cap="all" spc="150" sz="2000"/>
+              <a:defRPr sz="2000" cap="all" spc="150"/>
             </a:lvl2pPr>
             <a:lvl3pPr marL="1143000" indent="-228600">
               <a:buFontTx/>
-              <a:defRPr cap="all" spc="150" sz="2000"/>
+              <a:defRPr sz="2000" cap="all" spc="150"/>
             </a:lvl3pPr>
             <a:lvl4pPr marL="1625600" indent="-254000">
               <a:buFontTx/>
-              <a:defRPr cap="all" spc="150" sz="2000"/>
+              <a:defRPr sz="2000" cap="all" spc="150"/>
             </a:lvl4pPr>
             <a:lvl5pPr marL="2082800" indent="-254000">
               <a:buFontTx/>
-              <a:defRPr cap="all" spc="150" sz="2000"/>
+              <a:defRPr sz="2000" cap="all" spc="150"/>
             </a:lvl5pPr>
           </a:lstStyle>
           <a:p>
-            <a:pPr/>
             <a:r>
               <a:t>CLICK TO ADD SUBTITLE</a:t>
             </a:r>
           </a:p>
           <a:p>
             <a:pPr lvl="1"/>
-            <a:r>
-              <a:t/>
-            </a:r>
+            <a:endParaRPr/>
           </a:p>
           <a:p>
             <a:pPr lvl="2"/>
-            <a:r>
-              <a:t/>
-            </a:r>
+            <a:endParaRPr/>
           </a:p>
           <a:p>
             <a:pPr lvl="3"/>
-            <a:r>
-              <a:t/>
-            </a:r>
+            <a:endParaRPr/>
           </a:p>
           <a:p>
             <a:pPr lvl="4"/>
-            <a:r>
-              <a:t/>
-            </a:r>
+            <a:endParaRPr/>
           </a:p>
         </p:txBody>
       </p:sp>
       <p:sp>
         <p:nvSpPr>
           <p:cNvPr id="166" name="Text Placeholder 18"/>
-          <p:cNvSpPr/>
+          <p:cNvSpPr>
+            <a:spLocks noGrp="1"/>
+          </p:cNvSpPr>
           <p:nvPr>
             <p:ph type="body" sz="quarter" idx="21" hasCustomPrompt="1"/>
           </p:nvPr>
@@ -1431,7 +1497,6 @@
             </a:lvl1pPr>
           </a:lstStyle>
           <a:p>
-            <a:pPr/>
             <a:r>
               <a:t>Click to add text</a:t>
             </a:r>
@@ -1441,7 +1506,9 @@
       <p:sp>
         <p:nvSpPr>
           <p:cNvPr id="167" name="Text Placeholder 15"/>
-          <p:cNvSpPr/>
+          <p:cNvSpPr>
+            <a:spLocks noGrp="1"/>
+          </p:cNvSpPr>
           <p:nvPr>
             <p:ph type="body" sz="quarter" idx="22" hasCustomPrompt="1"/>
           </p:nvPr>
@@ -1465,11 +1532,10 @@
               <a:buSzTx/>
               <a:buFontTx/>
               <a:buNone/>
-              <a:defRPr cap="all" spc="94" sz="1879"/>
-            </a:lvl1pPr>
-          </a:lstStyle>
-          <a:p>
-            <a:pPr/>
+              <a:defRPr sz="1879" cap="all" spc="94"/>
+            </a:lvl1pPr>
+          </a:lstStyle>
+          <a:p>
             <a:r>
               <a:t>CLICK TO ADD SUBTITLE</a:t>
             </a:r>
@@ -1479,7 +1545,9 @@
       <p:sp>
         <p:nvSpPr>
           <p:cNvPr id="168" name="Text Placeholder 18"/>
-          <p:cNvSpPr/>
+          <p:cNvSpPr>
+            <a:spLocks noGrp="1"/>
+          </p:cNvSpPr>
           <p:nvPr>
             <p:ph type="body" sz="quarter" idx="23" hasCustomPrompt="1"/>
           </p:nvPr>
@@ -1507,7 +1575,6 @@
             </a:lvl1pPr>
           </a:lstStyle>
           <a:p>
-            <a:pPr/>
             <a:r>
               <a:t>Click to add text</a:t>
             </a:r>
@@ -1517,7 +1584,9 @@
       <p:sp>
         <p:nvSpPr>
           <p:cNvPr id="169" name="Text Placeholder 15"/>
-          <p:cNvSpPr/>
+          <p:cNvSpPr>
+            <a:spLocks noGrp="1"/>
+          </p:cNvSpPr>
           <p:nvPr>
             <p:ph type="body" sz="quarter" idx="24" hasCustomPrompt="1"/>
           </p:nvPr>
@@ -1541,11 +1610,10 @@
               <a:buSzTx/>
               <a:buFontTx/>
               <a:buNone/>
-              <a:defRPr cap="all" spc="94" sz="1879"/>
-            </a:lvl1pPr>
-          </a:lstStyle>
-          <a:p>
-            <a:pPr/>
+              <a:defRPr sz="1879" cap="all" spc="94"/>
+            </a:lvl1pPr>
+          </a:lstStyle>
+          <a:p>
             <a:r>
               <a:t>CLICK TO ADD SUBTITLE</a:t>
             </a:r>
@@ -1555,7 +1623,9 @@
       <p:sp>
         <p:nvSpPr>
           <p:cNvPr id="170" name="Text Placeholder 18"/>
-          <p:cNvSpPr/>
+          <p:cNvSpPr>
+            <a:spLocks noGrp="1"/>
+          </p:cNvSpPr>
           <p:nvPr>
             <p:ph type="body" sz="quarter" idx="25" hasCustomPrompt="1"/>
           </p:nvPr>
@@ -1583,7 +1653,6 @@
             </a:lvl1pPr>
           </a:lstStyle>
           <a:p>
-            <a:pPr/>
             <a:r>
               <a:t>Click to add text</a:t>
             </a:r>
@@ -1593,7 +1662,9 @@
       <p:sp>
         <p:nvSpPr>
           <p:cNvPr id="171" name="Slide Number"/>
-          <p:cNvSpPr txBox="1"/>
+          <p:cNvSpPr txBox="1">
+            <a:spLocks noGrp="1"/>
+          </p:cNvSpPr>
           <p:nvPr>
             <p:ph type="sldNum" sz="quarter" idx="2"/>
           </p:nvPr>
@@ -1611,8 +1682,10 @@
           <a:bodyPr/>
           <a:lstStyle/>
           <a:p>
-            <a:pPr/>
-            <a:fld id="{86CB4B4D-7CA3-9044-876B-883B54F8677D}" type="slidenum"/>
+            <a:fld id="{86CB4B4D-7CA3-9044-876B-883B54F8677D}" type="slidenum">
+              <a:t>‹#›</a:t>
+            </a:fld>
+            <a:endParaRPr/>
           </a:p>
         </p:txBody>
       </p:sp>
@@ -1621,12 +1694,12 @@
   <p:clrMapOvr>
     <a:masterClrMapping/>
   </p:clrMapOvr>
-  <p:transition xmlns:p14="http://schemas.microsoft.com/office/powerpoint/2010/main" spd="med" advClick="1"/>
+  <p:transition spd="med"/>
 </p:sldLayout>
 </file>
 
 <file path=ppt/slideLayouts/slideLayout13.xml><?xml version="1.0" encoding="utf-8"?>
-<p:sldLayout xmlns:a="http://schemas.openxmlformats.org/drawingml/2006/main" xmlns:r="http://schemas.openxmlformats.org/officeDocument/2006/relationships" xmlns:p="http://schemas.openxmlformats.org/presentationml/2006/main" xmlns:m="http://schemas.openxmlformats.org/officeDocument/2006/math" xmlns:a14="http://schemas.microsoft.com/office/drawing/2010/main" type="tx" showMasterSp="0" showMasterPhAnim="1">
+<p:sldLayout xmlns:a="http://schemas.openxmlformats.org/drawingml/2006/main" xmlns:r="http://schemas.openxmlformats.org/officeDocument/2006/relationships" xmlns:p="http://schemas.openxmlformats.org/presentationml/2006/main" showMasterSp="0" type="tx">
   <p:cSld name="Timeline 2">
     <p:bg>
       <p:bgPr>
@@ -1637,6 +1710,7 @@
             <a:lumOff val="3921"/>
           </a:schemeClr>
         </a:solidFill>
+        <a:effectLst/>
       </p:bgPr>
     </p:bg>
     <p:spTree>
@@ -1685,13 +1759,16 @@
                 </a:solidFill>
               </a:defRPr>
             </a:pPr>
+            <a:endParaRPr/>
           </a:p>
         </p:txBody>
       </p:sp>
       <p:sp>
         <p:nvSpPr>
           <p:cNvPr id="179" name="CLICK TO EDIT MASTER TITLE STYLE"/>
-          <p:cNvSpPr txBox="1"/>
+          <p:cNvSpPr txBox="1">
+            <a:spLocks noGrp="1"/>
+          </p:cNvSpPr>
           <p:nvPr>
             <p:ph type="title" hasCustomPrompt="1"/>
           </p:nvPr>
@@ -1713,7 +1790,6 @@
             </a:lvl1pPr>
           </a:lstStyle>
           <a:p>
-            <a:pPr/>
             <a:r>
               <a:t>CLICK TO EDIT MASTER TITLE STYLE</a:t>
             </a:r>
@@ -1723,7 +1799,9 @@
       <p:sp>
         <p:nvSpPr>
           <p:cNvPr id="180" name="Body Level One…"/>
-          <p:cNvSpPr txBox="1"/>
+          <p:cNvSpPr txBox="1">
+            <a:spLocks noGrp="1"/>
+          </p:cNvSpPr>
           <p:nvPr>
             <p:ph type="body" sz="quarter" idx="1" hasCustomPrompt="1"/>
           </p:nvPr>
@@ -1744,61 +1822,54 @@
               <a:buSzTx/>
               <a:buFontTx/>
               <a:buNone/>
-              <a:defRPr b="1" sz="1400"/>
+              <a:defRPr sz="1400" b="1"/>
             </a:lvl1pPr>
             <a:lvl2pPr marL="590550" indent="-133350">
               <a:buFontTx/>
-              <a:defRPr b="1" sz="1400"/>
+              <a:defRPr sz="1400" b="1"/>
             </a:lvl2pPr>
             <a:lvl3pPr marL="1074419" indent="-160019">
               <a:buFontTx/>
-              <a:defRPr b="1" sz="1400"/>
+              <a:defRPr sz="1400" b="1"/>
             </a:lvl3pPr>
             <a:lvl4pPr marL="1549400" indent="-177800">
               <a:buFontTx/>
-              <a:defRPr b="1" sz="1400"/>
+              <a:defRPr sz="1400" b="1"/>
             </a:lvl4pPr>
             <a:lvl5pPr marL="2006600" indent="-177800">
               <a:buFontTx/>
-              <a:defRPr b="1" sz="1400"/>
+              <a:defRPr sz="1400" b="1"/>
             </a:lvl5pPr>
           </a:lstStyle>
           <a:p>
-            <a:pPr/>
             <a:r>
               <a:t>Year</a:t>
             </a:r>
           </a:p>
           <a:p>
             <a:pPr lvl="1"/>
-            <a:r>
-              <a:t/>
-            </a:r>
+            <a:endParaRPr/>
           </a:p>
           <a:p>
             <a:pPr lvl="2"/>
-            <a:r>
-              <a:t/>
-            </a:r>
+            <a:endParaRPr/>
           </a:p>
           <a:p>
             <a:pPr lvl="3"/>
-            <a:r>
-              <a:t/>
-            </a:r>
+            <a:endParaRPr/>
           </a:p>
           <a:p>
             <a:pPr lvl="4"/>
-            <a:r>
-              <a:t/>
-            </a:r>
+            <a:endParaRPr/>
           </a:p>
         </p:txBody>
       </p:sp>
       <p:sp>
         <p:nvSpPr>
           <p:cNvPr id="181" name="Text Placeholder 10"/>
-          <p:cNvSpPr/>
+          <p:cNvSpPr>
+            <a:spLocks noGrp="1"/>
+          </p:cNvSpPr>
           <p:nvPr>
             <p:ph type="body" sz="quarter" idx="21" hasCustomPrompt="1"/>
           </p:nvPr>
@@ -1826,7 +1897,6 @@
             </a:lvl1pPr>
           </a:lstStyle>
           <a:p>
-            <a:pPr/>
             <a:r>
               <a:t>MM</a:t>
             </a:r>
@@ -1836,7 +1906,9 @@
       <p:sp>
         <p:nvSpPr>
           <p:cNvPr id="182" name="Text Placeholder 10"/>
-          <p:cNvSpPr/>
+          <p:cNvSpPr>
+            <a:spLocks noGrp="1"/>
+          </p:cNvSpPr>
           <p:nvPr>
             <p:ph type="body" sz="quarter" idx="22" hasCustomPrompt="1"/>
           </p:nvPr>
@@ -1864,7 +1936,6 @@
             </a:lvl1pPr>
           </a:lstStyle>
           <a:p>
-            <a:pPr/>
             <a:r>
               <a:t>MM</a:t>
             </a:r>
@@ -1874,7 +1945,9 @@
       <p:sp>
         <p:nvSpPr>
           <p:cNvPr id="183" name="Text Placeholder 10"/>
-          <p:cNvSpPr/>
+          <p:cNvSpPr>
+            <a:spLocks noGrp="1"/>
+          </p:cNvSpPr>
           <p:nvPr>
             <p:ph type="body" sz="quarter" idx="23" hasCustomPrompt="1"/>
           </p:nvPr>
@@ -1902,7 +1975,6 @@
             </a:lvl1pPr>
           </a:lstStyle>
           <a:p>
-            <a:pPr/>
             <a:r>
               <a:t>MM</a:t>
             </a:r>
@@ -1912,7 +1984,9 @@
       <p:sp>
         <p:nvSpPr>
           <p:cNvPr id="184" name="Text Placeholder 10"/>
-          <p:cNvSpPr/>
+          <p:cNvSpPr>
+            <a:spLocks noGrp="1"/>
+          </p:cNvSpPr>
           <p:nvPr>
             <p:ph type="body" sz="quarter" idx="24" hasCustomPrompt="1"/>
           </p:nvPr>
@@ -1940,7 +2014,6 @@
             </a:lvl1pPr>
           </a:lstStyle>
           <a:p>
-            <a:pPr/>
             <a:r>
               <a:t>MM</a:t>
             </a:r>
@@ -1950,7 +2023,9 @@
       <p:sp>
         <p:nvSpPr>
           <p:cNvPr id="185" name="Text Placeholder 10"/>
-          <p:cNvSpPr/>
+          <p:cNvSpPr>
+            <a:spLocks noGrp="1"/>
+          </p:cNvSpPr>
           <p:nvPr>
             <p:ph type="body" sz="quarter" idx="25" hasCustomPrompt="1"/>
           </p:nvPr>
@@ -1971,11 +2046,10 @@
               <a:buSzTx/>
               <a:buFontTx/>
               <a:buNone/>
-              <a:defRPr b="1" sz="1400"/>
-            </a:lvl1pPr>
-          </a:lstStyle>
-          <a:p>
-            <a:pPr/>
+              <a:defRPr sz="1400" b="1"/>
+            </a:lvl1pPr>
+          </a:lstStyle>
+          <a:p>
             <a:r>
               <a:t>Year</a:t>
             </a:r>
@@ -1985,7 +2059,9 @@
       <p:sp>
         <p:nvSpPr>
           <p:cNvPr id="186" name="Text Placeholder 10"/>
-          <p:cNvSpPr/>
+          <p:cNvSpPr>
+            <a:spLocks noGrp="1"/>
+          </p:cNvSpPr>
           <p:nvPr>
             <p:ph type="body" sz="quarter" idx="26" hasCustomPrompt="1"/>
           </p:nvPr>
@@ -2013,7 +2089,6 @@
             </a:lvl1pPr>
           </a:lstStyle>
           <a:p>
-            <a:pPr/>
             <a:r>
               <a:t>MM</a:t>
             </a:r>
@@ -2023,7 +2098,9 @@
       <p:sp>
         <p:nvSpPr>
           <p:cNvPr id="187" name="Text Placeholder 10"/>
-          <p:cNvSpPr/>
+          <p:cNvSpPr>
+            <a:spLocks noGrp="1"/>
+          </p:cNvSpPr>
           <p:nvPr>
             <p:ph type="body" sz="quarter" idx="27" hasCustomPrompt="1"/>
           </p:nvPr>
@@ -2051,7 +2128,6 @@
             </a:lvl1pPr>
           </a:lstStyle>
           <a:p>
-            <a:pPr/>
             <a:r>
               <a:t>MM</a:t>
             </a:r>
@@ -2061,7 +2137,9 @@
       <p:sp>
         <p:nvSpPr>
           <p:cNvPr id="188" name="Text Placeholder 10"/>
-          <p:cNvSpPr/>
+          <p:cNvSpPr>
+            <a:spLocks noGrp="1"/>
+          </p:cNvSpPr>
           <p:nvPr>
             <p:ph type="body" sz="quarter" idx="28" hasCustomPrompt="1"/>
           </p:nvPr>
@@ -2089,7 +2167,6 @@
             </a:lvl1pPr>
           </a:lstStyle>
           <a:p>
-            <a:pPr/>
             <a:r>
               <a:t>MM</a:t>
             </a:r>
@@ -2099,7 +2176,9 @@
       <p:sp>
         <p:nvSpPr>
           <p:cNvPr id="189" name="Text Placeholder 10"/>
-          <p:cNvSpPr/>
+          <p:cNvSpPr>
+            <a:spLocks noGrp="1"/>
+          </p:cNvSpPr>
           <p:nvPr>
             <p:ph type="body" sz="quarter" idx="29" hasCustomPrompt="1"/>
           </p:nvPr>
@@ -2127,7 +2206,6 @@
             </a:lvl1pPr>
           </a:lstStyle>
           <a:p>
-            <a:pPr/>
             <a:r>
               <a:t>MM</a:t>
             </a:r>
@@ -2137,7 +2215,9 @@
       <p:sp>
         <p:nvSpPr>
           <p:cNvPr id="190" name="Text Placeholder 10"/>
-          <p:cNvSpPr/>
+          <p:cNvSpPr>
+            <a:spLocks noGrp="1"/>
+          </p:cNvSpPr>
           <p:nvPr>
             <p:ph type="body" sz="quarter" idx="30" hasCustomPrompt="1"/>
           </p:nvPr>
@@ -2165,7 +2245,6 @@
             </a:lvl1pPr>
           </a:lstStyle>
           <a:p>
-            <a:pPr/>
             <a:r>
               <a:t>MM</a:t>
             </a:r>
@@ -2175,7 +2254,9 @@
       <p:sp>
         <p:nvSpPr>
           <p:cNvPr id="191" name="Text Placeholder 10"/>
-          <p:cNvSpPr/>
+          <p:cNvSpPr>
+            <a:spLocks noGrp="1"/>
+          </p:cNvSpPr>
           <p:nvPr>
             <p:ph type="body" sz="quarter" idx="31" hasCustomPrompt="1"/>
           </p:nvPr>
@@ -2203,7 +2284,6 @@
             </a:lvl1pPr>
           </a:lstStyle>
           <a:p>
-            <a:pPr/>
             <a:r>
               <a:t>MM</a:t>
             </a:r>
@@ -2213,7 +2293,9 @@
       <p:sp>
         <p:nvSpPr>
           <p:cNvPr id="192" name="Text Placeholder 10"/>
-          <p:cNvSpPr/>
+          <p:cNvSpPr>
+            <a:spLocks noGrp="1"/>
+          </p:cNvSpPr>
           <p:nvPr>
             <p:ph type="body" sz="quarter" idx="32" hasCustomPrompt="1"/>
           </p:nvPr>
@@ -2241,7 +2323,6 @@
             </a:lvl1pPr>
           </a:lstStyle>
           <a:p>
-            <a:pPr/>
             <a:r>
               <a:t>MM</a:t>
             </a:r>
@@ -2251,7 +2332,9 @@
       <p:sp>
         <p:nvSpPr>
           <p:cNvPr id="193" name="Text Placeholder 10"/>
-          <p:cNvSpPr/>
+          <p:cNvSpPr>
+            <a:spLocks noGrp="1"/>
+          </p:cNvSpPr>
           <p:nvPr>
             <p:ph type="body" sz="quarter" idx="33" hasCustomPrompt="1"/>
           </p:nvPr>
@@ -2279,7 +2362,6 @@
             </a:lvl1pPr>
           </a:lstStyle>
           <a:p>
-            <a:pPr/>
             <a:r>
               <a:t>MM</a:t>
             </a:r>
@@ -2289,7 +2371,9 @@
       <p:sp>
         <p:nvSpPr>
           <p:cNvPr id="194" name="Text Placeholder 10"/>
-          <p:cNvSpPr/>
+          <p:cNvSpPr>
+            <a:spLocks noGrp="1"/>
+          </p:cNvSpPr>
           <p:nvPr>
             <p:ph type="body" sz="quarter" idx="34" hasCustomPrompt="1"/>
           </p:nvPr>
@@ -2317,7 +2401,6 @@
             </a:lvl1pPr>
           </a:lstStyle>
           <a:p>
-            <a:pPr/>
             <a:r>
               <a:t>MM</a:t>
             </a:r>
@@ -2327,7 +2410,9 @@
       <p:sp>
         <p:nvSpPr>
           <p:cNvPr id="195" name="Text Placeholder 10"/>
-          <p:cNvSpPr/>
+          <p:cNvSpPr>
+            <a:spLocks noGrp="1"/>
+          </p:cNvSpPr>
           <p:nvPr>
             <p:ph type="body" sz="quarter" idx="35" hasCustomPrompt="1"/>
           </p:nvPr>
@@ -2355,7 +2440,6 @@
             </a:lvl1pPr>
           </a:lstStyle>
           <a:p>
-            <a:pPr/>
             <a:r>
               <a:t>MM</a:t>
             </a:r>
@@ -2365,7 +2449,9 @@
       <p:sp>
         <p:nvSpPr>
           <p:cNvPr id="196" name="Text Placeholder 10"/>
-          <p:cNvSpPr/>
+          <p:cNvSpPr>
+            <a:spLocks noGrp="1"/>
+          </p:cNvSpPr>
           <p:nvPr>
             <p:ph type="body" sz="quarter" idx="36" hasCustomPrompt="1"/>
           </p:nvPr>
@@ -2393,7 +2479,6 @@
             </a:lvl1pPr>
           </a:lstStyle>
           <a:p>
-            <a:pPr/>
             <a:r>
               <a:t>MM</a:t>
             </a:r>
@@ -2403,7 +2488,9 @@
       <p:sp>
         <p:nvSpPr>
           <p:cNvPr id="197" name="Text Placeholder 10"/>
-          <p:cNvSpPr/>
+          <p:cNvSpPr>
+            <a:spLocks noGrp="1"/>
+          </p:cNvSpPr>
           <p:nvPr>
             <p:ph type="body" sz="quarter" idx="37" hasCustomPrompt="1"/>
           </p:nvPr>
@@ -2431,7 +2518,6 @@
             </a:lvl1pPr>
           </a:lstStyle>
           <a:p>
-            <a:pPr/>
             <a:r>
               <a:t>MM</a:t>
             </a:r>
@@ -2441,7 +2527,9 @@
       <p:sp>
         <p:nvSpPr>
           <p:cNvPr id="198" name="Text Placeholder 10"/>
-          <p:cNvSpPr/>
+          <p:cNvSpPr>
+            <a:spLocks noGrp="1"/>
+          </p:cNvSpPr>
           <p:nvPr>
             <p:ph type="body" sz="quarter" idx="38" hasCustomPrompt="1"/>
           </p:nvPr>
@@ -2469,7 +2557,6 @@
             </a:lvl1pPr>
           </a:lstStyle>
           <a:p>
-            <a:pPr/>
             <a:r>
               <a:t>MM</a:t>
             </a:r>
@@ -2479,7 +2566,9 @@
       <p:sp>
         <p:nvSpPr>
           <p:cNvPr id="199" name="Text Placeholder 10"/>
-          <p:cNvSpPr/>
+          <p:cNvSpPr>
+            <a:spLocks noGrp="1"/>
+          </p:cNvSpPr>
           <p:nvPr>
             <p:ph type="body" sz="quarter" idx="39" hasCustomPrompt="1"/>
           </p:nvPr>
@@ -2507,7 +2596,6 @@
             </a:lvl1pPr>
           </a:lstStyle>
           <a:p>
-            <a:pPr/>
             <a:r>
               <a:t>MM</a:t>
             </a:r>
@@ -2517,7 +2605,9 @@
       <p:sp>
         <p:nvSpPr>
           <p:cNvPr id="200" name="Text Placeholder 10"/>
-          <p:cNvSpPr/>
+          <p:cNvSpPr>
+            <a:spLocks noGrp="1"/>
+          </p:cNvSpPr>
           <p:nvPr>
             <p:ph type="body" sz="quarter" idx="40" hasCustomPrompt="1"/>
           </p:nvPr>
@@ -2545,7 +2635,6 @@
             </a:lvl1pPr>
           </a:lstStyle>
           <a:p>
-            <a:pPr/>
             <a:r>
               <a:t>MM</a:t>
             </a:r>
@@ -2555,7 +2644,9 @@
       <p:sp>
         <p:nvSpPr>
           <p:cNvPr id="201" name="Text Placeholder 10"/>
-          <p:cNvSpPr/>
+          <p:cNvSpPr>
+            <a:spLocks noGrp="1"/>
+          </p:cNvSpPr>
           <p:nvPr>
             <p:ph type="body" sz="quarter" idx="41" hasCustomPrompt="1"/>
           </p:nvPr>
@@ -2583,7 +2674,6 @@
             </a:lvl1pPr>
           </a:lstStyle>
           <a:p>
-            <a:pPr/>
             <a:r>
               <a:t>MM</a:t>
             </a:r>
@@ -2593,7 +2683,9 @@
       <p:sp>
         <p:nvSpPr>
           <p:cNvPr id="202" name="Text Placeholder 10"/>
-          <p:cNvSpPr/>
+          <p:cNvSpPr>
+            <a:spLocks noGrp="1"/>
+          </p:cNvSpPr>
           <p:nvPr>
             <p:ph type="body" sz="quarter" idx="42" hasCustomPrompt="1"/>
           </p:nvPr>
@@ -2621,7 +2713,6 @@
             </a:lvl1pPr>
           </a:lstStyle>
           <a:p>
-            <a:pPr/>
             <a:r>
               <a:t>MM</a:t>
             </a:r>
@@ -2631,7 +2722,9 @@
       <p:sp>
         <p:nvSpPr>
           <p:cNvPr id="203" name="Text Placeholder 10"/>
-          <p:cNvSpPr/>
+          <p:cNvSpPr>
+            <a:spLocks noGrp="1"/>
+          </p:cNvSpPr>
           <p:nvPr>
             <p:ph type="body" sz="quarter" idx="43" hasCustomPrompt="1"/>
           </p:nvPr>
@@ -2659,7 +2752,6 @@
             </a:lvl1pPr>
           </a:lstStyle>
           <a:p>
-            <a:pPr/>
             <a:r>
               <a:t>MM</a:t>
             </a:r>
@@ -2669,7 +2761,9 @@
       <p:sp>
         <p:nvSpPr>
           <p:cNvPr id="204" name="Text Placeholder 10"/>
-          <p:cNvSpPr/>
+          <p:cNvSpPr>
+            <a:spLocks noGrp="1"/>
+          </p:cNvSpPr>
           <p:nvPr>
             <p:ph type="body" sz="quarter" idx="44" hasCustomPrompt="1"/>
           </p:nvPr>
@@ -2697,7 +2791,6 @@
             </a:lvl1pPr>
           </a:lstStyle>
           <a:p>
-            <a:pPr/>
             <a:r>
               <a:t>MM</a:t>
             </a:r>
@@ -2707,7 +2800,9 @@
       <p:sp>
         <p:nvSpPr>
           <p:cNvPr id="205" name="Text Placeholder 10"/>
-          <p:cNvSpPr/>
+          <p:cNvSpPr>
+            <a:spLocks noGrp="1"/>
+          </p:cNvSpPr>
           <p:nvPr>
             <p:ph type="body" sz="quarter" idx="45" hasCustomPrompt="1"/>
           </p:nvPr>
@@ -2735,7 +2830,6 @@
             </a:lvl1pPr>
           </a:lstStyle>
           <a:p>
-            <a:pPr/>
             <a:r>
               <a:t>MM</a:t>
             </a:r>
@@ -2774,13 +2868,16 @@
                 </a:solidFill>
               </a:defRPr>
             </a:pPr>
+            <a:endParaRPr/>
           </a:p>
         </p:txBody>
       </p:sp>
       <p:sp>
         <p:nvSpPr>
           <p:cNvPr id="207" name="Slide Number"/>
-          <p:cNvSpPr txBox="1"/>
+          <p:cNvSpPr txBox="1">
+            <a:spLocks noGrp="1"/>
+          </p:cNvSpPr>
           <p:nvPr>
             <p:ph type="sldNum" sz="quarter" idx="2"/>
           </p:nvPr>
@@ -2798,8 +2895,10 @@
           <a:bodyPr/>
           <a:lstStyle/>
           <a:p>
-            <a:pPr/>
-            <a:fld id="{86CB4B4D-7CA3-9044-876B-883B54F8677D}" type="slidenum"/>
+            <a:fld id="{86CB4B4D-7CA3-9044-876B-883B54F8677D}" type="slidenum">
+              <a:t>‹#›</a:t>
+            </a:fld>
+            <a:endParaRPr/>
           </a:p>
         </p:txBody>
       </p:sp>
@@ -2808,12 +2907,12 @@
   <p:clrMapOvr>
     <a:masterClrMapping/>
   </p:clrMapOvr>
-  <p:transition xmlns:p14="http://schemas.microsoft.com/office/powerpoint/2010/main" spd="med" advClick="1"/>
+  <p:transition spd="med"/>
 </p:sldLayout>
 </file>
 
 <file path=ppt/slideLayouts/slideLayout14.xml><?xml version="1.0" encoding="utf-8"?>
-<p:sldLayout xmlns:a="http://schemas.openxmlformats.org/drawingml/2006/main" xmlns:r="http://schemas.openxmlformats.org/officeDocument/2006/relationships" xmlns:p="http://schemas.openxmlformats.org/presentationml/2006/main" xmlns:m="http://schemas.openxmlformats.org/officeDocument/2006/math" xmlns:a14="http://schemas.microsoft.com/office/drawing/2010/main" type="tx" showMasterSp="0" showMasterPhAnim="1">
+<p:sldLayout xmlns:a="http://schemas.openxmlformats.org/drawingml/2006/main" xmlns:r="http://schemas.openxmlformats.org/officeDocument/2006/relationships" xmlns:p="http://schemas.openxmlformats.org/presentationml/2006/main" showMasterSp="0" type="tx">
   <p:cSld name="Smart Art">
     <p:bg>
       <p:bgPr>
@@ -2824,6 +2923,7 @@
             <a:lumOff val="3921"/>
           </a:schemeClr>
         </a:solidFill>
+        <a:effectLst/>
       </p:bgPr>
     </p:bg>
     <p:spTree>
@@ -2843,7 +2943,9 @@
       <p:sp>
         <p:nvSpPr>
           <p:cNvPr id="214" name="CLICK TO EDIT MASTER TITLE STYLE"/>
-          <p:cNvSpPr txBox="1"/>
+          <p:cNvSpPr txBox="1">
+            <a:spLocks noGrp="1"/>
+          </p:cNvSpPr>
           <p:nvPr>
             <p:ph type="title" hasCustomPrompt="1"/>
           </p:nvPr>
@@ -2865,7 +2967,6 @@
             </a:lvl1pPr>
           </a:lstStyle>
           <a:p>
-            <a:pPr/>
             <a:r>
               <a:t>CLICK TO EDIT MASTER TITLE STYLE</a:t>
             </a:r>
@@ -2897,7 +2998,7 @@
           <a:bodyPr lIns="45719" rIns="45719"/>
           <a:lstStyle/>
           <a:p>
-            <a:pPr/>
+            <a:endParaRPr/>
           </a:p>
         </p:txBody>
       </p:sp>
@@ -2926,14 +3027,16 @@
           <a:bodyPr lIns="45719" rIns="45719"/>
           <a:lstStyle/>
           <a:p>
-            <a:pPr/>
+            <a:endParaRPr/>
           </a:p>
         </p:txBody>
       </p:sp>
       <p:sp>
         <p:nvSpPr>
           <p:cNvPr id="217" name="Slide Number"/>
-          <p:cNvSpPr txBox="1"/>
+          <p:cNvSpPr txBox="1">
+            <a:spLocks noGrp="1"/>
+          </p:cNvSpPr>
           <p:nvPr>
             <p:ph type="sldNum" sz="quarter" idx="2"/>
           </p:nvPr>
@@ -2951,15 +3054,19 @@
           <a:bodyPr/>
           <a:lstStyle/>
           <a:p>
-            <a:pPr/>
-            <a:fld id="{86CB4B4D-7CA3-9044-876B-883B54F8677D}" type="slidenum"/>
+            <a:fld id="{86CB4B4D-7CA3-9044-876B-883B54F8677D}" type="slidenum">
+              <a:t>‹#›</a:t>
+            </a:fld>
+            <a:endParaRPr/>
           </a:p>
         </p:txBody>
       </p:sp>
       <p:sp>
         <p:nvSpPr>
           <p:cNvPr id="218" name="Body Level One…"/>
-          <p:cNvSpPr txBox="1"/>
+          <p:cNvSpPr txBox="1">
+            <a:spLocks noGrp="1"/>
+          </p:cNvSpPr>
           <p:nvPr>
             <p:ph type="body" idx="1"/>
           </p:nvPr>
@@ -2977,7 +3084,6 @@
           <a:bodyPr/>
           <a:lstStyle/>
           <a:p>
-            <a:pPr/>
             <a:r>
               <a:t>Body Level One</a:t>
             </a:r>
@@ -3013,12 +3119,12 @@
   <p:clrMapOvr>
     <a:masterClrMapping/>
   </p:clrMapOvr>
-  <p:transition xmlns:p14="http://schemas.microsoft.com/office/powerpoint/2010/main" spd="med" advClick="1"/>
+  <p:transition spd="med"/>
 </p:sldLayout>
 </file>
 
 <file path=ppt/slideLayouts/slideLayout15.xml><?xml version="1.0" encoding="utf-8"?>
-<p:sldLayout xmlns:a="http://schemas.openxmlformats.org/drawingml/2006/main" xmlns:r="http://schemas.openxmlformats.org/officeDocument/2006/relationships" xmlns:p="http://schemas.openxmlformats.org/presentationml/2006/main" xmlns:m="http://schemas.openxmlformats.org/officeDocument/2006/math" xmlns:a14="http://schemas.microsoft.com/office/drawing/2010/main" type="tx" showMasterSp="0" showMasterPhAnim="1">
+<p:sldLayout xmlns:a="http://schemas.openxmlformats.org/drawingml/2006/main" xmlns:r="http://schemas.openxmlformats.org/officeDocument/2006/relationships" xmlns:p="http://schemas.openxmlformats.org/presentationml/2006/main" showMasterSp="0" type="tx">
   <p:cSld name="Team Slide 4 People">
     <p:bg>
       <p:bgPr>
@@ -3029,6 +3135,7 @@
             <a:lumOff val="3921"/>
           </a:schemeClr>
         </a:solidFill>
+        <a:effectLst/>
       </p:bgPr>
     </p:bg>
     <p:spTree>
@@ -3048,7 +3155,9 @@
       <p:sp>
         <p:nvSpPr>
           <p:cNvPr id="225" name="CLICK TO EDIT MASTER TITLE STYLE"/>
-          <p:cNvSpPr txBox="1"/>
+          <p:cNvSpPr txBox="1">
+            <a:spLocks noGrp="1"/>
+          </p:cNvSpPr>
           <p:nvPr>
             <p:ph type="title" hasCustomPrompt="1"/>
           </p:nvPr>
@@ -3070,7 +3179,6 @@
             </a:lvl1pPr>
           </a:lstStyle>
           <a:p>
-            <a:pPr/>
             <a:r>
               <a:t>CLICK TO EDIT MASTER TITLE STYLE</a:t>
             </a:r>
@@ -3080,7 +3188,9 @@
       <p:sp>
         <p:nvSpPr>
           <p:cNvPr id="226" name="Picture Placeholder 10"/>
-          <p:cNvSpPr/>
+          <p:cNvSpPr>
+            <a:spLocks noGrp="1"/>
+          </p:cNvSpPr>
           <p:nvPr>
             <p:ph type="pic" sz="quarter" idx="21"/>
           </p:nvPr>
@@ -3100,14 +3210,16 @@
           </a:bodyPr>
           <a:lstStyle/>
           <a:p>
-            <a:pPr/>
+            <a:endParaRPr/>
           </a:p>
         </p:txBody>
       </p:sp>
       <p:sp>
         <p:nvSpPr>
           <p:cNvPr id="227" name="Picture Placeholder 10"/>
-          <p:cNvSpPr/>
+          <p:cNvSpPr>
+            <a:spLocks noGrp="1"/>
+          </p:cNvSpPr>
           <p:nvPr>
             <p:ph type="pic" sz="quarter" idx="22"/>
           </p:nvPr>
@@ -3127,14 +3239,16 @@
           </a:bodyPr>
           <a:lstStyle/>
           <a:p>
-            <a:pPr/>
+            <a:endParaRPr/>
           </a:p>
         </p:txBody>
       </p:sp>
       <p:sp>
         <p:nvSpPr>
           <p:cNvPr id="228" name="Picture Placeholder 10"/>
-          <p:cNvSpPr/>
+          <p:cNvSpPr>
+            <a:spLocks noGrp="1"/>
+          </p:cNvSpPr>
           <p:nvPr>
             <p:ph type="pic" sz="quarter" idx="23"/>
           </p:nvPr>
@@ -3154,14 +3268,16 @@
           </a:bodyPr>
           <a:lstStyle/>
           <a:p>
-            <a:pPr/>
+            <a:endParaRPr/>
           </a:p>
         </p:txBody>
       </p:sp>
       <p:sp>
         <p:nvSpPr>
           <p:cNvPr id="229" name="Picture Placeholder 10"/>
-          <p:cNvSpPr/>
+          <p:cNvSpPr>
+            <a:spLocks noGrp="1"/>
+          </p:cNvSpPr>
           <p:nvPr>
             <p:ph type="pic" sz="quarter" idx="24"/>
           </p:nvPr>
@@ -3181,14 +3297,16 @@
           </a:bodyPr>
           <a:lstStyle/>
           <a:p>
-            <a:pPr/>
+            <a:endParaRPr/>
           </a:p>
         </p:txBody>
       </p:sp>
       <p:sp>
         <p:nvSpPr>
           <p:cNvPr id="230" name="Body Level One…"/>
-          <p:cNvSpPr txBox="1"/>
+          <p:cNvSpPr txBox="1">
+            <a:spLocks noGrp="1"/>
+          </p:cNvSpPr>
           <p:nvPr>
             <p:ph type="body" sz="quarter" idx="1" hasCustomPrompt="1"/>
           </p:nvPr>
@@ -3209,69 +3327,62 @@
               <a:buSzTx/>
               <a:buFontTx/>
               <a:buNone/>
-              <a:defRPr spc="150" sz="1400"/>
+              <a:defRPr sz="1400" spc="150"/>
             </a:lvl1pPr>
             <a:lvl2pPr marL="0" indent="457200" algn="ctr">
               <a:buSzTx/>
               <a:buFontTx/>
               <a:buNone/>
-              <a:defRPr spc="150" sz="1400"/>
+              <a:defRPr sz="1400" spc="150"/>
             </a:lvl2pPr>
             <a:lvl3pPr marL="0" indent="914400" algn="ctr">
               <a:buSzTx/>
               <a:buFontTx/>
               <a:buNone/>
-              <a:defRPr spc="150" sz="1400"/>
+              <a:defRPr sz="1400" spc="150"/>
             </a:lvl3pPr>
             <a:lvl4pPr marL="0" indent="1371600" algn="ctr">
               <a:buSzTx/>
               <a:buFontTx/>
               <a:buNone/>
-              <a:defRPr spc="150" sz="1400"/>
+              <a:defRPr sz="1400" spc="150"/>
             </a:lvl4pPr>
             <a:lvl5pPr marL="0" indent="1828800" algn="ctr">
               <a:buSzTx/>
               <a:buFontTx/>
               <a:buNone/>
-              <a:defRPr spc="150" sz="1400"/>
+              <a:defRPr sz="1400" spc="150"/>
             </a:lvl5pPr>
           </a:lstStyle>
           <a:p>
-            <a:pPr/>
             <a:r>
               <a:t>CLICK TO EDIT</a:t>
             </a:r>
           </a:p>
           <a:p>
             <a:pPr lvl="1"/>
-            <a:r>
-              <a:t/>
-            </a:r>
+            <a:endParaRPr/>
           </a:p>
           <a:p>
             <a:pPr lvl="2"/>
-            <a:r>
-              <a:t/>
-            </a:r>
+            <a:endParaRPr/>
           </a:p>
           <a:p>
             <a:pPr lvl="3"/>
-            <a:r>
-              <a:t/>
-            </a:r>
+            <a:endParaRPr/>
           </a:p>
           <a:p>
             <a:pPr lvl="4"/>
-            <a:r>
-              <a:t/>
-            </a:r>
+            <a:endParaRPr/>
           </a:p>
         </p:txBody>
       </p:sp>
       <p:sp>
         <p:nvSpPr>
           <p:cNvPr id="231" name="Text Placeholder 2"/>
-          <p:cNvSpPr/>
+          <p:cNvSpPr>
+            <a:spLocks noGrp="1"/>
+          </p:cNvSpPr>
           <p:nvPr>
             <p:ph type="body" sz="quarter" idx="25" hasCustomPrompt="1"/>
           </p:nvPr>
@@ -3292,11 +3403,10 @@
               <a:buSzTx/>
               <a:buFontTx/>
               <a:buNone/>
-              <a:defRPr spc="100" sz="1400"/>
-            </a:lvl1pPr>
-          </a:lstStyle>
-          <a:p>
-            <a:pPr/>
+              <a:defRPr sz="1400" spc="100"/>
+            </a:lvl1pPr>
+          </a:lstStyle>
+          <a:p>
             <a:r>
               <a:t>CLICK TO EDIT</a:t>
             </a:r>
@@ -3306,7 +3416,9 @@
       <p:sp>
         <p:nvSpPr>
           <p:cNvPr id="232" name="Text Placeholder 2"/>
-          <p:cNvSpPr/>
+          <p:cNvSpPr>
+            <a:spLocks noGrp="1"/>
+          </p:cNvSpPr>
           <p:nvPr>
             <p:ph type="body" sz="quarter" idx="26" hasCustomPrompt="1"/>
           </p:nvPr>
@@ -3327,11 +3439,10 @@
               <a:buSzTx/>
               <a:buFontTx/>
               <a:buNone/>
-              <a:defRPr spc="100" sz="1400"/>
-            </a:lvl1pPr>
-          </a:lstStyle>
-          <a:p>
-            <a:pPr/>
+              <a:defRPr sz="1400" spc="100"/>
+            </a:lvl1pPr>
+          </a:lstStyle>
+          <a:p>
             <a:r>
               <a:t>CLICK TO EDIT</a:t>
             </a:r>
@@ -3341,7 +3452,9 @@
       <p:sp>
         <p:nvSpPr>
           <p:cNvPr id="233" name="Text Placeholder 2"/>
-          <p:cNvSpPr/>
+          <p:cNvSpPr>
+            <a:spLocks noGrp="1"/>
+          </p:cNvSpPr>
           <p:nvPr>
             <p:ph type="body" sz="quarter" idx="27" hasCustomPrompt="1"/>
           </p:nvPr>
@@ -3362,11 +3475,10 @@
               <a:buSzTx/>
               <a:buFontTx/>
               <a:buNone/>
-              <a:defRPr spc="100" sz="1400"/>
-            </a:lvl1pPr>
-          </a:lstStyle>
-          <a:p>
-            <a:pPr/>
+              <a:defRPr sz="1400" spc="100"/>
+            </a:lvl1pPr>
+          </a:lstStyle>
+          <a:p>
             <a:r>
               <a:t>CLICK TO EDIT</a:t>
             </a:r>
@@ -3376,7 +3488,9 @@
       <p:sp>
         <p:nvSpPr>
           <p:cNvPr id="234" name="Text Placeholder 2"/>
-          <p:cNvSpPr/>
+          <p:cNvSpPr>
+            <a:spLocks noGrp="1"/>
+          </p:cNvSpPr>
           <p:nvPr>
             <p:ph type="body" sz="quarter" idx="28" hasCustomPrompt="1"/>
           </p:nvPr>
@@ -3397,11 +3511,10 @@
               <a:buSzTx/>
               <a:buFontTx/>
               <a:buNone/>
-              <a:defRPr spc="100" sz="1000"/>
-            </a:lvl1pPr>
-          </a:lstStyle>
-          <a:p>
-            <a:pPr/>
+              <a:defRPr sz="1000" spc="100"/>
+            </a:lvl1pPr>
+          </a:lstStyle>
+          <a:p>
             <a:r>
               <a:t>CLICK TO EDIT</a:t>
             </a:r>
@@ -3411,7 +3524,9 @@
       <p:sp>
         <p:nvSpPr>
           <p:cNvPr id="235" name="Text Placeholder 2"/>
-          <p:cNvSpPr/>
+          <p:cNvSpPr>
+            <a:spLocks noGrp="1"/>
+          </p:cNvSpPr>
           <p:nvPr>
             <p:ph type="body" sz="quarter" idx="29" hasCustomPrompt="1"/>
           </p:nvPr>
@@ -3432,11 +3547,10 @@
               <a:buSzTx/>
               <a:buFontTx/>
               <a:buNone/>
-              <a:defRPr spc="100" sz="1000"/>
-            </a:lvl1pPr>
-          </a:lstStyle>
-          <a:p>
-            <a:pPr/>
+              <a:defRPr sz="1000" spc="100"/>
+            </a:lvl1pPr>
+          </a:lstStyle>
+          <a:p>
             <a:r>
               <a:t>CLICK TO EDIT</a:t>
             </a:r>
@@ -3446,7 +3560,9 @@
       <p:sp>
         <p:nvSpPr>
           <p:cNvPr id="236" name="Text Placeholder 2"/>
-          <p:cNvSpPr/>
+          <p:cNvSpPr>
+            <a:spLocks noGrp="1"/>
+          </p:cNvSpPr>
           <p:nvPr>
             <p:ph type="body" sz="quarter" idx="30" hasCustomPrompt="1"/>
           </p:nvPr>
@@ -3467,11 +3583,10 @@
               <a:buSzTx/>
               <a:buFontTx/>
               <a:buNone/>
-              <a:defRPr spc="100" sz="1000"/>
-            </a:lvl1pPr>
-          </a:lstStyle>
-          <a:p>
-            <a:pPr/>
+              <a:defRPr sz="1000" spc="100"/>
+            </a:lvl1pPr>
+          </a:lstStyle>
+          <a:p>
             <a:r>
               <a:t>CLICK TO EDIT</a:t>
             </a:r>
@@ -3481,7 +3596,9 @@
       <p:sp>
         <p:nvSpPr>
           <p:cNvPr id="237" name="Text Placeholder 2"/>
-          <p:cNvSpPr/>
+          <p:cNvSpPr>
+            <a:spLocks noGrp="1"/>
+          </p:cNvSpPr>
           <p:nvPr>
             <p:ph type="body" sz="quarter" idx="31" hasCustomPrompt="1"/>
           </p:nvPr>
@@ -3502,11 +3619,10 @@
               <a:buSzTx/>
               <a:buFontTx/>
               <a:buNone/>
-              <a:defRPr spc="100" sz="1000"/>
-            </a:lvl1pPr>
-          </a:lstStyle>
-          <a:p>
-            <a:pPr/>
+              <a:defRPr sz="1000" spc="100"/>
+            </a:lvl1pPr>
+          </a:lstStyle>
+          <a:p>
             <a:r>
               <a:t>CLICK TO EDIT</a:t>
             </a:r>
@@ -3516,7 +3632,9 @@
       <p:sp>
         <p:nvSpPr>
           <p:cNvPr id="238" name="Slide Number"/>
-          <p:cNvSpPr txBox="1"/>
+          <p:cNvSpPr txBox="1">
+            <a:spLocks noGrp="1"/>
+          </p:cNvSpPr>
           <p:nvPr>
             <p:ph type="sldNum" sz="quarter" idx="2"/>
           </p:nvPr>
@@ -3534,8 +3652,10 @@
           <a:bodyPr/>
           <a:lstStyle/>
           <a:p>
-            <a:pPr/>
-            <a:fld id="{86CB4B4D-7CA3-9044-876B-883B54F8677D}" type="slidenum"/>
+            <a:fld id="{86CB4B4D-7CA3-9044-876B-883B54F8677D}" type="slidenum">
+              <a:t>‹#›</a:t>
+            </a:fld>
+            <a:endParaRPr/>
           </a:p>
         </p:txBody>
       </p:sp>
@@ -3564,7 +3684,7 @@
           <a:bodyPr lIns="45719" rIns="45719"/>
           <a:lstStyle/>
           <a:p>
-            <a:pPr/>
+            <a:endParaRPr/>
           </a:p>
         </p:txBody>
       </p:sp>
@@ -3593,7 +3713,7 @@
           <a:bodyPr lIns="45719" rIns="45719"/>
           <a:lstStyle/>
           <a:p>
-            <a:pPr/>
+            <a:endParaRPr/>
           </a:p>
         </p:txBody>
       </p:sp>
@@ -3602,12 +3722,12 @@
   <p:clrMapOvr>
     <a:masterClrMapping/>
   </p:clrMapOvr>
-  <p:transition xmlns:p14="http://schemas.microsoft.com/office/powerpoint/2010/main" spd="med" advClick="1"/>
+  <p:transition spd="med"/>
 </p:sldLayout>
 </file>
 
 <file path=ppt/slideLayouts/slideLayout16.xml><?xml version="1.0" encoding="utf-8"?>
-<p:sldLayout xmlns:a="http://schemas.openxmlformats.org/drawingml/2006/main" xmlns:r="http://schemas.openxmlformats.org/officeDocument/2006/relationships" xmlns:p="http://schemas.openxmlformats.org/presentationml/2006/main" xmlns:m="http://schemas.openxmlformats.org/officeDocument/2006/math" xmlns:a14="http://schemas.microsoft.com/office/drawing/2010/main" type="tx" showMasterSp="0" showMasterPhAnim="1">
+<p:sldLayout xmlns:a="http://schemas.openxmlformats.org/drawingml/2006/main" xmlns:r="http://schemas.openxmlformats.org/officeDocument/2006/relationships" xmlns:p="http://schemas.openxmlformats.org/presentationml/2006/main" showMasterSp="0" type="tx">
   <p:cSld name="Team Slide 8 People">
     <p:spTree>
       <p:nvGrpSpPr>
@@ -3626,7 +3746,9 @@
       <p:sp>
         <p:nvSpPr>
           <p:cNvPr id="247" name="CLICK TO EDIT MASTER TITLE STYLE"/>
-          <p:cNvSpPr txBox="1"/>
+          <p:cNvSpPr txBox="1">
+            <a:spLocks noGrp="1"/>
+          </p:cNvSpPr>
           <p:nvPr>
             <p:ph type="title" hasCustomPrompt="1"/>
           </p:nvPr>
@@ -3648,7 +3770,6 @@
             </a:lvl1pPr>
           </a:lstStyle>
           <a:p>
-            <a:pPr/>
             <a:r>
               <a:t>CLICK TO EDIT MASTER TITLE STYLE</a:t>
             </a:r>
@@ -3658,7 +3779,9 @@
       <p:sp>
         <p:nvSpPr>
           <p:cNvPr id="248" name="Picture Placeholder 10"/>
-          <p:cNvSpPr/>
+          <p:cNvSpPr>
+            <a:spLocks noGrp="1"/>
+          </p:cNvSpPr>
           <p:nvPr>
             <p:ph type="pic" sz="quarter" idx="21"/>
           </p:nvPr>
@@ -3678,14 +3801,16 @@
           </a:bodyPr>
           <a:lstStyle/>
           <a:p>
-            <a:pPr/>
+            <a:endParaRPr/>
           </a:p>
         </p:txBody>
       </p:sp>
       <p:sp>
         <p:nvSpPr>
           <p:cNvPr id="249" name="Picture Placeholder 10"/>
-          <p:cNvSpPr/>
+          <p:cNvSpPr>
+            <a:spLocks noGrp="1"/>
+          </p:cNvSpPr>
           <p:nvPr>
             <p:ph type="pic" sz="quarter" idx="22"/>
           </p:nvPr>
@@ -3705,14 +3830,16 @@
           </a:bodyPr>
           <a:lstStyle/>
           <a:p>
-            <a:pPr/>
+            <a:endParaRPr/>
           </a:p>
         </p:txBody>
       </p:sp>
       <p:sp>
         <p:nvSpPr>
           <p:cNvPr id="250" name="Picture Placeholder 10"/>
-          <p:cNvSpPr/>
+          <p:cNvSpPr>
+            <a:spLocks noGrp="1"/>
+          </p:cNvSpPr>
           <p:nvPr>
             <p:ph type="pic" sz="quarter" idx="23"/>
           </p:nvPr>
@@ -3732,14 +3859,16 @@
           </a:bodyPr>
           <a:lstStyle/>
           <a:p>
-            <a:pPr/>
+            <a:endParaRPr/>
           </a:p>
         </p:txBody>
       </p:sp>
       <p:sp>
         <p:nvSpPr>
           <p:cNvPr id="251" name="Picture Placeholder 10"/>
-          <p:cNvSpPr/>
+          <p:cNvSpPr>
+            <a:spLocks noGrp="1"/>
+          </p:cNvSpPr>
           <p:nvPr>
             <p:ph type="pic" sz="quarter" idx="24"/>
           </p:nvPr>
@@ -3759,14 +3888,16 @@
           </a:bodyPr>
           <a:lstStyle/>
           <a:p>
-            <a:pPr/>
+            <a:endParaRPr/>
           </a:p>
         </p:txBody>
       </p:sp>
       <p:sp>
         <p:nvSpPr>
           <p:cNvPr id="252" name="Body Level One…"/>
-          <p:cNvSpPr txBox="1"/>
+          <p:cNvSpPr txBox="1">
+            <a:spLocks noGrp="1"/>
+          </p:cNvSpPr>
           <p:nvPr>
             <p:ph type="body" sz="quarter" idx="1" hasCustomPrompt="1"/>
           </p:nvPr>
@@ -3787,69 +3918,62 @@
               <a:buSzTx/>
               <a:buFontTx/>
               <a:buNone/>
-              <a:defRPr spc="150" sz="1000"/>
+              <a:defRPr sz="1000" spc="150"/>
             </a:lvl1pPr>
             <a:lvl2pPr marL="0" indent="457200" algn="ctr">
               <a:buSzTx/>
               <a:buFontTx/>
               <a:buNone/>
-              <a:defRPr spc="150" sz="1000"/>
+              <a:defRPr sz="1000" spc="150"/>
             </a:lvl2pPr>
             <a:lvl3pPr marL="0" indent="914400" algn="ctr">
               <a:buSzTx/>
               <a:buFontTx/>
               <a:buNone/>
-              <a:defRPr spc="150" sz="1000"/>
+              <a:defRPr sz="1000" spc="150"/>
             </a:lvl3pPr>
             <a:lvl4pPr marL="0" indent="1371600" algn="ctr">
               <a:buSzTx/>
               <a:buFontTx/>
               <a:buNone/>
-              <a:defRPr spc="150" sz="1000"/>
+              <a:defRPr sz="1000" spc="150"/>
             </a:lvl4pPr>
             <a:lvl5pPr marL="0" indent="1828800" algn="ctr">
               <a:buSzTx/>
               <a:buFontTx/>
               <a:buNone/>
-              <a:defRPr spc="150" sz="1000"/>
+              <a:defRPr sz="1000" spc="150"/>
             </a:lvl5pPr>
           </a:lstStyle>
           <a:p>
-            <a:pPr/>
             <a:r>
               <a:t>CLICK TO EDIT</a:t>
             </a:r>
           </a:p>
           <a:p>
             <a:pPr lvl="1"/>
-            <a:r>
-              <a:t/>
-            </a:r>
+            <a:endParaRPr/>
           </a:p>
           <a:p>
             <a:pPr lvl="2"/>
-            <a:r>
-              <a:t/>
-            </a:r>
+            <a:endParaRPr/>
           </a:p>
           <a:p>
             <a:pPr lvl="3"/>
-            <a:r>
-              <a:t/>
-            </a:r>
+            <a:endParaRPr/>
           </a:p>
           <a:p>
             <a:pPr lvl="4"/>
-            <a:r>
-              <a:t/>
-            </a:r>
+            <a:endParaRPr/>
           </a:p>
         </p:txBody>
       </p:sp>
       <p:sp>
         <p:nvSpPr>
           <p:cNvPr id="253" name="Text Placeholder 2"/>
-          <p:cNvSpPr/>
+          <p:cNvSpPr>
+            <a:spLocks noGrp="1"/>
+          </p:cNvSpPr>
           <p:nvPr>
             <p:ph type="body" sz="quarter" idx="25" hasCustomPrompt="1"/>
           </p:nvPr>
@@ -3870,11 +3994,10 @@
               <a:buSzTx/>
               <a:buFontTx/>
               <a:buNone/>
-              <a:defRPr spc="100" sz="900"/>
-            </a:lvl1pPr>
-          </a:lstStyle>
-          <a:p>
-            <a:pPr/>
+              <a:defRPr sz="900" spc="100"/>
+            </a:lvl1pPr>
+          </a:lstStyle>
+          <a:p>
             <a:r>
               <a:t>CLICK TO EDIT</a:t>
             </a:r>
@@ -3884,7 +4007,9 @@
       <p:sp>
         <p:nvSpPr>
           <p:cNvPr id="254" name="Text Placeholder 2"/>
-          <p:cNvSpPr/>
+          <p:cNvSpPr>
+            <a:spLocks noGrp="1"/>
+          </p:cNvSpPr>
           <p:nvPr>
             <p:ph type="body" sz="quarter" idx="26" hasCustomPrompt="1"/>
           </p:nvPr>
@@ -3905,11 +4030,10 @@
               <a:buSzTx/>
               <a:buFontTx/>
               <a:buNone/>
-              <a:defRPr spc="100" sz="1000"/>
-            </a:lvl1pPr>
-          </a:lstStyle>
-          <a:p>
-            <a:pPr/>
+              <a:defRPr sz="1000" spc="100"/>
+            </a:lvl1pPr>
+          </a:lstStyle>
+          <a:p>
             <a:r>
               <a:t>CLICK TO EDIT</a:t>
             </a:r>
@@ -3919,7 +4043,9 @@
       <p:sp>
         <p:nvSpPr>
           <p:cNvPr id="255" name="Text Placeholder 2"/>
-          <p:cNvSpPr/>
+          <p:cNvSpPr>
+            <a:spLocks noGrp="1"/>
+          </p:cNvSpPr>
           <p:nvPr>
             <p:ph type="body" sz="quarter" idx="27" hasCustomPrompt="1"/>
           </p:nvPr>
@@ -3940,11 +4066,10 @@
               <a:buSzTx/>
               <a:buFontTx/>
               <a:buNone/>
-              <a:defRPr spc="100" sz="900"/>
-            </a:lvl1pPr>
-          </a:lstStyle>
-          <a:p>
-            <a:pPr/>
+              <a:defRPr sz="900" spc="100"/>
+            </a:lvl1pPr>
+          </a:lstStyle>
+          <a:p>
             <a:r>
               <a:t>CLICK TO EDIT</a:t>
             </a:r>
@@ -3954,7 +4079,9 @@
       <p:sp>
         <p:nvSpPr>
           <p:cNvPr id="256" name="Text Placeholder 2"/>
-          <p:cNvSpPr/>
+          <p:cNvSpPr>
+            <a:spLocks noGrp="1"/>
+          </p:cNvSpPr>
           <p:nvPr>
             <p:ph type="body" sz="quarter" idx="28" hasCustomPrompt="1"/>
           </p:nvPr>
@@ -3975,11 +4102,10 @@
               <a:buSzTx/>
               <a:buFontTx/>
               <a:buNone/>
-              <a:defRPr spc="100" sz="1000"/>
-            </a:lvl1pPr>
-          </a:lstStyle>
-          <a:p>
-            <a:pPr/>
+              <a:defRPr sz="1000" spc="100"/>
+            </a:lvl1pPr>
+          </a:lstStyle>
+          <a:p>
             <a:r>
               <a:t>CLICK TO EDIT</a:t>
             </a:r>
@@ -3989,7 +4115,9 @@
       <p:sp>
         <p:nvSpPr>
           <p:cNvPr id="257" name="Text Placeholder 2"/>
-          <p:cNvSpPr/>
+          <p:cNvSpPr>
+            <a:spLocks noGrp="1"/>
+          </p:cNvSpPr>
           <p:nvPr>
             <p:ph type="body" sz="quarter" idx="29" hasCustomPrompt="1"/>
           </p:nvPr>
@@ -4010,11 +4138,10 @@
               <a:buSzTx/>
               <a:buFontTx/>
               <a:buNone/>
-              <a:defRPr spc="100" sz="900"/>
-            </a:lvl1pPr>
-          </a:lstStyle>
-          <a:p>
-            <a:pPr/>
+              <a:defRPr sz="900" spc="100"/>
+            </a:lvl1pPr>
+          </a:lstStyle>
+          <a:p>
             <a:r>
               <a:t>CLICK TO EDIT</a:t>
             </a:r>
@@ -4024,7 +4151,9 @@
       <p:sp>
         <p:nvSpPr>
           <p:cNvPr id="258" name="Text Placeholder 2"/>
-          <p:cNvSpPr/>
+          <p:cNvSpPr>
+            <a:spLocks noGrp="1"/>
+          </p:cNvSpPr>
           <p:nvPr>
             <p:ph type="body" sz="quarter" idx="30" hasCustomPrompt="1"/>
           </p:nvPr>
@@ -4045,11 +4174,10 @@
               <a:buSzTx/>
               <a:buFontTx/>
               <a:buNone/>
-              <a:defRPr spc="100" sz="1000"/>
-            </a:lvl1pPr>
-          </a:lstStyle>
-          <a:p>
-            <a:pPr/>
+              <a:defRPr sz="1000" spc="100"/>
+            </a:lvl1pPr>
+          </a:lstStyle>
+          <a:p>
             <a:r>
               <a:t>CLICK TO EDIT</a:t>
             </a:r>
@@ -4059,7 +4187,9 @@
       <p:sp>
         <p:nvSpPr>
           <p:cNvPr id="259" name="Text Placeholder 2"/>
-          <p:cNvSpPr/>
+          <p:cNvSpPr>
+            <a:spLocks noGrp="1"/>
+          </p:cNvSpPr>
           <p:nvPr>
             <p:ph type="body" sz="quarter" idx="31" hasCustomPrompt="1"/>
           </p:nvPr>
@@ -4080,11 +4210,10 @@
               <a:buSzTx/>
               <a:buFontTx/>
               <a:buNone/>
-              <a:defRPr spc="100" sz="900"/>
-            </a:lvl1pPr>
-          </a:lstStyle>
-          <a:p>
-            <a:pPr/>
+              <a:defRPr sz="900" spc="100"/>
+            </a:lvl1pPr>
+          </a:lstStyle>
+          <a:p>
             <a:r>
               <a:t>CLICK TO EDIT</a:t>
             </a:r>
@@ -4094,7 +4223,9 @@
       <p:sp>
         <p:nvSpPr>
           <p:cNvPr id="260" name="Picture Placeholder 10"/>
-          <p:cNvSpPr/>
+          <p:cNvSpPr>
+            <a:spLocks noGrp="1"/>
+          </p:cNvSpPr>
           <p:nvPr>
             <p:ph type="pic" sz="quarter" idx="32"/>
           </p:nvPr>
@@ -4114,14 +4245,16 @@
           </a:bodyPr>
           <a:lstStyle/>
           <a:p>
-            <a:pPr/>
+            <a:endParaRPr/>
           </a:p>
         </p:txBody>
       </p:sp>
       <p:sp>
         <p:nvSpPr>
           <p:cNvPr id="261" name="Picture Placeholder 10"/>
-          <p:cNvSpPr/>
+          <p:cNvSpPr>
+            <a:spLocks noGrp="1"/>
+          </p:cNvSpPr>
           <p:nvPr>
             <p:ph type="pic" sz="quarter" idx="33"/>
           </p:nvPr>
@@ -4141,14 +4274,16 @@
           </a:bodyPr>
           <a:lstStyle/>
           <a:p>
-            <a:pPr/>
+            <a:endParaRPr/>
           </a:p>
         </p:txBody>
       </p:sp>
       <p:sp>
         <p:nvSpPr>
           <p:cNvPr id="262" name="Picture Placeholder 10"/>
-          <p:cNvSpPr/>
+          <p:cNvSpPr>
+            <a:spLocks noGrp="1"/>
+          </p:cNvSpPr>
           <p:nvPr>
             <p:ph type="pic" sz="quarter" idx="34"/>
           </p:nvPr>
@@ -4168,14 +4303,16 @@
           </a:bodyPr>
           <a:lstStyle/>
           <a:p>
-            <a:pPr/>
+            <a:endParaRPr/>
           </a:p>
         </p:txBody>
       </p:sp>
       <p:sp>
         <p:nvSpPr>
           <p:cNvPr id="263" name="Picture Placeholder 10"/>
-          <p:cNvSpPr/>
+          <p:cNvSpPr>
+            <a:spLocks noGrp="1"/>
+          </p:cNvSpPr>
           <p:nvPr>
             <p:ph type="pic" sz="quarter" idx="35"/>
           </p:nvPr>
@@ -4195,14 +4332,16 @@
           </a:bodyPr>
           <a:lstStyle/>
           <a:p>
-            <a:pPr/>
+            <a:endParaRPr/>
           </a:p>
         </p:txBody>
       </p:sp>
       <p:sp>
         <p:nvSpPr>
           <p:cNvPr id="264" name="Text Placeholder 2"/>
-          <p:cNvSpPr/>
+          <p:cNvSpPr>
+            <a:spLocks noGrp="1"/>
+          </p:cNvSpPr>
           <p:nvPr>
             <p:ph type="body" sz="quarter" idx="36" hasCustomPrompt="1"/>
           </p:nvPr>
@@ -4223,11 +4362,10 @@
               <a:buSzTx/>
               <a:buFontTx/>
               <a:buNone/>
-              <a:defRPr spc="100" sz="1000"/>
-            </a:lvl1pPr>
-          </a:lstStyle>
-          <a:p>
-            <a:pPr/>
+              <a:defRPr sz="1000" spc="100"/>
+            </a:lvl1pPr>
+          </a:lstStyle>
+          <a:p>
             <a:r>
               <a:t>CLICK TO EDIT</a:t>
             </a:r>
@@ -4237,7 +4375,9 @@
       <p:sp>
         <p:nvSpPr>
           <p:cNvPr id="265" name="Text Placeholder 2"/>
-          <p:cNvSpPr/>
+          <p:cNvSpPr>
+            <a:spLocks noGrp="1"/>
+          </p:cNvSpPr>
           <p:nvPr>
             <p:ph type="body" sz="quarter" idx="37" hasCustomPrompt="1"/>
           </p:nvPr>
@@ -4258,11 +4398,10 @@
               <a:buSzTx/>
               <a:buFontTx/>
               <a:buNone/>
-              <a:defRPr spc="100" sz="900"/>
-            </a:lvl1pPr>
-          </a:lstStyle>
-          <a:p>
-            <a:pPr/>
+              <a:defRPr sz="900" spc="100"/>
+            </a:lvl1pPr>
+          </a:lstStyle>
+          <a:p>
             <a:r>
               <a:t>CLICK TO EDIT</a:t>
             </a:r>
@@ -4272,7 +4411,9 @@
       <p:sp>
         <p:nvSpPr>
           <p:cNvPr id="266" name="Text Placeholder 2"/>
-          <p:cNvSpPr/>
+          <p:cNvSpPr>
+            <a:spLocks noGrp="1"/>
+          </p:cNvSpPr>
           <p:nvPr>
             <p:ph type="body" sz="quarter" idx="38" hasCustomPrompt="1"/>
           </p:nvPr>
@@ -4293,11 +4434,10 @@
               <a:buSzTx/>
               <a:buFontTx/>
               <a:buNone/>
-              <a:defRPr spc="100" sz="1000"/>
-            </a:lvl1pPr>
-          </a:lstStyle>
-          <a:p>
-            <a:pPr/>
+              <a:defRPr sz="1000" spc="100"/>
+            </a:lvl1pPr>
+          </a:lstStyle>
+          <a:p>
             <a:r>
               <a:t>CLICK TO EDIT</a:t>
             </a:r>
@@ -4307,7 +4447,9 @@
       <p:sp>
         <p:nvSpPr>
           <p:cNvPr id="267" name="Text Placeholder 2"/>
-          <p:cNvSpPr/>
+          <p:cNvSpPr>
+            <a:spLocks noGrp="1"/>
+          </p:cNvSpPr>
           <p:nvPr>
             <p:ph type="body" sz="quarter" idx="39" hasCustomPrompt="1"/>
           </p:nvPr>
@@ -4328,11 +4470,10 @@
               <a:buSzTx/>
               <a:buFontTx/>
               <a:buNone/>
-              <a:defRPr spc="100" sz="900"/>
-            </a:lvl1pPr>
-          </a:lstStyle>
-          <a:p>
-            <a:pPr/>
+              <a:defRPr sz="900" spc="100"/>
+            </a:lvl1pPr>
+          </a:lstStyle>
+          <a:p>
             <a:r>
               <a:t>CLICK TO EDIT</a:t>
             </a:r>
@@ -4342,7 +4483,9 @@
       <p:sp>
         <p:nvSpPr>
           <p:cNvPr id="268" name="Text Placeholder 2"/>
-          <p:cNvSpPr/>
+          <p:cNvSpPr>
+            <a:spLocks noGrp="1"/>
+          </p:cNvSpPr>
           <p:nvPr>
             <p:ph type="body" sz="quarter" idx="40" hasCustomPrompt="1"/>
           </p:nvPr>
@@ -4363,11 +4506,10 @@
               <a:buSzTx/>
               <a:buFontTx/>
               <a:buNone/>
-              <a:defRPr spc="100" sz="1000"/>
-            </a:lvl1pPr>
-          </a:lstStyle>
-          <a:p>
-            <a:pPr/>
+              <a:defRPr sz="1000" spc="100"/>
+            </a:lvl1pPr>
+          </a:lstStyle>
+          <a:p>
             <a:r>
               <a:t>CLICK TO EDIT</a:t>
             </a:r>
@@ -4377,7 +4519,9 @@
       <p:sp>
         <p:nvSpPr>
           <p:cNvPr id="269" name="Text Placeholder 2"/>
-          <p:cNvSpPr/>
+          <p:cNvSpPr>
+            <a:spLocks noGrp="1"/>
+          </p:cNvSpPr>
           <p:nvPr>
             <p:ph type="body" sz="quarter" idx="41" hasCustomPrompt="1"/>
           </p:nvPr>
@@ -4398,11 +4542,10 @@
               <a:buSzTx/>
               <a:buFontTx/>
               <a:buNone/>
-              <a:defRPr spc="100" sz="900"/>
-            </a:lvl1pPr>
-          </a:lstStyle>
-          <a:p>
-            <a:pPr/>
+              <a:defRPr sz="900" spc="100"/>
+            </a:lvl1pPr>
+          </a:lstStyle>
+          <a:p>
             <a:r>
               <a:t>CLICK TO EDIT</a:t>
             </a:r>
@@ -4412,7 +4555,9 @@
       <p:sp>
         <p:nvSpPr>
           <p:cNvPr id="270" name="Text Placeholder 2"/>
-          <p:cNvSpPr/>
+          <p:cNvSpPr>
+            <a:spLocks noGrp="1"/>
+          </p:cNvSpPr>
           <p:nvPr>
             <p:ph type="body" sz="quarter" idx="42" hasCustomPrompt="1"/>
           </p:nvPr>
@@ -4433,11 +4578,10 @@
               <a:buSzTx/>
               <a:buFontTx/>
               <a:buNone/>
-              <a:defRPr spc="100" sz="1000"/>
-            </a:lvl1pPr>
-          </a:lstStyle>
-          <a:p>
-            <a:pPr/>
+              <a:defRPr sz="1000" spc="100"/>
+            </a:lvl1pPr>
+          </a:lstStyle>
+          <a:p>
             <a:r>
               <a:t>CLICK TO EDIT</a:t>
             </a:r>
@@ -4447,7 +4591,9 @@
       <p:sp>
         <p:nvSpPr>
           <p:cNvPr id="271" name="Text Placeholder 2"/>
-          <p:cNvSpPr/>
+          <p:cNvSpPr>
+            <a:spLocks noGrp="1"/>
+          </p:cNvSpPr>
           <p:nvPr>
             <p:ph type="body" sz="quarter" idx="43" hasCustomPrompt="1"/>
           </p:nvPr>
@@ -4468,11 +4614,10 @@
               <a:buSzTx/>
               <a:buFontTx/>
               <a:buNone/>
-              <a:defRPr spc="100" sz="900"/>
-            </a:lvl1pPr>
-          </a:lstStyle>
-          <a:p>
-            <a:pPr/>
+              <a:defRPr sz="900" spc="100"/>
+            </a:lvl1pPr>
+          </a:lstStyle>
+          <a:p>
             <a:r>
               <a:t>CLICK TO EDIT</a:t>
             </a:r>
@@ -4482,7 +4627,9 @@
       <p:sp>
         <p:nvSpPr>
           <p:cNvPr id="272" name="Slide Number"/>
-          <p:cNvSpPr txBox="1"/>
+          <p:cNvSpPr txBox="1">
+            <a:spLocks noGrp="1"/>
+          </p:cNvSpPr>
           <p:nvPr>
             <p:ph type="sldNum" sz="quarter" idx="2"/>
           </p:nvPr>
@@ -4508,8 +4655,10 @@
             </a:lvl1pPr>
           </a:lstStyle>
           <a:p>
-            <a:pPr/>
-            <a:fld id="{86CB4B4D-7CA3-9044-876B-883B54F8677D}" type="slidenum"/>
+            <a:fld id="{86CB4B4D-7CA3-9044-876B-883B54F8677D}" type="slidenum">
+              <a:t>‹#›</a:t>
+            </a:fld>
+            <a:endParaRPr/>
           </a:p>
         </p:txBody>
       </p:sp>
@@ -4522,9 +4671,7 @@
           <p:nvPr/>
         </p:nvPicPr>
         <p:blipFill>
-          <a:blip r:embed="rId2">
-            <a:extLst/>
-          </a:blip>
+          <a:blip r:embed="rId2"/>
           <a:stretch>
             <a:fillRect/>
           </a:stretch>
@@ -4551,9 +4698,7 @@
           <p:nvPr/>
         </p:nvPicPr>
         <p:blipFill>
-          <a:blip r:embed="rId3">
-            <a:extLst/>
-          </a:blip>
+          <a:blip r:embed="rId3"/>
           <a:stretch>
             <a:fillRect/>
           </a:stretch>
@@ -4576,12 +4721,12 @@
   <p:clrMapOvr>
     <a:masterClrMapping/>
   </p:clrMapOvr>
-  <p:transition xmlns:p14="http://schemas.microsoft.com/office/powerpoint/2010/main" spd="med" advClick="1"/>
+  <p:transition spd="med"/>
 </p:sldLayout>
 </file>
 
 <file path=ppt/slideLayouts/slideLayout17.xml><?xml version="1.0" encoding="utf-8"?>
-<p:sldLayout xmlns:a="http://schemas.openxmlformats.org/drawingml/2006/main" xmlns:r="http://schemas.openxmlformats.org/officeDocument/2006/relationships" xmlns:p="http://schemas.openxmlformats.org/presentationml/2006/main" xmlns:m="http://schemas.openxmlformats.org/officeDocument/2006/math" xmlns:a14="http://schemas.microsoft.com/office/drawing/2010/main" type="tx" showMasterSp="0" showMasterPhAnim="1">
+<p:sldLayout xmlns:a="http://schemas.openxmlformats.org/drawingml/2006/main" xmlns:r="http://schemas.openxmlformats.org/officeDocument/2006/relationships" xmlns:p="http://schemas.openxmlformats.org/presentationml/2006/main" showMasterSp="0" type="tx">
   <p:cSld name="3  Content">
     <p:bg>
       <p:bgPr>
@@ -4592,6 +4737,7 @@
             <a:lumOff val="3921"/>
           </a:schemeClr>
         </a:solidFill>
+        <a:effectLst/>
       </p:bgPr>
     </p:bg>
     <p:spTree>
@@ -4611,7 +4757,9 @@
       <p:sp>
         <p:nvSpPr>
           <p:cNvPr id="281" name="CLICK TO EDIT MASTER TITLE STYLE"/>
-          <p:cNvSpPr txBox="1"/>
+          <p:cNvSpPr txBox="1">
+            <a:spLocks noGrp="1"/>
+          </p:cNvSpPr>
           <p:nvPr>
             <p:ph type="title" hasCustomPrompt="1"/>
           </p:nvPr>
@@ -4633,7 +4781,6 @@
             </a:lvl1pPr>
           </a:lstStyle>
           <a:p>
-            <a:pPr/>
             <a:r>
               <a:t>CLICK TO EDIT MASTER TITLE STYLE</a:t>
             </a:r>
@@ -4643,7 +4790,9 @@
       <p:sp>
         <p:nvSpPr>
           <p:cNvPr id="282" name="Body Level One…"/>
-          <p:cNvSpPr txBox="1"/>
+          <p:cNvSpPr txBox="1">
+            <a:spLocks noGrp="1"/>
+          </p:cNvSpPr>
           <p:nvPr>
             <p:ph type="body" sz="quarter" idx="1" hasCustomPrompt="1"/>
           </p:nvPr>
@@ -4692,41 +4841,34 @@
             </a:lvl5pPr>
           </a:lstStyle>
           <a:p>
-            <a:pPr/>
             <a:r>
               <a:t>Click to add content</a:t>
             </a:r>
           </a:p>
           <a:p>
             <a:pPr lvl="1"/>
-            <a:r>
-              <a:t/>
-            </a:r>
+            <a:endParaRPr/>
           </a:p>
           <a:p>
             <a:pPr lvl="2"/>
-            <a:r>
-              <a:t/>
-            </a:r>
+            <a:endParaRPr/>
           </a:p>
           <a:p>
             <a:pPr lvl="3"/>
-            <a:r>
-              <a:t/>
-            </a:r>
+            <a:endParaRPr/>
           </a:p>
           <a:p>
             <a:pPr lvl="4"/>
-            <a:r>
-              <a:t/>
-            </a:r>
+            <a:endParaRPr/>
           </a:p>
         </p:txBody>
       </p:sp>
       <p:sp>
         <p:nvSpPr>
           <p:cNvPr id="283" name="Text Placeholder 2"/>
-          <p:cNvSpPr/>
+          <p:cNvSpPr>
+            <a:spLocks noGrp="1"/>
+          </p:cNvSpPr>
           <p:nvPr>
             <p:ph type="body" sz="quarter" idx="21" hasCustomPrompt="1"/>
           </p:nvPr>
@@ -4747,11 +4889,10 @@
               <a:buSzTx/>
               <a:buFontTx/>
               <a:buNone/>
-              <a:defRPr spc="100" sz="3200"/>
-            </a:lvl1pPr>
-          </a:lstStyle>
-          <a:p>
-            <a:pPr/>
+              <a:defRPr sz="3200" spc="100"/>
+            </a:lvl1pPr>
+          </a:lstStyle>
+          <a:p>
             <a:r>
               <a:t>#</a:t>
             </a:r>
@@ -4761,7 +4902,9 @@
       <p:sp>
         <p:nvSpPr>
           <p:cNvPr id="284" name="Text Placeholder 2"/>
-          <p:cNvSpPr/>
+          <p:cNvSpPr>
+            <a:spLocks noGrp="1"/>
+          </p:cNvSpPr>
           <p:nvPr>
             <p:ph type="body" sz="quarter" idx="22" hasCustomPrompt="1"/>
           </p:nvPr>
@@ -4782,11 +4925,10 @@
               <a:buSzTx/>
               <a:buFontTx/>
               <a:buNone/>
-              <a:defRPr spc="100" sz="1400"/>
-            </a:lvl1pPr>
-          </a:lstStyle>
-          <a:p>
-            <a:pPr/>
+              <a:defRPr sz="1400" spc="100"/>
+            </a:lvl1pPr>
+          </a:lstStyle>
+          <a:p>
             <a:r>
               <a:t>CLICK TO EDIT</a:t>
             </a:r>
@@ -4796,7 +4938,9 @@
       <p:sp>
         <p:nvSpPr>
           <p:cNvPr id="285" name="Text Placeholder 4"/>
-          <p:cNvSpPr/>
+          <p:cNvSpPr>
+            <a:spLocks noGrp="1"/>
+          </p:cNvSpPr>
           <p:nvPr>
             <p:ph type="body" sz="quarter" idx="23" hasCustomPrompt="1"/>
           </p:nvPr>
@@ -4817,11 +4961,10 @@
               <a:buSzTx/>
               <a:buFontTx/>
               <a:buNone/>
-              <a:defRPr spc="100" sz="3200"/>
-            </a:lvl1pPr>
-          </a:lstStyle>
-          <a:p>
-            <a:pPr/>
+              <a:defRPr sz="3200" spc="100"/>
+            </a:lvl1pPr>
+          </a:lstStyle>
+          <a:p>
             <a:r>
               <a:t>#</a:t>
             </a:r>
@@ -4831,7 +4974,9 @@
       <p:sp>
         <p:nvSpPr>
           <p:cNvPr id="286" name="Text Placeholder 4"/>
-          <p:cNvSpPr/>
+          <p:cNvSpPr>
+            <a:spLocks noGrp="1"/>
+          </p:cNvSpPr>
           <p:nvPr>
             <p:ph type="body" sz="quarter" idx="24" hasCustomPrompt="1"/>
           </p:nvPr>
@@ -4852,11 +4997,10 @@
               <a:buSzTx/>
               <a:buFontTx/>
               <a:buNone/>
-              <a:defRPr spc="100" sz="1400"/>
-            </a:lvl1pPr>
-          </a:lstStyle>
-          <a:p>
-            <a:pPr/>
+              <a:defRPr sz="1400" spc="100"/>
+            </a:lvl1pPr>
+          </a:lstStyle>
+          <a:p>
             <a:r>
               <a:t>CLICK TO EDIT</a:t>
             </a:r>
@@ -4866,7 +5010,9 @@
       <p:sp>
         <p:nvSpPr>
           <p:cNvPr id="287" name="Text Placeholder 2"/>
-          <p:cNvSpPr/>
+          <p:cNvSpPr>
+            <a:spLocks noGrp="1"/>
+          </p:cNvSpPr>
           <p:nvPr>
             <p:ph type="body" sz="quarter" idx="25" hasCustomPrompt="1"/>
           </p:nvPr>
@@ -4887,11 +5033,10 @@
               <a:buSzTx/>
               <a:buFontTx/>
               <a:buNone/>
-              <a:defRPr spc="100" sz="3200"/>
-            </a:lvl1pPr>
-          </a:lstStyle>
-          <a:p>
-            <a:pPr/>
+              <a:defRPr sz="3200" spc="100"/>
+            </a:lvl1pPr>
+          </a:lstStyle>
+          <a:p>
             <a:r>
               <a:t>#</a:t>
             </a:r>
@@ -4901,7 +5046,9 @@
       <p:sp>
         <p:nvSpPr>
           <p:cNvPr id="288" name="Text Placeholder 2"/>
-          <p:cNvSpPr/>
+          <p:cNvSpPr>
+            <a:spLocks noGrp="1"/>
+          </p:cNvSpPr>
           <p:nvPr>
             <p:ph type="body" sz="quarter" idx="26" hasCustomPrompt="1"/>
           </p:nvPr>
@@ -4922,11 +5069,10 @@
               <a:buSzTx/>
               <a:buFontTx/>
               <a:buNone/>
-              <a:defRPr spc="100" sz="1400"/>
-            </a:lvl1pPr>
-          </a:lstStyle>
-          <a:p>
-            <a:pPr/>
+              <a:defRPr sz="1400" spc="100"/>
+            </a:lvl1pPr>
+          </a:lstStyle>
+          <a:p>
             <a:r>
               <a:t>CLICK TO EDIT</a:t>
             </a:r>
@@ -4936,7 +5082,9 @@
       <p:sp>
         <p:nvSpPr>
           <p:cNvPr id="289" name="Text Placeholder 2"/>
-          <p:cNvSpPr/>
+          <p:cNvSpPr>
+            <a:spLocks noGrp="1"/>
+          </p:cNvSpPr>
           <p:nvPr>
             <p:ph type="body" sz="quarter" idx="27" hasCustomPrompt="1"/>
           </p:nvPr>
@@ -4957,11 +5105,10 @@
               <a:buSzTx/>
               <a:buFontTx/>
               <a:buNone/>
-              <a:defRPr spc="100" sz="3200"/>
-            </a:lvl1pPr>
-          </a:lstStyle>
-          <a:p>
-            <a:pPr/>
+              <a:defRPr sz="3200" spc="100"/>
+            </a:lvl1pPr>
+          </a:lstStyle>
+          <a:p>
             <a:r>
               <a:t>#</a:t>
             </a:r>
@@ -4971,7 +5118,9 @@
       <p:sp>
         <p:nvSpPr>
           <p:cNvPr id="290" name="Text Placeholder 2"/>
-          <p:cNvSpPr/>
+          <p:cNvSpPr>
+            <a:spLocks noGrp="1"/>
+          </p:cNvSpPr>
           <p:nvPr>
             <p:ph type="body" sz="quarter" idx="28" hasCustomPrompt="1"/>
           </p:nvPr>
@@ -4992,11 +5141,10 @@
               <a:buSzTx/>
               <a:buFontTx/>
               <a:buNone/>
-              <a:defRPr spc="100" sz="1400"/>
-            </a:lvl1pPr>
-          </a:lstStyle>
-          <a:p>
-            <a:pPr/>
+              <a:defRPr sz="1400" spc="100"/>
+            </a:lvl1pPr>
+          </a:lstStyle>
+          <a:p>
             <a:r>
               <a:t>CLICK TO EDIT</a:t>
             </a:r>
@@ -5028,7 +5176,7 @@
           <a:bodyPr lIns="45719" rIns="45719"/>
           <a:lstStyle/>
           <a:p>
-            <a:pPr/>
+            <a:endParaRPr/>
           </a:p>
         </p:txBody>
       </p:sp>
@@ -5057,14 +5205,16 @@
           <a:bodyPr lIns="45719" rIns="45719"/>
           <a:lstStyle/>
           <a:p>
-            <a:pPr/>
+            <a:endParaRPr/>
           </a:p>
         </p:txBody>
       </p:sp>
       <p:sp>
         <p:nvSpPr>
           <p:cNvPr id="293" name="Slide Number"/>
-          <p:cNvSpPr txBox="1"/>
+          <p:cNvSpPr txBox="1">
+            <a:spLocks noGrp="1"/>
+          </p:cNvSpPr>
           <p:nvPr>
             <p:ph type="sldNum" sz="quarter" idx="2"/>
           </p:nvPr>
@@ -5082,8 +5232,10 @@
           <a:bodyPr/>
           <a:lstStyle/>
           <a:p>
-            <a:pPr/>
-            <a:fld id="{86CB4B4D-7CA3-9044-876B-883B54F8677D}" type="slidenum"/>
+            <a:fld id="{86CB4B4D-7CA3-9044-876B-883B54F8677D}" type="slidenum">
+              <a:t>‹#›</a:t>
+            </a:fld>
+            <a:endParaRPr/>
           </a:p>
         </p:txBody>
       </p:sp>
@@ -5092,12 +5244,12 @@
   <p:clrMapOvr>
     <a:masterClrMapping/>
   </p:clrMapOvr>
-  <p:transition xmlns:p14="http://schemas.microsoft.com/office/powerpoint/2010/main" spd="med" advClick="1"/>
+  <p:transition spd="med"/>
 </p:sldLayout>
 </file>
 
 <file path=ppt/slideLayouts/slideLayout18.xml><?xml version="1.0" encoding="utf-8"?>
-<p:sldLayout xmlns:a="http://schemas.openxmlformats.org/drawingml/2006/main" xmlns:r="http://schemas.openxmlformats.org/officeDocument/2006/relationships" xmlns:p="http://schemas.openxmlformats.org/presentationml/2006/main" xmlns:m="http://schemas.openxmlformats.org/officeDocument/2006/math" xmlns:a14="http://schemas.microsoft.com/office/drawing/2010/main" type="tx" showMasterSp="0" showMasterPhAnim="1">
+<p:sldLayout xmlns:a="http://schemas.openxmlformats.org/drawingml/2006/main" xmlns:r="http://schemas.openxmlformats.org/officeDocument/2006/relationships" xmlns:p="http://schemas.openxmlformats.org/presentationml/2006/main" showMasterSp="0" type="tx">
   <p:cSld name="Summary">
     <p:bg>
       <p:bgPr>
@@ -5108,6 +5260,7 @@
             <a:lumOff val="3921"/>
           </a:schemeClr>
         </a:solidFill>
+        <a:effectLst/>
       </p:bgPr>
     </p:bg>
     <p:spTree>
@@ -5127,7 +5280,9 @@
       <p:sp>
         <p:nvSpPr>
           <p:cNvPr id="300" name="CLICK TO EDIT MASTER TITLE STYLE"/>
-          <p:cNvSpPr txBox="1"/>
+          <p:cNvSpPr txBox="1">
+            <a:spLocks noGrp="1"/>
+          </p:cNvSpPr>
           <p:nvPr>
             <p:ph type="title" hasCustomPrompt="1"/>
           </p:nvPr>
@@ -5149,7 +5304,6 @@
             </a:lvl1pPr>
           </a:lstStyle>
           <a:p>
-            <a:pPr/>
             <a:r>
               <a:t>CLICK TO EDIT MASTER TITLE STYLE</a:t>
             </a:r>
@@ -5159,7 +5313,9 @@
       <p:sp>
         <p:nvSpPr>
           <p:cNvPr id="301" name="Body Level One…"/>
-          <p:cNvSpPr txBox="1"/>
+          <p:cNvSpPr txBox="1">
+            <a:spLocks noGrp="1"/>
+          </p:cNvSpPr>
           <p:nvPr>
             <p:ph type="body" sz="quarter" idx="1"/>
           </p:nvPr>
@@ -5183,7 +5339,7 @@
               <a:buSzTx/>
               <a:buFontTx/>
               <a:buNone/>
-              <a:defRPr spc="50" sz="1400"/>
+              <a:defRPr sz="1400" spc="50"/>
             </a:lvl1pPr>
             <a:lvl2pPr marL="0" indent="457200">
               <a:lnSpc>
@@ -5192,7 +5348,7 @@
               <a:buSzTx/>
               <a:buFontTx/>
               <a:buNone/>
-              <a:defRPr spc="50" sz="1400"/>
+              <a:defRPr sz="1400" spc="50"/>
             </a:lvl2pPr>
             <a:lvl3pPr marL="0" indent="914400">
               <a:lnSpc>
@@ -5201,7 +5357,7 @@
               <a:buSzTx/>
               <a:buFontTx/>
               <a:buNone/>
-              <a:defRPr spc="50" sz="1400"/>
+              <a:defRPr sz="1400" spc="50"/>
             </a:lvl3pPr>
             <a:lvl4pPr marL="0" indent="1371600">
               <a:lnSpc>
@@ -5210,7 +5366,7 @@
               <a:buSzTx/>
               <a:buFontTx/>
               <a:buNone/>
-              <a:defRPr spc="50" sz="1400"/>
+              <a:defRPr sz="1400" spc="50"/>
             </a:lvl4pPr>
             <a:lvl5pPr marL="0" indent="1828800">
               <a:lnSpc>
@@ -5219,11 +5375,10 @@
               <a:buSzTx/>
               <a:buFontTx/>
               <a:buNone/>
-              <a:defRPr spc="50" sz="1400"/>
+              <a:defRPr sz="1400" spc="50"/>
             </a:lvl5pPr>
           </a:lstStyle>
           <a:p>
-            <a:pPr/>
             <a:r>
               <a:t>Body Level One</a:t>
             </a:r>
@@ -5279,7 +5434,7 @@
           <a:bodyPr lIns="45719" rIns="45719"/>
           <a:lstStyle/>
           <a:p>
-            <a:pPr/>
+            <a:endParaRPr/>
           </a:p>
         </p:txBody>
       </p:sp>
@@ -5308,14 +5463,16 @@
           <a:bodyPr lIns="45719" rIns="45719"/>
           <a:lstStyle/>
           <a:p>
-            <a:pPr/>
+            <a:endParaRPr/>
           </a:p>
         </p:txBody>
       </p:sp>
       <p:sp>
         <p:nvSpPr>
           <p:cNvPr id="304" name="Slide Number"/>
-          <p:cNvSpPr txBox="1"/>
+          <p:cNvSpPr txBox="1">
+            <a:spLocks noGrp="1"/>
+          </p:cNvSpPr>
           <p:nvPr>
             <p:ph type="sldNum" sz="quarter" idx="2"/>
           </p:nvPr>
@@ -5333,8 +5490,10 @@
           <a:bodyPr/>
           <a:lstStyle/>
           <a:p>
-            <a:pPr/>
-            <a:fld id="{86CB4B4D-7CA3-9044-876B-883B54F8677D}" type="slidenum"/>
+            <a:fld id="{86CB4B4D-7CA3-9044-876B-883B54F8677D}" type="slidenum">
+              <a:t>‹#›</a:t>
+            </a:fld>
+            <a:endParaRPr/>
           </a:p>
         </p:txBody>
       </p:sp>
@@ -5343,12 +5502,12 @@
   <p:clrMapOvr>
     <a:masterClrMapping/>
   </p:clrMapOvr>
-  <p:transition xmlns:p14="http://schemas.microsoft.com/office/powerpoint/2010/main" spd="med" advClick="1"/>
+  <p:transition spd="med"/>
 </p:sldLayout>
 </file>
 
 <file path=ppt/slideLayouts/slideLayout19.xml><?xml version="1.0" encoding="utf-8"?>
-<p:sldLayout xmlns:a="http://schemas.openxmlformats.org/drawingml/2006/main" xmlns:r="http://schemas.openxmlformats.org/officeDocument/2006/relationships" xmlns:p="http://schemas.openxmlformats.org/presentationml/2006/main" xmlns:m="http://schemas.openxmlformats.org/officeDocument/2006/math" xmlns:a14="http://schemas.microsoft.com/office/drawing/2010/main" type="tx" showMasterSp="0" showMasterPhAnim="1">
+<p:sldLayout xmlns:a="http://schemas.openxmlformats.org/drawingml/2006/main" xmlns:r="http://schemas.openxmlformats.org/officeDocument/2006/relationships" xmlns:p="http://schemas.openxmlformats.org/presentationml/2006/main" showMasterSp="0" type="tx">
   <p:cSld name="Closing">
     <p:spTree>
       <p:nvGrpSpPr>
@@ -5367,7 +5526,9 @@
       <p:sp>
         <p:nvSpPr>
           <p:cNvPr id="311" name="CLICK TO EDIT MASTER TITLE STYLE"/>
-          <p:cNvSpPr txBox="1"/>
+          <p:cNvSpPr txBox="1">
+            <a:spLocks noGrp="1"/>
+          </p:cNvSpPr>
           <p:nvPr>
             <p:ph type="title" hasCustomPrompt="1"/>
           </p:nvPr>
@@ -5389,7 +5550,6 @@
             </a:lvl1pPr>
           </a:lstStyle>
           <a:p>
-            <a:pPr/>
             <a:r>
               <a:t>CLICK TO EDIT MASTER TITLE STYLE</a:t>
             </a:r>
@@ -5399,7 +5559,9 @@
       <p:sp>
         <p:nvSpPr>
           <p:cNvPr id="312" name="Body Level One…"/>
-          <p:cNvSpPr txBox="1"/>
+          <p:cNvSpPr txBox="1">
+            <a:spLocks noGrp="1"/>
+          </p:cNvSpPr>
           <p:nvPr>
             <p:ph type="body" sz="quarter" idx="1"/>
           </p:nvPr>
@@ -5423,7 +5585,7 @@
               <a:buSzTx/>
               <a:buFontTx/>
               <a:buNone/>
-              <a:defRPr spc="50" sz="1400"/>
+              <a:defRPr sz="1400" spc="50"/>
             </a:lvl1pPr>
             <a:lvl2pPr marL="0" indent="457200">
               <a:lnSpc>
@@ -5432,7 +5594,7 @@
               <a:buSzTx/>
               <a:buFontTx/>
               <a:buNone/>
-              <a:defRPr spc="50" sz="1400"/>
+              <a:defRPr sz="1400" spc="50"/>
             </a:lvl2pPr>
             <a:lvl3pPr marL="0" indent="914400">
               <a:lnSpc>
@@ -5441,7 +5603,7 @@
               <a:buSzTx/>
               <a:buFontTx/>
               <a:buNone/>
-              <a:defRPr spc="50" sz="1400"/>
+              <a:defRPr sz="1400" spc="50"/>
             </a:lvl3pPr>
             <a:lvl4pPr marL="0" indent="1371600">
               <a:lnSpc>
@@ -5450,7 +5612,7 @@
               <a:buSzTx/>
               <a:buFontTx/>
               <a:buNone/>
-              <a:defRPr spc="50" sz="1400"/>
+              <a:defRPr sz="1400" spc="50"/>
             </a:lvl4pPr>
             <a:lvl5pPr marL="0" indent="1828800">
               <a:lnSpc>
@@ -5459,11 +5621,10 @@
               <a:buSzTx/>
               <a:buFontTx/>
               <a:buNone/>
-              <a:defRPr spc="50" sz="1400"/>
+              <a:defRPr sz="1400" spc="50"/>
             </a:lvl5pPr>
           </a:lstStyle>
           <a:p>
-            <a:pPr/>
             <a:r>
               <a:t>Body Level One</a:t>
             </a:r>
@@ -5503,9 +5664,7 @@
           <p:nvPr/>
         </p:nvPicPr>
         <p:blipFill>
-          <a:blip r:embed="rId2">
-            <a:extLst/>
-          </a:blip>
+          <a:blip r:embed="rId2"/>
           <a:stretch>
             <a:fillRect/>
           </a:stretch>
@@ -5526,7 +5685,9 @@
       <p:sp>
         <p:nvSpPr>
           <p:cNvPr id="314" name="Slide Number"/>
-          <p:cNvSpPr txBox="1"/>
+          <p:cNvSpPr txBox="1">
+            <a:spLocks noGrp="1"/>
+          </p:cNvSpPr>
           <p:nvPr>
             <p:ph type="sldNum" sz="quarter" idx="2"/>
           </p:nvPr>
@@ -5544,8 +5705,10 @@
           <a:bodyPr/>
           <a:lstStyle/>
           <a:p>
-            <a:pPr/>
-            <a:fld id="{86CB4B4D-7CA3-9044-876B-883B54F8677D}" type="slidenum"/>
+            <a:fld id="{86CB4B4D-7CA3-9044-876B-883B54F8677D}" type="slidenum">
+              <a:t>‹#›</a:t>
+            </a:fld>
+            <a:endParaRPr/>
           </a:p>
         </p:txBody>
       </p:sp>
@@ -5554,12 +5717,12 @@
   <p:clrMapOvr>
     <a:masterClrMapping/>
   </p:clrMapOvr>
-  <p:transition xmlns:p14="http://schemas.microsoft.com/office/powerpoint/2010/main" spd="med" advClick="1"/>
+  <p:transition spd="med"/>
 </p:sldLayout>
 </file>
 
 <file path=ppt/slideLayouts/slideLayout2.xml><?xml version="1.0" encoding="utf-8"?>
-<p:sldLayout xmlns:a="http://schemas.openxmlformats.org/drawingml/2006/main" xmlns:r="http://schemas.openxmlformats.org/officeDocument/2006/relationships" xmlns:p="http://schemas.openxmlformats.org/presentationml/2006/main" xmlns:m="http://schemas.openxmlformats.org/officeDocument/2006/math" xmlns:a14="http://schemas.microsoft.com/office/drawing/2010/main" type="tx" showMasterSp="0" showMasterPhAnim="1">
+<p:sldLayout xmlns:a="http://schemas.openxmlformats.org/drawingml/2006/main" xmlns:r="http://schemas.openxmlformats.org/officeDocument/2006/relationships" xmlns:p="http://schemas.openxmlformats.org/presentationml/2006/main" showMasterSp="0" type="tx">
   <p:cSld name="Agenda">
     <p:bg>
       <p:bgPr>
@@ -5570,6 +5733,7 @@
             <a:lumOff val="3921"/>
           </a:schemeClr>
         </a:solidFill>
+        <a:effectLst/>
       </p:bgPr>
     </p:bg>
     <p:spTree>
@@ -5595,10 +5759,8 @@
           <p:nvPr/>
         </p:nvPicPr>
         <p:blipFill>
-          <a:blip r:embed="rId2">
-            <a:extLst/>
-          </a:blip>
-          <a:srcRect l="0" t="18301" r="28341" b="23071"/>
+          <a:blip r:embed="rId2"/>
+          <a:srcRect t="18301" r="28341" b="23071"/>
           <a:stretch>
             <a:fillRect/>
           </a:stretch>
@@ -5619,7 +5781,9 @@
       <p:sp>
         <p:nvSpPr>
           <p:cNvPr id="23" name="CLICK TO EDIT MASTER TITLE STYLE"/>
-          <p:cNvSpPr txBox="1"/>
+          <p:cNvSpPr txBox="1">
+            <a:spLocks noGrp="1"/>
+          </p:cNvSpPr>
           <p:nvPr>
             <p:ph type="title" hasCustomPrompt="1"/>
           </p:nvPr>
@@ -5641,7 +5805,6 @@
             </a:lvl1pPr>
           </a:lstStyle>
           <a:p>
-            <a:pPr/>
             <a:r>
               <a:t>CLICK TO EDIT MASTER TITLE STYLE</a:t>
             </a:r>
@@ -5651,7 +5814,9 @@
       <p:sp>
         <p:nvSpPr>
           <p:cNvPr id="24" name="Body Level One…"/>
-          <p:cNvSpPr txBox="1"/>
+          <p:cNvSpPr txBox="1">
+            <a:spLocks noGrp="1"/>
+          </p:cNvSpPr>
           <p:nvPr>
             <p:ph type="body" sz="quarter" idx="1"/>
           </p:nvPr>
@@ -5715,7 +5880,6 @@
             </a:lvl5pPr>
           </a:lstStyle>
           <a:p>
-            <a:pPr/>
             <a:r>
               <a:t>Body Level One</a:t>
             </a:r>
@@ -5749,7 +5913,9 @@
       <p:sp>
         <p:nvSpPr>
           <p:cNvPr id="25" name="Slide Number"/>
-          <p:cNvSpPr txBox="1"/>
+          <p:cNvSpPr txBox="1">
+            <a:spLocks noGrp="1"/>
+          </p:cNvSpPr>
           <p:nvPr>
             <p:ph type="sldNum" sz="quarter" idx="2"/>
           </p:nvPr>
@@ -5767,8 +5933,10 @@
           <a:bodyPr/>
           <a:lstStyle/>
           <a:p>
-            <a:pPr/>
-            <a:fld id="{86CB4B4D-7CA3-9044-876B-883B54F8677D}" type="slidenum"/>
+            <a:fld id="{86CB4B4D-7CA3-9044-876B-883B54F8677D}" type="slidenum">
+              <a:t>‹#›</a:t>
+            </a:fld>
+            <a:endParaRPr/>
           </a:p>
         </p:txBody>
       </p:sp>
@@ -5777,12 +5945,12 @@
   <p:clrMapOvr>
     <a:masterClrMapping/>
   </p:clrMapOvr>
-  <p:transition xmlns:p14="http://schemas.microsoft.com/office/powerpoint/2010/main" spd="med" advClick="1"/>
+  <p:transition spd="med"/>
 </p:sldLayout>
 </file>
 
 <file path=ppt/slideLayouts/slideLayout3.xml><?xml version="1.0" encoding="utf-8"?>
-<p:sldLayout xmlns:a="http://schemas.openxmlformats.org/drawingml/2006/main" xmlns:r="http://schemas.openxmlformats.org/officeDocument/2006/relationships" xmlns:p="http://schemas.openxmlformats.org/presentationml/2006/main" xmlns:m="http://schemas.openxmlformats.org/officeDocument/2006/math" xmlns:a14="http://schemas.microsoft.com/office/drawing/2010/main" type="tx" showMasterSp="0" showMasterPhAnim="1">
+<p:sldLayout xmlns:a="http://schemas.openxmlformats.org/drawingml/2006/main" xmlns:r="http://schemas.openxmlformats.org/officeDocument/2006/relationships" xmlns:p="http://schemas.openxmlformats.org/presentationml/2006/main" showMasterSp="0" type="tx">
   <p:cSld name="Timeline">
     <p:bg>
       <p:bgPr>
@@ -5793,6 +5961,7 @@
             <a:lumOff val="3921"/>
           </a:schemeClr>
         </a:solidFill>
+        <a:effectLst/>
       </p:bgPr>
     </p:bg>
     <p:spTree>
@@ -5840,7 +6009,7 @@
             </a:cxnLst>
             <a:rect l="0" t="0" r="r" b="b"/>
             <a:pathLst>
-              <a:path w="21600" h="21600" fill="norm" stroke="1" extrusionOk="0">
+              <a:path w="21600" h="21600" extrusionOk="0">
                 <a:moveTo>
                   <a:pt x="8130" y="21600"/>
                 </a:moveTo>
@@ -5868,14 +6037,16 @@
           <a:bodyPr lIns="45719" rIns="45719" anchor="ctr"/>
           <a:lstStyle/>
           <a:p>
-            <a:pPr/>
+            <a:endParaRPr/>
           </a:p>
         </p:txBody>
       </p:sp>
       <p:sp>
         <p:nvSpPr>
           <p:cNvPr id="33" name="CLICK TO EDIT TITLE"/>
-          <p:cNvSpPr txBox="1"/>
+          <p:cNvSpPr txBox="1">
+            <a:spLocks noGrp="1"/>
+          </p:cNvSpPr>
           <p:nvPr>
             <p:ph type="title" hasCustomPrompt="1"/>
           </p:nvPr>
@@ -5897,7 +6068,6 @@
             </a:lvl1pPr>
           </a:lstStyle>
           <a:p>
-            <a:pPr/>
             <a:r>
               <a:t>CLICK TO EDIT TITLE</a:t>
             </a:r>
@@ -5907,7 +6077,9 @@
       <p:sp>
         <p:nvSpPr>
           <p:cNvPr id="34" name="Body Level One…"/>
-          <p:cNvSpPr txBox="1"/>
+          <p:cNvSpPr txBox="1">
+            <a:spLocks noGrp="1"/>
+          </p:cNvSpPr>
           <p:nvPr>
             <p:ph type="body" sz="quarter" idx="1" hasCustomPrompt="1"/>
           </p:nvPr>
@@ -5928,61 +6100,54 @@
               <a:buSzTx/>
               <a:buFontTx/>
               <a:buNone/>
-              <a:defRPr cap="all" spc="150" sz="1600"/>
+              <a:defRPr sz="1600" cap="all" spc="150"/>
             </a:lvl1pPr>
             <a:lvl2pPr marL="609600" indent="-152400" algn="r">
               <a:buFontTx/>
-              <a:defRPr cap="all" spc="150" sz="1600"/>
+              <a:defRPr sz="1600" cap="all" spc="150"/>
             </a:lvl2pPr>
             <a:lvl3pPr marL="1097280" indent="-182880" algn="r">
               <a:buFontTx/>
-              <a:defRPr cap="all" spc="150" sz="1600"/>
+              <a:defRPr sz="1600" cap="all" spc="150"/>
             </a:lvl3pPr>
             <a:lvl4pPr marL="1574800" indent="-203200" algn="r">
               <a:buFontTx/>
-              <a:defRPr cap="all" spc="150" sz="1600"/>
+              <a:defRPr sz="1600" cap="all" spc="150"/>
             </a:lvl4pPr>
             <a:lvl5pPr marL="2032000" indent="-203200" algn="r">
               <a:buFontTx/>
-              <a:defRPr cap="all" spc="150" sz="1600"/>
+              <a:defRPr sz="1600" cap="all" spc="150"/>
             </a:lvl5pPr>
           </a:lstStyle>
           <a:p>
-            <a:pPr/>
             <a:r>
               <a:t>CLICK TO EDIT MASTER TEXT STYLES</a:t>
             </a:r>
           </a:p>
           <a:p>
             <a:pPr lvl="1"/>
-            <a:r>
-              <a:t/>
-            </a:r>
+            <a:endParaRPr/>
           </a:p>
           <a:p>
             <a:pPr lvl="2"/>
-            <a:r>
-              <a:t/>
-            </a:r>
+            <a:endParaRPr/>
           </a:p>
           <a:p>
             <a:pPr lvl="3"/>
-            <a:r>
-              <a:t/>
-            </a:r>
+            <a:endParaRPr/>
           </a:p>
           <a:p>
             <a:pPr lvl="4"/>
-            <a:r>
-              <a:t/>
-            </a:r>
+            <a:endParaRPr/>
           </a:p>
         </p:txBody>
       </p:sp>
       <p:sp>
         <p:nvSpPr>
           <p:cNvPr id="35" name="Text Placeholder 15"/>
-          <p:cNvSpPr/>
+          <p:cNvSpPr>
+            <a:spLocks noGrp="1"/>
+          </p:cNvSpPr>
           <p:nvPr>
             <p:ph type="body" sz="quarter" idx="21" hasCustomPrompt="1"/>
           </p:nvPr>
@@ -6006,11 +6171,10 @@
               <a:buSzTx/>
               <a:buFontTx/>
               <a:buNone/>
-              <a:defRPr cap="all" spc="83" sz="1328"/>
-            </a:lvl1pPr>
-          </a:lstStyle>
-          <a:p>
-            <a:pPr/>
+              <a:defRPr sz="1328" cap="all" spc="83"/>
+            </a:lvl1pPr>
+          </a:lstStyle>
+          <a:p>
             <a:r>
               <a:t>CLICK TO EDIT MASTER TEXT STYLES</a:t>
             </a:r>
@@ -6020,7 +6184,9 @@
       <p:sp>
         <p:nvSpPr>
           <p:cNvPr id="36" name="Text Placeholder 15"/>
-          <p:cNvSpPr/>
+          <p:cNvSpPr>
+            <a:spLocks noGrp="1"/>
+          </p:cNvSpPr>
           <p:nvPr>
             <p:ph type="body" sz="quarter" idx="22" hasCustomPrompt="1"/>
           </p:nvPr>
@@ -6044,11 +6210,10 @@
               <a:buSzTx/>
               <a:buFontTx/>
               <a:buNone/>
-              <a:defRPr cap="all" spc="83" sz="1328"/>
-            </a:lvl1pPr>
-          </a:lstStyle>
-          <a:p>
-            <a:pPr/>
+              <a:defRPr sz="1328" cap="all" spc="83"/>
+            </a:lvl1pPr>
+          </a:lstStyle>
+          <a:p>
             <a:r>
               <a:t>CLICK TO EDIT MASTER TEXT STYLES</a:t>
             </a:r>
@@ -6058,7 +6223,9 @@
       <p:sp>
         <p:nvSpPr>
           <p:cNvPr id="37" name="Text Placeholder 15"/>
-          <p:cNvSpPr/>
+          <p:cNvSpPr>
+            <a:spLocks noGrp="1"/>
+          </p:cNvSpPr>
           <p:nvPr>
             <p:ph type="body" sz="quarter" idx="23" hasCustomPrompt="1"/>
           </p:nvPr>
@@ -6082,11 +6249,10 @@
               <a:buSzTx/>
               <a:buFontTx/>
               <a:buNone/>
-              <a:defRPr cap="all" spc="83" sz="1328"/>
-            </a:lvl1pPr>
-          </a:lstStyle>
-          <a:p>
-            <a:pPr/>
+              <a:defRPr sz="1328" cap="all" spc="83"/>
+            </a:lvl1pPr>
+          </a:lstStyle>
+          <a:p>
             <a:r>
               <a:t>CLICK TO EDIT MASTER TEXT STYLES</a:t>
             </a:r>
@@ -6096,7 +6262,9 @@
       <p:sp>
         <p:nvSpPr>
           <p:cNvPr id="38" name="Text Placeholder 15"/>
-          <p:cNvSpPr/>
+          <p:cNvSpPr>
+            <a:spLocks noGrp="1"/>
+          </p:cNvSpPr>
           <p:nvPr>
             <p:ph type="body" sz="quarter" idx="24" hasCustomPrompt="1"/>
           </p:nvPr>
@@ -6124,7 +6292,6 @@
             </a:lvl1pPr>
           </a:lstStyle>
           <a:p>
-            <a:pPr/>
             <a:r>
               <a:t>Click to edit master text style</a:t>
             </a:r>
@@ -6134,7 +6301,9 @@
       <p:sp>
         <p:nvSpPr>
           <p:cNvPr id="39" name="Text Placeholder 15"/>
-          <p:cNvSpPr/>
+          <p:cNvSpPr>
+            <a:spLocks noGrp="1"/>
+          </p:cNvSpPr>
           <p:nvPr>
             <p:ph type="body" sz="quarter" idx="25" hasCustomPrompt="1"/>
           </p:nvPr>
@@ -6162,7 +6331,6 @@
             </a:lvl1pPr>
           </a:lstStyle>
           <a:p>
-            <a:pPr/>
             <a:r>
               <a:t>Click to edit master text style</a:t>
             </a:r>
@@ -6172,7 +6340,9 @@
       <p:sp>
         <p:nvSpPr>
           <p:cNvPr id="40" name="Text Placeholder 15"/>
-          <p:cNvSpPr/>
+          <p:cNvSpPr>
+            <a:spLocks noGrp="1"/>
+          </p:cNvSpPr>
           <p:nvPr>
             <p:ph type="body" sz="quarter" idx="26" hasCustomPrompt="1"/>
           </p:nvPr>
@@ -6200,7 +6370,6 @@
             </a:lvl1pPr>
           </a:lstStyle>
           <a:p>
-            <a:pPr/>
             <a:r>
               <a:t>Click to edit master text style</a:t>
             </a:r>
@@ -6210,7 +6379,9 @@
       <p:sp>
         <p:nvSpPr>
           <p:cNvPr id="41" name="Text Placeholder 15"/>
-          <p:cNvSpPr/>
+          <p:cNvSpPr>
+            <a:spLocks noGrp="1"/>
+          </p:cNvSpPr>
           <p:nvPr>
             <p:ph type="body" sz="quarter" idx="27" hasCustomPrompt="1"/>
           </p:nvPr>
@@ -6238,7 +6409,6 @@
             </a:lvl1pPr>
           </a:lstStyle>
           <a:p>
-            <a:pPr/>
             <a:r>
               <a:t>Click to edit master text style</a:t>
             </a:r>
@@ -6270,7 +6440,7 @@
           <a:bodyPr lIns="45719" rIns="45719"/>
           <a:lstStyle/>
           <a:p>
-            <a:pPr/>
+            <a:endParaRPr/>
           </a:p>
         </p:txBody>
       </p:sp>
@@ -6299,7 +6469,7 @@
           <a:bodyPr lIns="45719" rIns="45719"/>
           <a:lstStyle/>
           <a:p>
-            <a:pPr/>
+            <a:endParaRPr/>
           </a:p>
         </p:txBody>
       </p:sp>
@@ -6328,7 +6498,7 @@
           <a:bodyPr lIns="45719" rIns="45719"/>
           <a:lstStyle/>
           <a:p>
-            <a:pPr/>
+            <a:endParaRPr/>
           </a:p>
         </p:txBody>
       </p:sp>
@@ -6357,14 +6527,16 @@
           <a:bodyPr lIns="45719" rIns="45719"/>
           <a:lstStyle/>
           <a:p>
-            <a:pPr/>
+            <a:endParaRPr/>
           </a:p>
         </p:txBody>
       </p:sp>
       <p:sp>
         <p:nvSpPr>
           <p:cNvPr id="46" name="Slide Number"/>
-          <p:cNvSpPr txBox="1"/>
+          <p:cNvSpPr txBox="1">
+            <a:spLocks noGrp="1"/>
+          </p:cNvSpPr>
           <p:nvPr>
             <p:ph type="sldNum" sz="quarter" idx="2"/>
           </p:nvPr>
@@ -6382,8 +6554,10 @@
           <a:bodyPr/>
           <a:lstStyle/>
           <a:p>
-            <a:pPr/>
-            <a:fld id="{86CB4B4D-7CA3-9044-876B-883B54F8677D}" type="slidenum"/>
+            <a:fld id="{86CB4B4D-7CA3-9044-876B-883B54F8677D}" type="slidenum">
+              <a:t>‹#›</a:t>
+            </a:fld>
+            <a:endParaRPr/>
           </a:p>
         </p:txBody>
       </p:sp>
@@ -6392,12 +6566,12 @@
   <p:clrMapOvr>
     <a:masterClrMapping/>
   </p:clrMapOvr>
-  <p:transition xmlns:p14="http://schemas.microsoft.com/office/powerpoint/2010/main" spd="med" advClick="1"/>
+  <p:transition spd="med"/>
 </p:sldLayout>
 </file>
 
 <file path=ppt/slideLayouts/slideLayout4.xml><?xml version="1.0" encoding="utf-8"?>
-<p:sldLayout xmlns:a="http://schemas.openxmlformats.org/drawingml/2006/main" xmlns:r="http://schemas.openxmlformats.org/officeDocument/2006/relationships" xmlns:p="http://schemas.openxmlformats.org/presentationml/2006/main" xmlns:m="http://schemas.openxmlformats.org/officeDocument/2006/math" xmlns:a14="http://schemas.microsoft.com/office/drawing/2010/main" type="tx" showMasterSp="0" showMasterPhAnim="1">
+<p:sldLayout xmlns:a="http://schemas.openxmlformats.org/drawingml/2006/main" xmlns:r="http://schemas.openxmlformats.org/officeDocument/2006/relationships" xmlns:p="http://schemas.openxmlformats.org/presentationml/2006/main" showMasterSp="0" type="tx">
   <p:cSld name="Content 3 Column">
     <p:spTree>
       <p:nvGrpSpPr>
@@ -6416,7 +6590,9 @@
       <p:sp>
         <p:nvSpPr>
           <p:cNvPr id="53" name="CLICK TO EDIT MASTER TITLE STYLE"/>
-          <p:cNvSpPr txBox="1"/>
+          <p:cNvSpPr txBox="1">
+            <a:spLocks noGrp="1"/>
+          </p:cNvSpPr>
           <p:nvPr>
             <p:ph type="title" hasCustomPrompt="1"/>
           </p:nvPr>
@@ -6438,7 +6614,6 @@
             </a:lvl1pPr>
           </a:lstStyle>
           <a:p>
-            <a:pPr/>
             <a:r>
               <a:t>CLICK TO EDIT MASTER TITLE STYLE</a:t>
             </a:r>
@@ -6448,7 +6623,9 @@
       <p:sp>
         <p:nvSpPr>
           <p:cNvPr id="54" name="Body Level One…"/>
-          <p:cNvSpPr txBox="1"/>
+          <p:cNvSpPr txBox="1">
+            <a:spLocks noGrp="1"/>
+          </p:cNvSpPr>
           <p:nvPr>
             <p:ph type="body" sz="quarter" idx="1" hasCustomPrompt="1"/>
           </p:nvPr>
@@ -6469,61 +6646,54 @@
               <a:buSzTx/>
               <a:buFontTx/>
               <a:buNone/>
-              <a:defRPr spc="150" sz="2000"/>
+              <a:defRPr sz="2000" spc="150"/>
             </a:lvl1pPr>
             <a:lvl2pPr marL="647700" indent="-190500" algn="ctr">
               <a:buFontTx/>
-              <a:defRPr spc="150" sz="2000"/>
+              <a:defRPr sz="2000" spc="150"/>
             </a:lvl2pPr>
             <a:lvl3pPr marL="1143000" indent="-228600" algn="ctr">
               <a:buFontTx/>
-              <a:defRPr spc="150" sz="2000"/>
+              <a:defRPr sz="2000" spc="150"/>
             </a:lvl3pPr>
             <a:lvl4pPr marL="1625600" indent="-254000" algn="ctr">
               <a:buFontTx/>
-              <a:defRPr spc="150" sz="2000"/>
+              <a:defRPr sz="2000" spc="150"/>
             </a:lvl4pPr>
             <a:lvl5pPr marL="2082800" indent="-254000" algn="ctr">
               <a:buFontTx/>
-              <a:defRPr spc="150" sz="2000"/>
+              <a:defRPr sz="2000" spc="150"/>
             </a:lvl5pPr>
           </a:lstStyle>
           <a:p>
-            <a:pPr/>
             <a:r>
               <a:t>CLICK TO ADD SUBTITLE</a:t>
             </a:r>
           </a:p>
           <a:p>
             <a:pPr lvl="1"/>
-            <a:r>
-              <a:t/>
-            </a:r>
+            <a:endParaRPr/>
           </a:p>
           <a:p>
             <a:pPr lvl="2"/>
-            <a:r>
-              <a:t/>
-            </a:r>
+            <a:endParaRPr/>
           </a:p>
           <a:p>
             <a:pPr lvl="3"/>
-            <a:r>
-              <a:t/>
-            </a:r>
+            <a:endParaRPr/>
           </a:p>
           <a:p>
             <a:pPr lvl="4"/>
-            <a:r>
-              <a:t/>
-            </a:r>
+            <a:endParaRPr/>
           </a:p>
         </p:txBody>
       </p:sp>
       <p:sp>
         <p:nvSpPr>
           <p:cNvPr id="55" name="Text Placeholder 18"/>
-          <p:cNvSpPr/>
+          <p:cNvSpPr>
+            <a:spLocks noGrp="1"/>
+          </p:cNvSpPr>
           <p:nvPr>
             <p:ph type="body" sz="quarter" idx="21" hasCustomPrompt="1"/>
           </p:nvPr>
@@ -6551,7 +6721,6 @@
             </a:lvl1pPr>
           </a:lstStyle>
           <a:p>
-            <a:pPr/>
             <a:r>
               <a:t>Click to add text</a:t>
             </a:r>
@@ -6561,7 +6730,9 @@
       <p:sp>
         <p:nvSpPr>
           <p:cNvPr id="56" name="Text Placeholder 15"/>
-          <p:cNvSpPr/>
+          <p:cNvSpPr>
+            <a:spLocks noGrp="1"/>
+          </p:cNvSpPr>
           <p:nvPr>
             <p:ph type="body" sz="quarter" idx="22" hasCustomPrompt="1"/>
           </p:nvPr>
@@ -6585,11 +6756,10 @@
               <a:buSzTx/>
               <a:buFontTx/>
               <a:buNone/>
-              <a:defRPr spc="94" sz="1879"/>
-            </a:lvl1pPr>
-          </a:lstStyle>
-          <a:p>
-            <a:pPr/>
+              <a:defRPr sz="1879" spc="94"/>
+            </a:lvl1pPr>
+          </a:lstStyle>
+          <a:p>
             <a:r>
               <a:t>CLICK TO ADD SUBTITLE</a:t>
             </a:r>
@@ -6599,7 +6769,9 @@
       <p:sp>
         <p:nvSpPr>
           <p:cNvPr id="57" name="Text Placeholder 18"/>
-          <p:cNvSpPr/>
+          <p:cNvSpPr>
+            <a:spLocks noGrp="1"/>
+          </p:cNvSpPr>
           <p:nvPr>
             <p:ph type="body" sz="quarter" idx="23" hasCustomPrompt="1"/>
           </p:nvPr>
@@ -6627,7 +6799,6 @@
             </a:lvl1pPr>
           </a:lstStyle>
           <a:p>
-            <a:pPr/>
             <a:r>
               <a:t>Click to add text</a:t>
             </a:r>
@@ -6637,7 +6808,9 @@
       <p:sp>
         <p:nvSpPr>
           <p:cNvPr id="58" name="Text Placeholder 15"/>
-          <p:cNvSpPr/>
+          <p:cNvSpPr>
+            <a:spLocks noGrp="1"/>
+          </p:cNvSpPr>
           <p:nvPr>
             <p:ph type="body" sz="quarter" idx="24" hasCustomPrompt="1"/>
           </p:nvPr>
@@ -6661,11 +6834,10 @@
               <a:buSzTx/>
               <a:buFontTx/>
               <a:buNone/>
-              <a:defRPr spc="94" sz="1879"/>
-            </a:lvl1pPr>
-          </a:lstStyle>
-          <a:p>
-            <a:pPr/>
+              <a:defRPr sz="1879" spc="94"/>
+            </a:lvl1pPr>
+          </a:lstStyle>
+          <a:p>
             <a:r>
               <a:t>CLICK TO ADD SUBTITLE</a:t>
             </a:r>
@@ -6675,7 +6847,9 @@
       <p:sp>
         <p:nvSpPr>
           <p:cNvPr id="59" name="Text Placeholder 18"/>
-          <p:cNvSpPr/>
+          <p:cNvSpPr>
+            <a:spLocks noGrp="1"/>
+          </p:cNvSpPr>
           <p:nvPr>
             <p:ph type="body" sz="quarter" idx="25" hasCustomPrompt="1"/>
           </p:nvPr>
@@ -6703,7 +6877,6 @@
             </a:lvl1pPr>
           </a:lstStyle>
           <a:p>
-            <a:pPr/>
             <a:r>
               <a:t>Click to add text</a:t>
             </a:r>
@@ -6713,7 +6886,9 @@
       <p:sp>
         <p:nvSpPr>
           <p:cNvPr id="60" name="Text Placeholder 15"/>
-          <p:cNvSpPr/>
+          <p:cNvSpPr>
+            <a:spLocks noGrp="1"/>
+          </p:cNvSpPr>
           <p:nvPr>
             <p:ph type="body" sz="quarter" idx="26" hasCustomPrompt="1"/>
           </p:nvPr>
@@ -6737,11 +6912,10 @@
               <a:buSzTx/>
               <a:buFontTx/>
               <a:buNone/>
-              <a:defRPr spc="94" sz="1879"/>
-            </a:lvl1pPr>
-          </a:lstStyle>
-          <a:p>
-            <a:pPr/>
+              <a:defRPr sz="1879" spc="94"/>
+            </a:lvl1pPr>
+          </a:lstStyle>
+          <a:p>
             <a:r>
               <a:t>CLICK TO ADD SUBTITLE</a:t>
             </a:r>
@@ -6751,7 +6925,9 @@
       <p:sp>
         <p:nvSpPr>
           <p:cNvPr id="61" name="Text Placeholder 18"/>
-          <p:cNvSpPr/>
+          <p:cNvSpPr>
+            <a:spLocks noGrp="1"/>
+          </p:cNvSpPr>
           <p:nvPr>
             <p:ph type="body" sz="quarter" idx="27" hasCustomPrompt="1"/>
           </p:nvPr>
@@ -6779,7 +6955,6 @@
             </a:lvl1pPr>
           </a:lstStyle>
           <a:p>
-            <a:pPr/>
             <a:r>
               <a:t>Click to add text</a:t>
             </a:r>
@@ -6789,7 +6964,9 @@
       <p:sp>
         <p:nvSpPr>
           <p:cNvPr id="62" name="Slide Number"/>
-          <p:cNvSpPr txBox="1"/>
+          <p:cNvSpPr txBox="1">
+            <a:spLocks noGrp="1"/>
+          </p:cNvSpPr>
           <p:nvPr>
             <p:ph type="sldNum" sz="quarter" idx="2"/>
           </p:nvPr>
@@ -6807,8 +6984,10 @@
           <a:bodyPr/>
           <a:lstStyle/>
           <a:p>
-            <a:pPr/>
-            <a:fld id="{86CB4B4D-7CA3-9044-876B-883B54F8677D}" type="slidenum"/>
+            <a:fld id="{86CB4B4D-7CA3-9044-876B-883B54F8677D}" type="slidenum">
+              <a:t>‹#›</a:t>
+            </a:fld>
+            <a:endParaRPr/>
           </a:p>
         </p:txBody>
       </p:sp>
@@ -6837,7 +7016,7 @@
           <a:bodyPr lIns="45719" rIns="45719"/>
           <a:lstStyle/>
           <a:p>
-            <a:pPr/>
+            <a:endParaRPr/>
           </a:p>
         </p:txBody>
       </p:sp>
@@ -6866,7 +7045,7 @@
           <a:bodyPr lIns="45719" rIns="45719"/>
           <a:lstStyle/>
           <a:p>
-            <a:pPr/>
+            <a:endParaRPr/>
           </a:p>
         </p:txBody>
       </p:sp>
@@ -6879,9 +7058,7 @@
           <p:nvPr/>
         </p:nvPicPr>
         <p:blipFill>
-          <a:blip r:embed="rId2">
-            <a:extLst/>
-          </a:blip>
+          <a:blip r:embed="rId2"/>
           <a:stretch>
             <a:fillRect/>
           </a:stretch>
@@ -6908,9 +7085,7 @@
           <p:nvPr/>
         </p:nvPicPr>
         <p:blipFill>
-          <a:blip r:embed="rId3">
-            <a:extLst/>
-          </a:blip>
+          <a:blip r:embed="rId3"/>
           <a:stretch>
             <a:fillRect/>
           </a:stretch>
@@ -6933,12 +7108,12 @@
   <p:clrMapOvr>
     <a:masterClrMapping/>
   </p:clrMapOvr>
-  <p:transition xmlns:p14="http://schemas.microsoft.com/office/powerpoint/2010/main" spd="med" advClick="1"/>
+  <p:transition spd="med"/>
 </p:sldLayout>
 </file>
 
 <file path=ppt/slideLayouts/slideLayout5.xml><?xml version="1.0" encoding="utf-8"?>
-<p:sldLayout xmlns:a="http://schemas.openxmlformats.org/drawingml/2006/main" xmlns:r="http://schemas.openxmlformats.org/officeDocument/2006/relationships" xmlns:p="http://schemas.openxmlformats.org/presentationml/2006/main" xmlns:m="http://schemas.openxmlformats.org/officeDocument/2006/math" xmlns:a14="http://schemas.microsoft.com/office/drawing/2010/main" type="tx" showMasterSp="0" showMasterPhAnim="1">
+<p:sldLayout xmlns:a="http://schemas.openxmlformats.org/drawingml/2006/main" xmlns:r="http://schemas.openxmlformats.org/officeDocument/2006/relationships" xmlns:p="http://schemas.openxmlformats.org/presentationml/2006/main" showMasterSp="0" type="tx">
   <p:cSld name="Content 2 Column">
     <p:bg>
       <p:bgPr>
@@ -6949,6 +7124,7 @@
             <a:lumOff val="3921"/>
           </a:schemeClr>
         </a:solidFill>
+        <a:effectLst/>
       </p:bgPr>
     </p:bg>
     <p:spTree>
@@ -6968,7 +7144,9 @@
       <p:sp>
         <p:nvSpPr>
           <p:cNvPr id="73" name="CLICK TO EDIT MASTER TITLE STYLE"/>
-          <p:cNvSpPr txBox="1"/>
+          <p:cNvSpPr txBox="1">
+            <a:spLocks noGrp="1"/>
+          </p:cNvSpPr>
           <p:nvPr>
             <p:ph type="title" hasCustomPrompt="1"/>
           </p:nvPr>
@@ -6990,7 +7168,6 @@
             </a:lvl1pPr>
           </a:lstStyle>
           <a:p>
-            <a:pPr/>
             <a:r>
               <a:t>CLICK TO EDIT MASTER TITLE STYLE</a:t>
             </a:r>
@@ -7000,7 +7177,9 @@
       <p:sp>
         <p:nvSpPr>
           <p:cNvPr id="74" name="Body Level One…"/>
-          <p:cNvSpPr txBox="1"/>
+          <p:cNvSpPr txBox="1">
+            <a:spLocks noGrp="1"/>
+          </p:cNvSpPr>
           <p:nvPr>
             <p:ph type="body" sz="quarter" idx="1" hasCustomPrompt="1"/>
           </p:nvPr>
@@ -7021,61 +7200,54 @@
               <a:buSzTx/>
               <a:buFontTx/>
               <a:buNone/>
-              <a:defRPr spc="150" sz="2000"/>
+              <a:defRPr sz="2000" spc="150"/>
             </a:lvl1pPr>
             <a:lvl2pPr marL="647700" indent="-190500">
               <a:buFontTx/>
-              <a:defRPr spc="150" sz="2000"/>
+              <a:defRPr sz="2000" spc="150"/>
             </a:lvl2pPr>
             <a:lvl3pPr marL="1143000" indent="-228600">
               <a:buFontTx/>
-              <a:defRPr spc="150" sz="2000"/>
+              <a:defRPr sz="2000" spc="150"/>
             </a:lvl3pPr>
             <a:lvl4pPr marL="1625600" indent="-254000">
               <a:buFontTx/>
-              <a:defRPr spc="150" sz="2000"/>
+              <a:defRPr sz="2000" spc="150"/>
             </a:lvl4pPr>
             <a:lvl5pPr marL="2082800" indent="-254000">
               <a:buFontTx/>
-              <a:defRPr spc="150" sz="2000"/>
+              <a:defRPr sz="2000" spc="150"/>
             </a:lvl5pPr>
           </a:lstStyle>
           <a:p>
-            <a:pPr/>
             <a:r>
               <a:t>CLICK TO ADD SUBTITLE</a:t>
             </a:r>
           </a:p>
           <a:p>
             <a:pPr lvl="1"/>
-            <a:r>
-              <a:t/>
-            </a:r>
+            <a:endParaRPr/>
           </a:p>
           <a:p>
             <a:pPr lvl="2"/>
-            <a:r>
-              <a:t/>
-            </a:r>
+            <a:endParaRPr/>
           </a:p>
           <a:p>
             <a:pPr lvl="3"/>
-            <a:r>
-              <a:t/>
-            </a:r>
+            <a:endParaRPr/>
           </a:p>
           <a:p>
             <a:pPr lvl="4"/>
-            <a:r>
-              <a:t/>
-            </a:r>
+            <a:endParaRPr/>
           </a:p>
         </p:txBody>
       </p:sp>
       <p:sp>
         <p:nvSpPr>
           <p:cNvPr id="75" name="Text Placeholder 18"/>
-          <p:cNvSpPr/>
+          <p:cNvSpPr>
+            <a:spLocks noGrp="1"/>
+          </p:cNvSpPr>
           <p:nvPr>
             <p:ph type="body" sz="quarter" idx="21" hasCustomPrompt="1"/>
           </p:nvPr>
@@ -7103,7 +7275,6 @@
             </a:lvl1pPr>
           </a:lstStyle>
           <a:p>
-            <a:pPr/>
             <a:r>
               <a:t>Click to add text</a:t>
             </a:r>
@@ -7113,7 +7284,9 @@
       <p:sp>
         <p:nvSpPr>
           <p:cNvPr id="76" name="Text Placeholder 15"/>
-          <p:cNvSpPr/>
+          <p:cNvSpPr>
+            <a:spLocks noGrp="1"/>
+          </p:cNvSpPr>
           <p:nvPr>
             <p:ph type="body" sz="quarter" idx="22" hasCustomPrompt="1"/>
           </p:nvPr>
@@ -7137,11 +7310,10 @@
               <a:buSzTx/>
               <a:buFontTx/>
               <a:buNone/>
-              <a:defRPr spc="94" sz="1879"/>
-            </a:lvl1pPr>
-          </a:lstStyle>
-          <a:p>
-            <a:pPr/>
+              <a:defRPr sz="1879" spc="94"/>
+            </a:lvl1pPr>
+          </a:lstStyle>
+          <a:p>
             <a:r>
               <a:t>CLICK TO ADD SUBTITLE</a:t>
             </a:r>
@@ -7151,7 +7323,9 @@
       <p:sp>
         <p:nvSpPr>
           <p:cNvPr id="77" name="Text Placeholder 18"/>
-          <p:cNvSpPr/>
+          <p:cNvSpPr>
+            <a:spLocks noGrp="1"/>
+          </p:cNvSpPr>
           <p:nvPr>
             <p:ph type="body" sz="quarter" idx="23" hasCustomPrompt="1"/>
           </p:nvPr>
@@ -7179,7 +7353,6 @@
             </a:lvl1pPr>
           </a:lstStyle>
           <a:p>
-            <a:pPr/>
             <a:r>
               <a:t>Click to add text</a:t>
             </a:r>
@@ -7189,7 +7362,9 @@
       <p:sp>
         <p:nvSpPr>
           <p:cNvPr id="78" name="Text Placeholder 15"/>
-          <p:cNvSpPr/>
+          <p:cNvSpPr>
+            <a:spLocks noGrp="1"/>
+          </p:cNvSpPr>
           <p:nvPr>
             <p:ph type="body" sz="quarter" idx="24" hasCustomPrompt="1"/>
           </p:nvPr>
@@ -7213,11 +7388,10 @@
               <a:buSzTx/>
               <a:buFontTx/>
               <a:buNone/>
-              <a:defRPr spc="94" sz="1879"/>
-            </a:lvl1pPr>
-          </a:lstStyle>
-          <a:p>
-            <a:pPr/>
+              <a:defRPr sz="1879" spc="94"/>
+            </a:lvl1pPr>
+          </a:lstStyle>
+          <a:p>
             <a:r>
               <a:t>CLICK TO ADD SUBTITLE</a:t>
             </a:r>
@@ -7227,7 +7401,9 @@
       <p:sp>
         <p:nvSpPr>
           <p:cNvPr id="79" name="Text Placeholder 18"/>
-          <p:cNvSpPr/>
+          <p:cNvSpPr>
+            <a:spLocks noGrp="1"/>
+          </p:cNvSpPr>
           <p:nvPr>
             <p:ph type="body" sz="quarter" idx="25" hasCustomPrompt="1"/>
           </p:nvPr>
@@ -7255,7 +7431,6 @@
             </a:lvl1pPr>
           </a:lstStyle>
           <a:p>
-            <a:pPr/>
             <a:r>
               <a:t>Click to add text</a:t>
             </a:r>
@@ -7265,7 +7440,9 @@
       <p:sp>
         <p:nvSpPr>
           <p:cNvPr id="80" name="Text Placeholder 15"/>
-          <p:cNvSpPr/>
+          <p:cNvSpPr>
+            <a:spLocks noGrp="1"/>
+          </p:cNvSpPr>
           <p:nvPr>
             <p:ph type="body" sz="quarter" idx="26" hasCustomPrompt="1"/>
           </p:nvPr>
@@ -7289,11 +7466,10 @@
               <a:buSzTx/>
               <a:buFontTx/>
               <a:buNone/>
-              <a:defRPr spc="94" sz="1879"/>
-            </a:lvl1pPr>
-          </a:lstStyle>
-          <a:p>
-            <a:pPr/>
+              <a:defRPr sz="1879" spc="94"/>
+            </a:lvl1pPr>
+          </a:lstStyle>
+          <a:p>
             <a:r>
               <a:t>CLICK TO ADD SUBTITLE</a:t>
             </a:r>
@@ -7303,7 +7479,9 @@
       <p:sp>
         <p:nvSpPr>
           <p:cNvPr id="81" name="Text Placeholder 18"/>
-          <p:cNvSpPr/>
+          <p:cNvSpPr>
+            <a:spLocks noGrp="1"/>
+          </p:cNvSpPr>
           <p:nvPr>
             <p:ph type="body" sz="quarter" idx="27" hasCustomPrompt="1"/>
           </p:nvPr>
@@ -7331,7 +7509,6 @@
             </a:lvl1pPr>
           </a:lstStyle>
           <a:p>
-            <a:pPr/>
             <a:r>
               <a:t>Click to add text</a:t>
             </a:r>
@@ -7341,7 +7518,9 @@
       <p:sp>
         <p:nvSpPr>
           <p:cNvPr id="82" name="Slide Number"/>
-          <p:cNvSpPr txBox="1"/>
+          <p:cNvSpPr txBox="1">
+            <a:spLocks noGrp="1"/>
+          </p:cNvSpPr>
           <p:nvPr>
             <p:ph type="sldNum" sz="quarter" idx="2"/>
           </p:nvPr>
@@ -7359,8 +7538,10 @@
           <a:bodyPr/>
           <a:lstStyle/>
           <a:p>
-            <a:pPr/>
-            <a:fld id="{86CB4B4D-7CA3-9044-876B-883B54F8677D}" type="slidenum"/>
+            <a:fld id="{86CB4B4D-7CA3-9044-876B-883B54F8677D}" type="slidenum">
+              <a:t>‹#›</a:t>
+            </a:fld>
+            <a:endParaRPr/>
           </a:p>
         </p:txBody>
       </p:sp>
@@ -7373,10 +7554,8 @@
           <p:nvPr/>
         </p:nvPicPr>
         <p:blipFill>
-          <a:blip r:embed="rId2">
-            <a:extLst/>
-          </a:blip>
-          <a:srcRect l="39434" t="20278" r="0" b="22673"/>
+          <a:blip r:embed="rId2"/>
+          <a:srcRect l="39434" t="20278" b="22673"/>
           <a:stretch>
             <a:fillRect/>
           </a:stretch>
@@ -7399,18 +7578,19 @@
   <p:clrMapOvr>
     <a:masterClrMapping/>
   </p:clrMapOvr>
-  <p:transition xmlns:p14="http://schemas.microsoft.com/office/powerpoint/2010/main" spd="med" advClick="1"/>
+  <p:transition spd="med"/>
 </p:sldLayout>
 </file>
 
 <file path=ppt/slideLayouts/slideLayout6.xml><?xml version="1.0" encoding="utf-8"?>
-<p:sldLayout xmlns:a="http://schemas.openxmlformats.org/drawingml/2006/main" xmlns:r="http://schemas.openxmlformats.org/officeDocument/2006/relationships" xmlns:p="http://schemas.openxmlformats.org/presentationml/2006/main" xmlns:m="http://schemas.openxmlformats.org/officeDocument/2006/math" xmlns:a14="http://schemas.microsoft.com/office/drawing/2010/main" type="tx" showMasterSp="0" showMasterPhAnim="1">
+<p:sldLayout xmlns:a="http://schemas.openxmlformats.org/drawingml/2006/main" xmlns:r="http://schemas.openxmlformats.org/officeDocument/2006/relationships" xmlns:p="http://schemas.openxmlformats.org/presentationml/2006/main" showMasterSp="0" type="tx">
   <p:cSld name="Introduction">
     <p:bg>
       <p:bgPr>
         <a:solidFill>
           <a:schemeClr val="accent1"/>
         </a:solidFill>
+        <a:effectLst/>
       </p:bgPr>
     </p:bg>
     <p:spTree>
@@ -7430,7 +7610,9 @@
       <p:sp>
         <p:nvSpPr>
           <p:cNvPr id="90" name="CLICK TO EDIT MASTER TITLE STYLE"/>
-          <p:cNvSpPr txBox="1"/>
+          <p:cNvSpPr txBox="1">
+            <a:spLocks noGrp="1"/>
+          </p:cNvSpPr>
           <p:nvPr>
             <p:ph type="title" hasCustomPrompt="1"/>
           </p:nvPr>
@@ -7452,7 +7634,6 @@
             </a:lvl1pPr>
           </a:lstStyle>
           <a:p>
-            <a:pPr/>
             <a:r>
               <a:t>CLICK TO EDIT MASTER TITLE STYLE</a:t>
             </a:r>
@@ -7462,7 +7643,9 @@
       <p:sp>
         <p:nvSpPr>
           <p:cNvPr id="91" name="Body Level One…"/>
-          <p:cNvSpPr txBox="1"/>
+          <p:cNvSpPr txBox="1">
+            <a:spLocks noGrp="1"/>
+          </p:cNvSpPr>
           <p:nvPr>
             <p:ph type="body" sz="quarter" idx="1"/>
           </p:nvPr>
@@ -7486,7 +7669,7 @@
               <a:buSzTx/>
               <a:buFontTx/>
               <a:buNone/>
-              <a:defRPr spc="50" sz="1400"/>
+              <a:defRPr sz="1400" spc="50"/>
             </a:lvl1pPr>
             <a:lvl2pPr marL="0" indent="457200">
               <a:lnSpc>
@@ -7495,7 +7678,7 @@
               <a:buSzTx/>
               <a:buFontTx/>
               <a:buNone/>
-              <a:defRPr spc="50" sz="1400"/>
+              <a:defRPr sz="1400" spc="50"/>
             </a:lvl2pPr>
             <a:lvl3pPr marL="0" indent="914400">
               <a:lnSpc>
@@ -7504,7 +7687,7 @@
               <a:buSzTx/>
               <a:buFontTx/>
               <a:buNone/>
-              <a:defRPr spc="50" sz="1400"/>
+              <a:defRPr sz="1400" spc="50"/>
             </a:lvl3pPr>
             <a:lvl4pPr marL="0" indent="1371600">
               <a:lnSpc>
@@ -7513,7 +7696,7 @@
               <a:buSzTx/>
               <a:buFontTx/>
               <a:buNone/>
-              <a:defRPr spc="50" sz="1400"/>
+              <a:defRPr sz="1400" spc="50"/>
             </a:lvl4pPr>
             <a:lvl5pPr marL="0" indent="1828800">
               <a:lnSpc>
@@ -7522,11 +7705,10 @@
               <a:buSzTx/>
               <a:buFontTx/>
               <a:buNone/>
-              <a:defRPr spc="50" sz="1400"/>
+              <a:defRPr sz="1400" spc="50"/>
             </a:lvl5pPr>
           </a:lstStyle>
           <a:p>
-            <a:pPr/>
             <a:r>
               <a:t>Body Level One</a:t>
             </a:r>
@@ -7582,7 +7764,7 @@
           <a:bodyPr lIns="45719" rIns="45719"/>
           <a:lstStyle/>
           <a:p>
-            <a:pPr/>
+            <a:endParaRPr/>
           </a:p>
         </p:txBody>
       </p:sp>
@@ -7611,14 +7793,16 @@
           <a:bodyPr lIns="45719" rIns="45719"/>
           <a:lstStyle/>
           <a:p>
-            <a:pPr/>
+            <a:endParaRPr/>
           </a:p>
         </p:txBody>
       </p:sp>
       <p:sp>
         <p:nvSpPr>
           <p:cNvPr id="94" name="Slide Number"/>
-          <p:cNvSpPr txBox="1"/>
+          <p:cNvSpPr txBox="1">
+            <a:spLocks noGrp="1"/>
+          </p:cNvSpPr>
           <p:nvPr>
             <p:ph type="sldNum" sz="quarter" idx="2"/>
           </p:nvPr>
@@ -7636,8 +7820,10 @@
           <a:bodyPr/>
           <a:lstStyle/>
           <a:p>
-            <a:pPr/>
-            <a:fld id="{86CB4B4D-7CA3-9044-876B-883B54F8677D}" type="slidenum"/>
+            <a:fld id="{86CB4B4D-7CA3-9044-876B-883B54F8677D}" type="slidenum">
+              <a:t>‹#›</a:t>
+            </a:fld>
+            <a:endParaRPr/>
           </a:p>
         </p:txBody>
       </p:sp>
@@ -7646,12 +7832,12 @@
   <p:clrMapOvr>
     <a:masterClrMapping/>
   </p:clrMapOvr>
-  <p:transition xmlns:p14="http://schemas.microsoft.com/office/powerpoint/2010/main" spd="med" advClick="1"/>
+  <p:transition spd="med"/>
 </p:sldLayout>
 </file>
 
 <file path=ppt/slideLayouts/slideLayout7.xml><?xml version="1.0" encoding="utf-8"?>
-<p:sldLayout xmlns:a="http://schemas.openxmlformats.org/drawingml/2006/main" xmlns:r="http://schemas.openxmlformats.org/officeDocument/2006/relationships" xmlns:p="http://schemas.openxmlformats.org/presentationml/2006/main" xmlns:m="http://schemas.openxmlformats.org/officeDocument/2006/math" xmlns:a14="http://schemas.microsoft.com/office/drawing/2010/main" type="tx" showMasterSp="1" showMasterPhAnim="1">
+<p:sldLayout xmlns:a="http://schemas.openxmlformats.org/drawingml/2006/main" xmlns:r="http://schemas.openxmlformats.org/officeDocument/2006/relationships" xmlns:p="http://schemas.openxmlformats.org/presentationml/2006/main" type="tx">
   <p:cSld name="Section Break">
     <p:spTree>
       <p:nvGrpSpPr>
@@ -7670,7 +7856,9 @@
       <p:sp>
         <p:nvSpPr>
           <p:cNvPr id="101" name="CLICK TO EDIT MASTER TITLE STYLE"/>
-          <p:cNvSpPr txBox="1"/>
+          <p:cNvSpPr txBox="1">
+            <a:spLocks noGrp="1"/>
+          </p:cNvSpPr>
           <p:nvPr>
             <p:ph type="title" hasCustomPrompt="1"/>
           </p:nvPr>
@@ -7684,7 +7872,6 @@
           <a:bodyPr/>
           <a:lstStyle/>
           <a:p>
-            <a:pPr/>
             <a:r>
               <a:t>CLICK TO EDIT MASTER TITLE STYLE</a:t>
             </a:r>
@@ -7694,7 +7881,9 @@
       <p:sp>
         <p:nvSpPr>
           <p:cNvPr id="102" name="Slide Number"/>
-          <p:cNvSpPr txBox="1"/>
+          <p:cNvSpPr txBox="1">
+            <a:spLocks noGrp="1"/>
+          </p:cNvSpPr>
           <p:nvPr>
             <p:ph type="sldNum" sz="quarter" idx="2"/>
           </p:nvPr>
@@ -7708,8 +7897,10 @@
           <a:bodyPr/>
           <a:lstStyle/>
           <a:p>
-            <a:pPr/>
-            <a:fld id="{86CB4B4D-7CA3-9044-876B-883B54F8677D}" type="slidenum"/>
+            <a:fld id="{86CB4B4D-7CA3-9044-876B-883B54F8677D}" type="slidenum">
+              <a:t>‹#›</a:t>
+            </a:fld>
+            <a:endParaRPr/>
           </a:p>
         </p:txBody>
       </p:sp>
@@ -7718,12 +7909,12 @@
   <p:clrMapOvr>
     <a:masterClrMapping/>
   </p:clrMapOvr>
-  <p:transition xmlns:p14="http://schemas.microsoft.com/office/powerpoint/2010/main" spd="med" advClick="1"/>
+  <p:transition spd="med"/>
 </p:sldLayout>
 </file>
 
 <file path=ppt/slideLayouts/slideLayout8.xml><?xml version="1.0" encoding="utf-8"?>
-<p:sldLayout xmlns:a="http://schemas.openxmlformats.org/drawingml/2006/main" xmlns:r="http://schemas.openxmlformats.org/officeDocument/2006/relationships" xmlns:p="http://schemas.openxmlformats.org/presentationml/2006/main" xmlns:m="http://schemas.openxmlformats.org/officeDocument/2006/math" xmlns:a14="http://schemas.microsoft.com/office/drawing/2010/main" type="tx" showMasterSp="0" showMasterPhAnim="1">
+<p:sldLayout xmlns:a="http://schemas.openxmlformats.org/drawingml/2006/main" xmlns:r="http://schemas.openxmlformats.org/officeDocument/2006/relationships" xmlns:p="http://schemas.openxmlformats.org/presentationml/2006/main" showMasterSp="0" type="tx">
   <p:cSld name="Quote">
     <p:bg>
       <p:bgPr>
@@ -7734,6 +7925,7 @@
             <a:lumOff val="3921"/>
           </a:schemeClr>
         </a:solidFill>
+        <a:effectLst/>
       </p:bgPr>
     </p:bg>
     <p:spTree>
@@ -7759,9 +7951,7 @@
           <p:nvPr/>
         </p:nvPicPr>
         <p:blipFill>
-          <a:blip r:embed="rId2">
-            <a:extLst/>
-          </a:blip>
+          <a:blip r:embed="rId2"/>
           <a:stretch>
             <a:fillRect/>
           </a:stretch>
@@ -7782,7 +7972,9 @@
       <p:sp>
         <p:nvSpPr>
           <p:cNvPr id="110" name="CLICK TO EDIT MASTER TITLE STYLE"/>
-          <p:cNvSpPr txBox="1"/>
+          <p:cNvSpPr txBox="1">
+            <a:spLocks noGrp="1"/>
+          </p:cNvSpPr>
           <p:nvPr>
             <p:ph type="title" hasCustomPrompt="1"/>
           </p:nvPr>
@@ -7804,7 +7996,6 @@
             </a:lvl1pPr>
           </a:lstStyle>
           <a:p>
-            <a:pPr/>
             <a:r>
               <a:t>CLICK TO EDIT MASTER TITLE STYLE</a:t>
             </a:r>
@@ -7836,14 +8027,16 @@
           <a:bodyPr lIns="45719" rIns="45719"/>
           <a:lstStyle/>
           <a:p>
-            <a:pPr/>
+            <a:endParaRPr/>
           </a:p>
         </p:txBody>
       </p:sp>
       <p:sp>
         <p:nvSpPr>
           <p:cNvPr id="112" name="Body Level One…"/>
-          <p:cNvSpPr txBox="1"/>
+          <p:cNvSpPr txBox="1">
+            <a:spLocks noGrp="1"/>
+          </p:cNvSpPr>
           <p:nvPr>
             <p:ph type="body" sz="quarter" idx="1" hasCustomPrompt="1"/>
           </p:nvPr>
@@ -7864,61 +8057,54 @@
               <a:buSzTx/>
               <a:buFontTx/>
               <a:buNone/>
-              <a:defRPr cap="all" spc="150" sz="2000"/>
+              <a:defRPr sz="2000" cap="all" spc="150"/>
             </a:lvl1pPr>
             <a:lvl2pPr marL="647700" indent="-190500">
               <a:buFontTx/>
-              <a:defRPr cap="all" spc="150" sz="2000"/>
+              <a:defRPr sz="2000" cap="all" spc="150"/>
             </a:lvl2pPr>
             <a:lvl3pPr marL="1143000" indent="-228600">
               <a:buFontTx/>
-              <a:defRPr cap="all" spc="150" sz="2000"/>
+              <a:defRPr sz="2000" cap="all" spc="150"/>
             </a:lvl3pPr>
             <a:lvl4pPr marL="1625600" indent="-254000">
               <a:buFontTx/>
-              <a:defRPr cap="all" spc="150" sz="2000"/>
+              <a:defRPr sz="2000" cap="all" spc="150"/>
             </a:lvl4pPr>
             <a:lvl5pPr marL="2082800" indent="-254000">
               <a:buFontTx/>
-              <a:defRPr cap="all" spc="150" sz="2000"/>
+              <a:defRPr sz="2000" cap="all" spc="150"/>
             </a:lvl5pPr>
           </a:lstStyle>
           <a:p>
-            <a:pPr/>
             <a:r>
               <a:t>CLICK TO ADD SUBTITLE</a:t>
             </a:r>
           </a:p>
           <a:p>
             <a:pPr lvl="1"/>
-            <a:r>
-              <a:t/>
-            </a:r>
+            <a:endParaRPr/>
           </a:p>
           <a:p>
             <a:pPr lvl="2"/>
-            <a:r>
-              <a:t/>
-            </a:r>
+            <a:endParaRPr/>
           </a:p>
           <a:p>
             <a:pPr lvl="3"/>
-            <a:r>
-              <a:t/>
-            </a:r>
+            <a:endParaRPr/>
           </a:p>
           <a:p>
             <a:pPr lvl="4"/>
-            <a:r>
-              <a:t/>
-            </a:r>
+            <a:endParaRPr/>
           </a:p>
         </p:txBody>
       </p:sp>
       <p:sp>
         <p:nvSpPr>
           <p:cNvPr id="113" name="Text Placeholder 18"/>
-          <p:cNvSpPr/>
+          <p:cNvSpPr>
+            <a:spLocks noGrp="1"/>
+          </p:cNvSpPr>
           <p:nvPr>
             <p:ph type="body" sz="quarter" idx="21" hasCustomPrompt="1"/>
           </p:nvPr>
@@ -7946,7 +8132,6 @@
             </a:lvl1pPr>
           </a:lstStyle>
           <a:p>
-            <a:pPr/>
             <a:r>
               <a:t>Click to add text</a:t>
             </a:r>
@@ -7956,7 +8141,9 @@
       <p:sp>
         <p:nvSpPr>
           <p:cNvPr id="114" name="Text Placeholder 15"/>
-          <p:cNvSpPr/>
+          <p:cNvSpPr>
+            <a:spLocks noGrp="1"/>
+          </p:cNvSpPr>
           <p:nvPr>
             <p:ph type="body" sz="quarter" idx="22" hasCustomPrompt="1"/>
           </p:nvPr>
@@ -7980,11 +8167,10 @@
               <a:buSzTx/>
               <a:buFontTx/>
               <a:buNone/>
-              <a:defRPr cap="all" spc="94" sz="1879"/>
-            </a:lvl1pPr>
-          </a:lstStyle>
-          <a:p>
-            <a:pPr/>
+              <a:defRPr sz="1879" cap="all" spc="94"/>
+            </a:lvl1pPr>
+          </a:lstStyle>
+          <a:p>
             <a:r>
               <a:t>CLICK TO ADD SUBTITLE</a:t>
             </a:r>
@@ -7994,7 +8180,9 @@
       <p:sp>
         <p:nvSpPr>
           <p:cNvPr id="115" name="Text Placeholder 18"/>
-          <p:cNvSpPr/>
+          <p:cNvSpPr>
+            <a:spLocks noGrp="1"/>
+          </p:cNvSpPr>
           <p:nvPr>
             <p:ph type="body" sz="quarter" idx="23" hasCustomPrompt="1"/>
           </p:nvPr>
@@ -8022,7 +8210,6 @@
             </a:lvl1pPr>
           </a:lstStyle>
           <a:p>
-            <a:pPr/>
             <a:r>
               <a:t>Click to add text</a:t>
             </a:r>
@@ -8032,7 +8219,9 @@
       <p:sp>
         <p:nvSpPr>
           <p:cNvPr id="116" name="Text Placeholder 15"/>
-          <p:cNvSpPr/>
+          <p:cNvSpPr>
+            <a:spLocks noGrp="1"/>
+          </p:cNvSpPr>
           <p:nvPr>
             <p:ph type="body" sz="quarter" idx="24" hasCustomPrompt="1"/>
           </p:nvPr>
@@ -8056,11 +8245,10 @@
               <a:buSzTx/>
               <a:buFontTx/>
               <a:buNone/>
-              <a:defRPr cap="all" spc="94" sz="1879"/>
-            </a:lvl1pPr>
-          </a:lstStyle>
-          <a:p>
-            <a:pPr/>
+              <a:defRPr sz="1879" cap="all" spc="94"/>
+            </a:lvl1pPr>
+          </a:lstStyle>
+          <a:p>
             <a:r>
               <a:t>CLICK TO ADD SUBTITLE</a:t>
             </a:r>
@@ -8070,7 +8258,9 @@
       <p:sp>
         <p:nvSpPr>
           <p:cNvPr id="117" name="Text Placeholder 18"/>
-          <p:cNvSpPr/>
+          <p:cNvSpPr>
+            <a:spLocks noGrp="1"/>
+          </p:cNvSpPr>
           <p:nvPr>
             <p:ph type="body" sz="quarter" idx="25" hasCustomPrompt="1"/>
           </p:nvPr>
@@ -8098,7 +8288,6 @@
             </a:lvl1pPr>
           </a:lstStyle>
           <a:p>
-            <a:pPr/>
             <a:r>
               <a:t>Click to add text</a:t>
             </a:r>
@@ -8108,7 +8297,9 @@
       <p:sp>
         <p:nvSpPr>
           <p:cNvPr id="118" name="Slide Number"/>
-          <p:cNvSpPr txBox="1"/>
+          <p:cNvSpPr txBox="1">
+            <a:spLocks noGrp="1"/>
+          </p:cNvSpPr>
           <p:nvPr>
             <p:ph type="sldNum" sz="quarter" idx="2"/>
           </p:nvPr>
@@ -8126,8 +8317,10 @@
           <a:bodyPr/>
           <a:lstStyle/>
           <a:p>
-            <a:pPr/>
-            <a:fld id="{86CB4B4D-7CA3-9044-876B-883B54F8677D}" type="slidenum"/>
+            <a:fld id="{86CB4B4D-7CA3-9044-876B-883B54F8677D}" type="slidenum">
+              <a:t>‹#›</a:t>
+            </a:fld>
+            <a:endParaRPr/>
           </a:p>
         </p:txBody>
       </p:sp>
@@ -8136,12 +8329,12 @@
   <p:clrMapOvr>
     <a:masterClrMapping/>
   </p:clrMapOvr>
-  <p:transition xmlns:p14="http://schemas.microsoft.com/office/powerpoint/2010/main" spd="med" advClick="1"/>
+  <p:transition spd="med"/>
 </p:sldLayout>
 </file>
 
 <file path=ppt/slideLayouts/slideLayout9.xml><?xml version="1.0" encoding="utf-8"?>
-<p:sldLayout xmlns:a="http://schemas.openxmlformats.org/drawingml/2006/main" xmlns:r="http://schemas.openxmlformats.org/officeDocument/2006/relationships" xmlns:p="http://schemas.openxmlformats.org/presentationml/2006/main" xmlns:m="http://schemas.openxmlformats.org/officeDocument/2006/math" xmlns:a14="http://schemas.microsoft.com/office/drawing/2010/main" type="tx" showMasterSp="0" showMasterPhAnim="1">
+<p:sldLayout xmlns:a="http://schemas.openxmlformats.org/drawingml/2006/main" xmlns:r="http://schemas.openxmlformats.org/officeDocument/2006/relationships" xmlns:p="http://schemas.openxmlformats.org/presentationml/2006/main" showMasterSp="0" type="tx">
   <p:cSld name="Three Content">
     <p:bg>
       <p:bgPr>
@@ -8152,6 +8345,7 @@
             <a:lumOff val="3921"/>
           </a:schemeClr>
         </a:solidFill>
+        <a:effectLst/>
       </p:bgPr>
     </p:bg>
     <p:spTree>
@@ -8171,7 +8365,9 @@
       <p:sp>
         <p:nvSpPr>
           <p:cNvPr id="125" name="CLICK TO EDIT MASTER TITLE STYLE"/>
-          <p:cNvSpPr txBox="1"/>
+          <p:cNvSpPr txBox="1">
+            <a:spLocks noGrp="1"/>
+          </p:cNvSpPr>
           <p:nvPr>
             <p:ph type="title" hasCustomPrompt="1"/>
           </p:nvPr>
@@ -8193,7 +8389,6 @@
             </a:lvl1pPr>
           </a:lstStyle>
           <a:p>
-            <a:pPr/>
             <a:r>
               <a:t>CLICK TO EDIT MASTER TITLE STYLE</a:t>
             </a:r>
@@ -8203,7 +8398,9 @@
       <p:sp>
         <p:nvSpPr>
           <p:cNvPr id="126" name="Body Level One…"/>
-          <p:cNvSpPr txBox="1"/>
+          <p:cNvSpPr txBox="1">
+            <a:spLocks noGrp="1"/>
+          </p:cNvSpPr>
           <p:nvPr>
             <p:ph type="body" sz="quarter" idx="1" hasCustomPrompt="1"/>
           </p:nvPr>
@@ -8224,69 +8421,62 @@
               <a:buSzTx/>
               <a:buFontTx/>
               <a:buNone/>
-              <a:defRPr cap="all" spc="150" sz="2000"/>
+              <a:defRPr sz="2000" cap="all" spc="150"/>
             </a:lvl1pPr>
             <a:lvl2pPr marL="0" indent="457200">
               <a:buSzTx/>
               <a:buFontTx/>
               <a:buNone/>
-              <a:defRPr cap="all" spc="150" sz="2000"/>
+              <a:defRPr sz="2000" cap="all" spc="150"/>
             </a:lvl2pPr>
             <a:lvl3pPr marL="0" indent="914400">
               <a:buSzTx/>
               <a:buFontTx/>
               <a:buNone/>
-              <a:defRPr cap="all" spc="150" sz="2000"/>
+              <a:defRPr sz="2000" cap="all" spc="150"/>
             </a:lvl3pPr>
             <a:lvl4pPr marL="0" indent="1371600">
               <a:buSzTx/>
               <a:buFontTx/>
               <a:buNone/>
-              <a:defRPr cap="all" spc="150" sz="2000"/>
+              <a:defRPr sz="2000" cap="all" spc="150"/>
             </a:lvl4pPr>
             <a:lvl5pPr marL="0" indent="1828800">
               <a:buSzTx/>
               <a:buFontTx/>
               <a:buNone/>
-              <a:defRPr cap="all" spc="150" sz="2000"/>
+              <a:defRPr sz="2000" cap="all" spc="150"/>
             </a:lvl5pPr>
           </a:lstStyle>
           <a:p>
-            <a:pPr/>
             <a:r>
               <a:t>CLICK TO EDIT MASTER TEXT</a:t>
             </a:r>
           </a:p>
           <a:p>
             <a:pPr lvl="1"/>
-            <a:r>
-              <a:t/>
-            </a:r>
+            <a:endParaRPr/>
           </a:p>
           <a:p>
             <a:pPr lvl="2"/>
-            <a:r>
-              <a:t/>
-            </a:r>
+            <a:endParaRPr/>
           </a:p>
           <a:p>
             <a:pPr lvl="3"/>
-            <a:r>
-              <a:t/>
-            </a:r>
+            <a:endParaRPr/>
           </a:p>
           <a:p>
             <a:pPr lvl="4"/>
-            <a:r>
-              <a:t/>
-            </a:r>
+            <a:endParaRPr/>
           </a:p>
         </p:txBody>
       </p:sp>
       <p:sp>
         <p:nvSpPr>
           <p:cNvPr id="127" name="Text Placeholder 4"/>
-          <p:cNvSpPr/>
+          <p:cNvSpPr>
+            <a:spLocks noGrp="1"/>
+          </p:cNvSpPr>
           <p:nvPr>
             <p:ph type="body" sz="quarter" idx="21" hasCustomPrompt="1"/>
           </p:nvPr>
@@ -8307,11 +8497,10 @@
               <a:buSzTx/>
               <a:buFontTx/>
               <a:buNone/>
-              <a:defRPr cap="all" spc="100" sz="2000"/>
-            </a:lvl1pPr>
-          </a:lstStyle>
-          <a:p>
-            <a:pPr/>
+              <a:defRPr sz="2000" cap="all" spc="100"/>
+            </a:lvl1pPr>
+          </a:lstStyle>
+          <a:p>
             <a:r>
               <a:t>CLICK TO EDIT MASTER TEXT</a:t>
             </a:r>
@@ -8321,7 +8510,9 @@
       <p:sp>
         <p:nvSpPr>
           <p:cNvPr id="128" name="Text Placeholder 2"/>
-          <p:cNvSpPr/>
+          <p:cNvSpPr>
+            <a:spLocks noGrp="1"/>
+          </p:cNvSpPr>
           <p:nvPr>
             <p:ph type="body" sz="quarter" idx="22" hasCustomPrompt="1"/>
           </p:nvPr>
@@ -8342,11 +8533,10 @@
               <a:buSzTx/>
               <a:buFontTx/>
               <a:buNone/>
-              <a:defRPr cap="all" spc="100" sz="2000"/>
-            </a:lvl1pPr>
-          </a:lstStyle>
-          <a:p>
-            <a:pPr/>
+              <a:defRPr sz="2000" cap="all" spc="100"/>
+            </a:lvl1pPr>
+          </a:lstStyle>
+          <a:p>
             <a:r>
               <a:t>CLICK TO EDIT MASTER TEXT</a:t>
             </a:r>
@@ -8356,7 +8546,9 @@
       <p:sp>
         <p:nvSpPr>
           <p:cNvPr id="129" name="Slide Number"/>
-          <p:cNvSpPr txBox="1"/>
+          <p:cNvSpPr txBox="1">
+            <a:spLocks noGrp="1"/>
+          </p:cNvSpPr>
           <p:nvPr>
             <p:ph type="sldNum" sz="quarter" idx="2"/>
           </p:nvPr>
@@ -8374,8 +8566,10 @@
           <a:bodyPr/>
           <a:lstStyle/>
           <a:p>
-            <a:pPr/>
-            <a:fld id="{86CB4B4D-7CA3-9044-876B-883B54F8677D}" type="slidenum"/>
+            <a:fld id="{86CB4B4D-7CA3-9044-876B-883B54F8677D}" type="slidenum">
+              <a:t>‹#›</a:t>
+            </a:fld>
+            <a:endParaRPr/>
           </a:p>
         </p:txBody>
       </p:sp>
@@ -8404,7 +8598,7 @@
           <a:bodyPr lIns="45719" rIns="45719"/>
           <a:lstStyle/>
           <a:p>
-            <a:pPr/>
+            <a:endParaRPr/>
           </a:p>
         </p:txBody>
       </p:sp>
@@ -8433,7 +8627,7 @@
           <a:bodyPr lIns="45719" rIns="45719"/>
           <a:lstStyle/>
           <a:p>
-            <a:pPr/>
+            <a:endParaRPr/>
           </a:p>
         </p:txBody>
       </p:sp>
@@ -8442,18 +8636,19 @@
   <p:clrMapOvr>
     <a:masterClrMapping/>
   </p:clrMapOvr>
-  <p:transition xmlns:p14="http://schemas.microsoft.com/office/powerpoint/2010/main" spd="med" advClick="1"/>
+  <p:transition spd="med"/>
 </p:sldLayout>
 </file>
 
 <file path=ppt/slideMasters/slideMaster1.xml><?xml version="1.0" encoding="utf-8"?>
-<p:sldMaster xmlns:a="http://schemas.openxmlformats.org/drawingml/2006/main" xmlns:r="http://schemas.openxmlformats.org/officeDocument/2006/relationships" xmlns:p="http://schemas.openxmlformats.org/presentationml/2006/main" xmlns:m="http://schemas.openxmlformats.org/officeDocument/2006/math" xmlns:a14="http://schemas.microsoft.com/office/drawing/2010/main">
+<p:sldMaster xmlns:a="http://schemas.openxmlformats.org/drawingml/2006/main" xmlns:r="http://schemas.openxmlformats.org/officeDocument/2006/relationships" xmlns:p="http://schemas.openxmlformats.org/presentationml/2006/main">
   <p:cSld>
     <p:bg>
       <p:bgPr>
         <a:solidFill>
           <a:schemeClr val="accent2"/>
         </a:solidFill>
+        <a:effectLst/>
       </p:bgPr>
     </p:bg>
     <p:spTree>
@@ -8473,7 +8668,9 @@
       <p:sp>
         <p:nvSpPr>
           <p:cNvPr id="2" name="CLICK TO EDIT MASTER TITLE STYLE"/>
-          <p:cNvSpPr txBox="1"/>
+          <p:cNvSpPr txBox="1">
+            <a:spLocks noGrp="1"/>
+          </p:cNvSpPr>
           <p:nvPr>
             <p:ph type="title" hasCustomPrompt="1"/>
           </p:nvPr>
@@ -8491,17 +8688,16 @@
           </a:ln>
           <a:extLst>
             <a:ext uri="{C572A759-6A51-4108-AA02-DFA0A04FC94B}">
-              <ma14:wrappingTextBoxFlag xmlns:ma14="http://schemas.microsoft.com/office/mac/drawingml/2011/main" val="1"/>
+              <ma14:wrappingTextBoxFlag xmlns:ma14="http://schemas.microsoft.com/office/mac/drawingml/2011/main" xmlns:a14="http://schemas.microsoft.com/office/drawing/2010/main" xmlns:m="http://schemas.openxmlformats.org/officeDocument/2006/math" xmlns="" val="1"/>
             </a:ext>
           </a:extLst>
         </p:spPr>
         <p:txBody>
           <a:bodyPr lIns="45719" rIns="45719" anchor="ctr">
-            <a:normAutofit fontScale="100000" lnSpcReduction="0"/>
+            <a:normAutofit/>
           </a:bodyPr>
           <a:lstStyle/>
           <a:p>
-            <a:pPr/>
             <a:r>
               <a:t>CLICK TO EDIT MASTER TITLE STYLE</a:t>
             </a:r>
@@ -8517,9 +8713,7 @@
           <p:nvPr/>
         </p:nvPicPr>
         <p:blipFill>
-          <a:blip r:embed="rId2">
-            <a:extLst/>
-          </a:blip>
+          <a:blip r:embed="rId21"/>
           <a:stretch>
             <a:fillRect/>
           </a:stretch>
@@ -8540,7 +8734,9 @@
       <p:sp>
         <p:nvSpPr>
           <p:cNvPr id="4" name="Body Level One…"/>
-          <p:cNvSpPr txBox="1"/>
+          <p:cNvSpPr txBox="1">
+            <a:spLocks noGrp="1"/>
+          </p:cNvSpPr>
           <p:nvPr>
             <p:ph type="body" idx="1"/>
           </p:nvPr>
@@ -8558,17 +8754,16 @@
           </a:ln>
           <a:extLst>
             <a:ext uri="{C572A759-6A51-4108-AA02-DFA0A04FC94B}">
-              <ma14:wrappingTextBoxFlag xmlns:ma14="http://schemas.microsoft.com/office/mac/drawingml/2011/main" val="1"/>
+              <ma14:wrappingTextBoxFlag xmlns:ma14="http://schemas.microsoft.com/office/mac/drawingml/2011/main" xmlns:a14="http://schemas.microsoft.com/office/drawing/2010/main" xmlns:m="http://schemas.openxmlformats.org/officeDocument/2006/math" xmlns="" val="1"/>
             </a:ext>
           </a:extLst>
         </p:spPr>
         <p:txBody>
           <a:bodyPr lIns="45719" rIns="45719">
-            <a:normAutofit fontScale="100000" lnSpcReduction="0"/>
+            <a:normAutofit/>
           </a:bodyPr>
           <a:lstStyle/>
           <a:p>
-            <a:pPr/>
             <a:r>
               <a:t>Body Level One</a:t>
             </a:r>
@@ -8602,7 +8797,9 @@
       <p:sp>
         <p:nvSpPr>
           <p:cNvPr id="5" name="Slide Number"/>
-          <p:cNvSpPr txBox="1"/>
+          <p:cNvSpPr txBox="1">
+            <a:spLocks noGrp="1"/>
+          </p:cNvSpPr>
           <p:nvPr>
             <p:ph type="sldNum" sz="quarter" idx="2"/>
           </p:nvPr>
@@ -8633,8 +8830,10 @@
             </a:lvl1pPr>
           </a:lstStyle>
           <a:p>
-            <a:pPr/>
-            <a:fld id="{86CB4B4D-7CA3-9044-876B-883B54F8677D}" type="slidenum"/>
+            <a:fld id="{86CB4B4D-7CA3-9044-876B-883B54F8677D}" type="slidenum">
+              <a:t>‹#›</a:t>
+            </a:fld>
+            <a:endParaRPr/>
           </a:p>
         </p:txBody>
       </p:sp>
@@ -8642,27 +8841,27 @@
   </p:cSld>
   <p:clrMap bg1="lt1" tx1="dk1" bg2="lt2" tx2="dk2" accent1="accent1" accent2="accent2" accent3="accent3" accent4="accent4" accent5="accent5" accent6="accent6" hlink="hlink" folHlink="folHlink"/>
   <p:sldLayoutIdLst>
-    <p:sldLayoutId id="2147483649" r:id="rId3"/>
-    <p:sldLayoutId id="2147483650" r:id="rId4"/>
-    <p:sldLayoutId id="2147483651" r:id="rId5"/>
-    <p:sldLayoutId id="2147483652" r:id="rId6"/>
-    <p:sldLayoutId id="2147483653" r:id="rId7"/>
-    <p:sldLayoutId id="2147483654" r:id="rId8"/>
-    <p:sldLayoutId id="2147483655" r:id="rId9"/>
-    <p:sldLayoutId id="2147483656" r:id="rId10"/>
-    <p:sldLayoutId id="2147483657" r:id="rId11"/>
-    <p:sldLayoutId id="2147483658" r:id="rId12"/>
-    <p:sldLayoutId id="2147483659" r:id="rId13"/>
-    <p:sldLayoutId id="2147483660" r:id="rId14"/>
-    <p:sldLayoutId id="2147483661" r:id="rId15"/>
-    <p:sldLayoutId id="2147483662" r:id="rId16"/>
-    <p:sldLayoutId id="2147483663" r:id="rId17"/>
-    <p:sldLayoutId id="2147483664" r:id="rId18"/>
-    <p:sldLayoutId id="2147483665" r:id="rId19"/>
-    <p:sldLayoutId id="2147483666" r:id="rId20"/>
-    <p:sldLayoutId id="2147483667" r:id="rId21"/>
+    <p:sldLayoutId id="2147483649" r:id="rId1"/>
+    <p:sldLayoutId id="2147483650" r:id="rId2"/>
+    <p:sldLayoutId id="2147483651" r:id="rId3"/>
+    <p:sldLayoutId id="2147483652" r:id="rId4"/>
+    <p:sldLayoutId id="2147483653" r:id="rId5"/>
+    <p:sldLayoutId id="2147483654" r:id="rId6"/>
+    <p:sldLayoutId id="2147483655" r:id="rId7"/>
+    <p:sldLayoutId id="2147483656" r:id="rId8"/>
+    <p:sldLayoutId id="2147483657" r:id="rId9"/>
+    <p:sldLayoutId id="2147483658" r:id="rId10"/>
+    <p:sldLayoutId id="2147483659" r:id="rId11"/>
+    <p:sldLayoutId id="2147483660" r:id="rId12"/>
+    <p:sldLayoutId id="2147483661" r:id="rId13"/>
+    <p:sldLayoutId id="2147483662" r:id="rId14"/>
+    <p:sldLayoutId id="2147483663" r:id="rId15"/>
+    <p:sldLayoutId id="2147483664" r:id="rId16"/>
+    <p:sldLayoutId id="2147483665" r:id="rId17"/>
+    <p:sldLayoutId id="2147483666" r:id="rId18"/>
+    <p:sldLayoutId id="2147483667" r:id="rId19"/>
   </p:sldLayoutIdLst>
-  <p:transition xmlns:p14="http://schemas.microsoft.com/office/powerpoint/2010/main" spd="med" advClick="1"/>
+  <p:transition spd="med"/>
   <p:txStyles>
     <p:titleStyle>
       <a:lvl1pPr marL="0" marR="0" indent="0" algn="l" defTabSz="914400" rtl="0" latinLnBrk="0">
@@ -8680,7 +8879,7 @@
         <a:buFontTx/>
         <a:buNone/>
         <a:tabLst/>
-        <a:defRPr b="0" baseline="0" cap="all" i="0" spc="150" strike="noStrike" sz="3600" u="none">
+        <a:defRPr sz="3600" b="0" i="0" u="none" strike="noStrike" cap="all" spc="150" baseline="0">
           <a:solidFill>
             <a:srgbClr val="404040"/>
           </a:solidFill>
@@ -8706,7 +8905,7 @@
         <a:buFontTx/>
         <a:buNone/>
         <a:tabLst/>
-        <a:defRPr b="0" baseline="0" cap="all" i="0" spc="150" strike="noStrike" sz="3600" u="none">
+        <a:defRPr sz="3600" b="0" i="0" u="none" strike="noStrike" cap="all" spc="150" baseline="0">
           <a:solidFill>
             <a:srgbClr val="404040"/>
           </a:solidFill>
@@ -8732,7 +8931,7 @@
         <a:buFontTx/>
         <a:buNone/>
         <a:tabLst/>
-        <a:defRPr b="0" baseline="0" cap="all" i="0" spc="150" strike="noStrike" sz="3600" u="none">
+        <a:defRPr sz="3600" b="0" i="0" u="none" strike="noStrike" cap="all" spc="150" baseline="0">
           <a:solidFill>
             <a:srgbClr val="404040"/>
           </a:solidFill>
@@ -8758,7 +8957,7 @@
         <a:buFontTx/>
         <a:buNone/>
         <a:tabLst/>
-        <a:defRPr b="0" baseline="0" cap="all" i="0" spc="150" strike="noStrike" sz="3600" u="none">
+        <a:defRPr sz="3600" b="0" i="0" u="none" strike="noStrike" cap="all" spc="150" baseline="0">
           <a:solidFill>
             <a:srgbClr val="404040"/>
           </a:solidFill>
@@ -8784,7 +8983,7 @@
         <a:buFontTx/>
         <a:buNone/>
         <a:tabLst/>
-        <a:defRPr b="0" baseline="0" cap="all" i="0" spc="150" strike="noStrike" sz="3600" u="none">
+        <a:defRPr sz="3600" b="0" i="0" u="none" strike="noStrike" cap="all" spc="150" baseline="0">
           <a:solidFill>
             <a:srgbClr val="404040"/>
           </a:solidFill>
@@ -8810,7 +9009,7 @@
         <a:buFontTx/>
         <a:buNone/>
         <a:tabLst/>
-        <a:defRPr b="0" baseline="0" cap="all" i="0" spc="150" strike="noStrike" sz="3600" u="none">
+        <a:defRPr sz="3600" b="0" i="0" u="none" strike="noStrike" cap="all" spc="150" baseline="0">
           <a:solidFill>
             <a:srgbClr val="404040"/>
           </a:solidFill>
@@ -8836,7 +9035,7 @@
         <a:buFontTx/>
         <a:buNone/>
         <a:tabLst/>
-        <a:defRPr b="0" baseline="0" cap="all" i="0" spc="150" strike="noStrike" sz="3600" u="none">
+        <a:defRPr sz="3600" b="0" i="0" u="none" strike="noStrike" cap="all" spc="150" baseline="0">
           <a:solidFill>
             <a:srgbClr val="404040"/>
           </a:solidFill>
@@ -8862,7 +9061,7 @@
         <a:buFontTx/>
         <a:buNone/>
         <a:tabLst/>
-        <a:defRPr b="0" baseline="0" cap="all" i="0" spc="150" strike="noStrike" sz="3600" u="none">
+        <a:defRPr sz="3600" b="0" i="0" u="none" strike="noStrike" cap="all" spc="150" baseline="0">
           <a:solidFill>
             <a:srgbClr val="404040"/>
           </a:solidFill>
@@ -8888,7 +9087,7 @@
         <a:buFontTx/>
         <a:buNone/>
         <a:tabLst/>
-        <a:defRPr b="0" baseline="0" cap="all" i="0" spc="150" strike="noStrike" sz="3600" u="none">
+        <a:defRPr sz="3600" b="0" i="0" u="none" strike="noStrike" cap="all" spc="150" baseline="0">
           <a:solidFill>
             <a:srgbClr val="404040"/>
           </a:solidFill>
@@ -8916,7 +9115,7 @@
         <a:buFont typeface="Arial"/>
         <a:buChar char="•"/>
         <a:tabLst/>
-        <a:defRPr b="0" baseline="0" cap="none" i="0" spc="0" strike="noStrike" sz="2800" u="none">
+        <a:defRPr sz="2800" b="0" i="0" u="none" strike="noStrike" cap="none" spc="0" baseline="0">
           <a:solidFill>
             <a:srgbClr val="404040"/>
           </a:solidFill>
@@ -8942,7 +9141,7 @@
         <a:buFont typeface="Arial"/>
         <a:buChar char="•"/>
         <a:tabLst/>
-        <a:defRPr b="0" baseline="0" cap="none" i="0" spc="0" strike="noStrike" sz="2800" u="none">
+        <a:defRPr sz="2800" b="0" i="0" u="none" strike="noStrike" cap="none" spc="0" baseline="0">
           <a:solidFill>
             <a:srgbClr val="404040"/>
           </a:solidFill>
@@ -8968,7 +9167,7 @@
         <a:buFont typeface="Arial"/>
         <a:buChar char="•"/>
         <a:tabLst/>
-        <a:defRPr b="0" baseline="0" cap="none" i="0" spc="0" strike="noStrike" sz="2800" u="none">
+        <a:defRPr sz="2800" b="0" i="0" u="none" strike="noStrike" cap="none" spc="0" baseline="0">
           <a:solidFill>
             <a:srgbClr val="404040"/>
           </a:solidFill>
@@ -8994,7 +9193,7 @@
         <a:buFont typeface="Arial"/>
         <a:buChar char="•"/>
         <a:tabLst/>
-        <a:defRPr b="0" baseline="0" cap="none" i="0" spc="0" strike="noStrike" sz="2800" u="none">
+        <a:defRPr sz="2800" b="0" i="0" u="none" strike="noStrike" cap="none" spc="0" baseline="0">
           <a:solidFill>
             <a:srgbClr val="404040"/>
           </a:solidFill>
@@ -9020,7 +9219,7 @@
         <a:buFont typeface="Arial"/>
         <a:buChar char="•"/>
         <a:tabLst/>
-        <a:defRPr b="0" baseline="0" cap="none" i="0" spc="0" strike="noStrike" sz="2800" u="none">
+        <a:defRPr sz="2800" b="0" i="0" u="none" strike="noStrike" cap="none" spc="0" baseline="0">
           <a:solidFill>
             <a:srgbClr val="404040"/>
           </a:solidFill>
@@ -9046,7 +9245,7 @@
         <a:buFont typeface="Arial"/>
         <a:buChar char="•"/>
         <a:tabLst/>
-        <a:defRPr b="0" baseline="0" cap="none" i="0" spc="0" strike="noStrike" sz="2800" u="none">
+        <a:defRPr sz="2800" b="0" i="0" u="none" strike="noStrike" cap="none" spc="0" baseline="0">
           <a:solidFill>
             <a:srgbClr val="404040"/>
           </a:solidFill>
@@ -9072,7 +9271,7 @@
         <a:buFont typeface="Arial"/>
         <a:buChar char="•"/>
         <a:tabLst/>
-        <a:defRPr b="0" baseline="0" cap="none" i="0" spc="0" strike="noStrike" sz="2800" u="none">
+        <a:defRPr sz="2800" b="0" i="0" u="none" strike="noStrike" cap="none" spc="0" baseline="0">
           <a:solidFill>
             <a:srgbClr val="404040"/>
           </a:solidFill>
@@ -9098,7 +9297,7 @@
         <a:buFont typeface="Arial"/>
         <a:buChar char="•"/>
         <a:tabLst/>
-        <a:defRPr b="0" baseline="0" cap="none" i="0" spc="0" strike="noStrike" sz="2800" u="none">
+        <a:defRPr sz="2800" b="0" i="0" u="none" strike="noStrike" cap="none" spc="0" baseline="0">
           <a:solidFill>
             <a:srgbClr val="404040"/>
           </a:solidFill>
@@ -9124,7 +9323,7 @@
         <a:buFont typeface="Arial"/>
         <a:buChar char="•"/>
         <a:tabLst/>
-        <a:defRPr b="0" baseline="0" cap="none" i="0" spc="0" strike="noStrike" sz="2800" u="none">
+        <a:defRPr sz="2800" b="0" i="0" u="none" strike="noStrike" cap="none" spc="0" baseline="0">
           <a:solidFill>
             <a:srgbClr val="404040"/>
           </a:solidFill>
@@ -9152,7 +9351,7 @@
         <a:buFontTx/>
         <a:buNone/>
         <a:tabLst/>
-        <a:defRPr b="0" baseline="0" cap="none" i="0" spc="0" strike="noStrike" sz="900" u="none">
+        <a:defRPr sz="900" b="0" i="0" u="none" strike="noStrike" cap="none" spc="0" baseline="0">
           <a:solidFill>
             <a:schemeClr val="tx1"/>
           </a:solidFill>
@@ -9178,7 +9377,7 @@
         <a:buFontTx/>
         <a:buNone/>
         <a:tabLst/>
-        <a:defRPr b="0" baseline="0" cap="none" i="0" spc="0" strike="noStrike" sz="900" u="none">
+        <a:defRPr sz="900" b="0" i="0" u="none" strike="noStrike" cap="none" spc="0" baseline="0">
           <a:solidFill>
             <a:schemeClr val="tx1"/>
           </a:solidFill>
@@ -9204,7 +9403,7 @@
         <a:buFontTx/>
         <a:buNone/>
         <a:tabLst/>
-        <a:defRPr b="0" baseline="0" cap="none" i="0" spc="0" strike="noStrike" sz="900" u="none">
+        <a:defRPr sz="900" b="0" i="0" u="none" strike="noStrike" cap="none" spc="0" baseline="0">
           <a:solidFill>
             <a:schemeClr val="tx1"/>
           </a:solidFill>
@@ -9230,7 +9429,7 @@
         <a:buFontTx/>
         <a:buNone/>
         <a:tabLst/>
-        <a:defRPr b="0" baseline="0" cap="none" i="0" spc="0" strike="noStrike" sz="900" u="none">
+        <a:defRPr sz="900" b="0" i="0" u="none" strike="noStrike" cap="none" spc="0" baseline="0">
           <a:solidFill>
             <a:schemeClr val="tx1"/>
           </a:solidFill>
@@ -9256,7 +9455,7 @@
         <a:buFontTx/>
         <a:buNone/>
         <a:tabLst/>
-        <a:defRPr b="0" baseline="0" cap="none" i="0" spc="0" strike="noStrike" sz="900" u="none">
+        <a:defRPr sz="900" b="0" i="0" u="none" strike="noStrike" cap="none" spc="0" baseline="0">
           <a:solidFill>
             <a:schemeClr val="tx1"/>
           </a:solidFill>
@@ -9282,7 +9481,7 @@
         <a:buFontTx/>
         <a:buNone/>
         <a:tabLst/>
-        <a:defRPr b="0" baseline="0" cap="none" i="0" spc="0" strike="noStrike" sz="900" u="none">
+        <a:defRPr sz="900" b="0" i="0" u="none" strike="noStrike" cap="none" spc="0" baseline="0">
           <a:solidFill>
             <a:schemeClr val="tx1"/>
           </a:solidFill>
@@ -9308,7 +9507,7 @@
         <a:buFontTx/>
         <a:buNone/>
         <a:tabLst/>
-        <a:defRPr b="0" baseline="0" cap="none" i="0" spc="0" strike="noStrike" sz="900" u="none">
+        <a:defRPr sz="900" b="0" i="0" u="none" strike="noStrike" cap="none" spc="0" baseline="0">
           <a:solidFill>
             <a:schemeClr val="tx1"/>
           </a:solidFill>
@@ -9334,7 +9533,7 @@
         <a:buFontTx/>
         <a:buNone/>
         <a:tabLst/>
-        <a:defRPr b="0" baseline="0" cap="none" i="0" spc="0" strike="noStrike" sz="900" u="none">
+        <a:defRPr sz="900" b="0" i="0" u="none" strike="noStrike" cap="none" spc="0" baseline="0">
           <a:solidFill>
             <a:schemeClr val="tx1"/>
           </a:solidFill>
@@ -9360,7 +9559,7 @@
         <a:buFontTx/>
         <a:buNone/>
         <a:tabLst/>
-        <a:defRPr b="0" baseline="0" cap="none" i="0" spc="0" strike="noStrike" sz="900" u="none">
+        <a:defRPr sz="900" b="0" i="0" u="none" strike="noStrike" cap="none" spc="0" baseline="0">
           <a:solidFill>
             <a:schemeClr val="tx1"/>
           </a:solidFill>
@@ -9377,7 +9576,7 @@
 </file>
 
 <file path=ppt/slides/slide1.xml><?xml version="1.0" encoding="utf-8"?>
-<p:sld xmlns:a="http://schemas.openxmlformats.org/drawingml/2006/main" xmlns:r="http://schemas.openxmlformats.org/officeDocument/2006/relationships" xmlns:p="http://schemas.openxmlformats.org/presentationml/2006/main" xmlns:m="http://schemas.openxmlformats.org/officeDocument/2006/math" xmlns:a14="http://schemas.microsoft.com/office/drawing/2010/main" showMasterSp="1" showMasterPhAnim="1">
+<p:sld xmlns:a="http://schemas.openxmlformats.org/drawingml/2006/main" xmlns:r="http://schemas.openxmlformats.org/officeDocument/2006/relationships" xmlns:p="http://schemas.openxmlformats.org/presentationml/2006/main">
   <p:cSld>
     <p:spTree>
       <p:nvGrpSpPr>
@@ -9396,7 +9595,9 @@
       <p:sp>
         <p:nvSpPr>
           <p:cNvPr id="323" name="Title 1"/>
-          <p:cNvSpPr txBox="1"/>
+          <p:cNvSpPr txBox="1">
+            <a:spLocks noGrp="1"/>
+          </p:cNvSpPr>
           <p:nvPr>
             <p:ph type="ctrTitle"/>
           </p:nvPr>
@@ -9414,11 +9615,10 @@
           <a:bodyPr/>
           <a:lstStyle>
             <a:lvl1pPr defTabSz="905255">
-              <a:defRPr spc="99" sz="3564"/>
-            </a:lvl1pPr>
-          </a:lstStyle>
-          <a:p>
-            <a:pPr/>
+              <a:defRPr sz="3564" spc="99"/>
+            </a:lvl1pPr>
+          </a:lstStyle>
+          <a:p>
             <a:r>
               <a:t>Group A Presentation</a:t>
             </a:r>
@@ -9428,7 +9628,9 @@
       <p:sp>
         <p:nvSpPr>
           <p:cNvPr id="324" name="Subtitle 2"/>
-          <p:cNvSpPr txBox="1"/>
+          <p:cNvSpPr txBox="1">
+            <a:spLocks noGrp="1"/>
+          </p:cNvSpPr>
           <p:nvPr>
             <p:ph type="subTitle" sz="quarter" idx="1"/>
           </p:nvPr>
@@ -9453,7 +9655,6 @@
             </a:lvl1pPr>
           </a:lstStyle>
           <a:p>
-            <a:pPr/>
             <a:r>
               <a:t>Richard Badea, Rostyslav Kuznets, Kevin Alabi, King Diamonds Ebs</a:t>
             </a:r>
@@ -9465,12 +9666,12 @@
   <p:clrMapOvr>
     <a:masterClrMapping/>
   </p:clrMapOvr>
-  <p:transition xmlns:p14="http://schemas.microsoft.com/office/powerpoint/2010/main" spd="med" advClick="1"/>
+  <p:transition spd="med"/>
 </p:sld>
 </file>
 
 <file path=ppt/slides/slide2.xml><?xml version="1.0" encoding="utf-8"?>
-<p:sld xmlns:a="http://schemas.openxmlformats.org/drawingml/2006/main" xmlns:r="http://schemas.openxmlformats.org/officeDocument/2006/relationships" xmlns:p="http://schemas.openxmlformats.org/presentationml/2006/main" xmlns:m="http://schemas.openxmlformats.org/officeDocument/2006/math" xmlns:a14="http://schemas.microsoft.com/office/drawing/2010/main" showMasterSp="1" showMasterPhAnim="1">
+<p:sld xmlns:a="http://schemas.openxmlformats.org/drawingml/2006/main" xmlns:r="http://schemas.openxmlformats.org/officeDocument/2006/relationships" xmlns:p="http://schemas.openxmlformats.org/presentationml/2006/main">
   <p:cSld>
     <p:spTree>
       <p:nvGrpSpPr>
@@ -9505,7 +9706,7 @@
           </a:ln>
           <a:extLst>
             <a:ext uri="{C572A759-6A51-4108-AA02-DFA0A04FC94B}">
-              <ma14:wrappingTextBoxFlag xmlns:ma14="http://schemas.microsoft.com/office/mac/drawingml/2011/main" val="1"/>
+              <ma14:wrappingTextBoxFlag xmlns:ma14="http://schemas.microsoft.com/office/mac/drawingml/2011/main" xmlns:a14="http://schemas.microsoft.com/office/drawing/2010/main" xmlns:m="http://schemas.openxmlformats.org/officeDocument/2006/math" xmlns="" val="1"/>
             </a:ext>
           </a:extLst>
         </p:spPr>
@@ -9524,7 +9725,6 @@
             </a:lvl1pPr>
           </a:lstStyle>
           <a:p>
-            <a:pPr/>
             <a:r>
               <a:t>Rostyslav Kuznets</a:t>
             </a:r>
@@ -9534,7 +9734,9 @@
       <p:sp>
         <p:nvSpPr>
           <p:cNvPr id="327" name="Title 1"/>
-          <p:cNvSpPr txBox="1"/>
+          <p:cNvSpPr txBox="1">
+            <a:spLocks noGrp="1"/>
+          </p:cNvSpPr>
           <p:nvPr>
             <p:ph type="title"/>
           </p:nvPr>
@@ -9556,7 +9758,6 @@
             </a:lvl1pPr>
           </a:lstStyle>
           <a:p>
-            <a:pPr/>
             <a:r>
               <a:t>System Overview</a:t>
             </a:r>
@@ -9566,7 +9767,9 @@
       <p:sp>
         <p:nvSpPr>
           <p:cNvPr id="328" name="Subtitle 2"/>
-          <p:cNvSpPr txBox="1"/>
+          <p:cNvSpPr txBox="1">
+            <a:spLocks noGrp="1"/>
+          </p:cNvSpPr>
           <p:nvPr>
             <p:ph type="body" sz="quarter" idx="1"/>
           </p:nvPr>
@@ -9652,7 +9855,7 @@
           </a:ln>
           <a:extLst>
             <a:ext uri="{C572A759-6A51-4108-AA02-DFA0A04FC94B}">
-              <ma14:wrappingTextBoxFlag xmlns:ma14="http://schemas.microsoft.com/office/mac/drawingml/2011/main" val="1"/>
+              <ma14:wrappingTextBoxFlag xmlns:ma14="http://schemas.microsoft.com/office/mac/drawingml/2011/main" xmlns:a14="http://schemas.microsoft.com/office/drawing/2010/main" xmlns:m="http://schemas.openxmlformats.org/officeDocument/2006/math" xmlns="" val="1"/>
             </a:ext>
           </a:extLst>
         </p:spPr>
@@ -9670,7 +9873,6 @@
             </a:lvl1pPr>
           </a:lstStyle>
           <a:p>
-            <a:pPr/>
             <a:r>
               <a:t>2026</a:t>
             </a:r>
@@ -9680,7 +9882,9 @@
       <p:sp>
         <p:nvSpPr>
           <p:cNvPr id="330" name="Slide Number Placeholder 3"/>
-          <p:cNvSpPr txBox="1"/>
+          <p:cNvSpPr txBox="1">
+            <a:spLocks noGrp="1"/>
+          </p:cNvSpPr>
           <p:nvPr>
             <p:ph type="sldNum" sz="quarter" idx="2"/>
           </p:nvPr>
@@ -9695,7 +9899,7 @@
           </a:prstGeom>
           <a:extLst>
             <a:ext uri="{C572A759-6A51-4108-AA02-DFA0A04FC94B}">
-              <ma14:wrappingTextBoxFlag xmlns:ma14="http://schemas.microsoft.com/office/mac/drawingml/2011/main" val="1"/>
+              <ma14:wrappingTextBoxFlag xmlns:ma14="http://schemas.microsoft.com/office/mac/drawingml/2011/main" xmlns:a14="http://schemas.microsoft.com/office/drawing/2010/main" xmlns:m="http://schemas.openxmlformats.org/officeDocument/2006/math" xmlns="" val="1"/>
             </a:ext>
           </a:extLst>
         </p:spPr>
@@ -9703,8 +9907,10 @@
           <a:bodyPr/>
           <a:lstStyle/>
           <a:p>
-            <a:pPr/>
-            <a:fld id="{86CB4B4D-7CA3-9044-876B-883B54F8677D}" type="slidenum"/>
+            <a:fld id="{86CB4B4D-7CA3-9044-876B-883B54F8677D}" type="slidenum">
+              <a:t>2</a:t>
+            </a:fld>
+            <a:endParaRPr/>
           </a:p>
         </p:txBody>
       </p:sp>
@@ -9713,12 +9919,12 @@
   <p:clrMapOvr>
     <a:masterClrMapping/>
   </p:clrMapOvr>
-  <p:transition xmlns:p14="http://schemas.microsoft.com/office/powerpoint/2010/main" spd="med" advClick="1"/>
+  <p:transition spd="med"/>
 </p:sld>
 </file>
 
 <file path=ppt/slides/slide3.xml><?xml version="1.0" encoding="utf-8"?>
-<p:sld xmlns:a="http://schemas.openxmlformats.org/drawingml/2006/main" xmlns:r="http://schemas.openxmlformats.org/officeDocument/2006/relationships" xmlns:p="http://schemas.openxmlformats.org/presentationml/2006/main" xmlns:m="http://schemas.openxmlformats.org/officeDocument/2006/math" xmlns:a14="http://schemas.microsoft.com/office/drawing/2010/main" showMasterSp="1" showMasterPhAnim="1">
+<p:sld xmlns:a="http://schemas.openxmlformats.org/drawingml/2006/main" xmlns:r="http://schemas.openxmlformats.org/officeDocument/2006/relationships" xmlns:p="http://schemas.openxmlformats.org/presentationml/2006/main">
   <p:cSld>
     <p:spTree>
       <p:nvGrpSpPr>
@@ -9753,7 +9959,7 @@
           </a:ln>
           <a:extLst>
             <a:ext uri="{C572A759-6A51-4108-AA02-DFA0A04FC94B}">
-              <ma14:wrappingTextBoxFlag xmlns:ma14="http://schemas.microsoft.com/office/mac/drawingml/2011/main" val="1"/>
+              <ma14:wrappingTextBoxFlag xmlns:ma14="http://schemas.microsoft.com/office/mac/drawingml/2011/main" xmlns:a14="http://schemas.microsoft.com/office/drawing/2010/main" xmlns:m="http://schemas.openxmlformats.org/officeDocument/2006/math" xmlns="" val="1"/>
             </a:ext>
           </a:extLst>
         </p:spPr>
@@ -9772,7 +9978,6 @@
             </a:lvl1pPr>
           </a:lstStyle>
           <a:p>
-            <a:pPr/>
             <a:r>
               <a:t>Richard Badea</a:t>
             </a:r>
@@ -9782,7 +9987,9 @@
       <p:sp>
         <p:nvSpPr>
           <p:cNvPr id="333" name="Title 1"/>
-          <p:cNvSpPr txBox="1"/>
+          <p:cNvSpPr txBox="1">
+            <a:spLocks noGrp="1"/>
+          </p:cNvSpPr>
           <p:nvPr>
             <p:ph type="title"/>
           </p:nvPr>
@@ -9804,7 +10011,6 @@
             </a:lvl1pPr>
           </a:lstStyle>
           <a:p>
-            <a:pPr/>
             <a:r>
               <a:t>Demonstration of prototype</a:t>
             </a:r>
@@ -9814,7 +10020,9 @@
       <p:sp>
         <p:nvSpPr>
           <p:cNvPr id="334" name="Content Placeholder 2"/>
-          <p:cNvSpPr txBox="1"/>
+          <p:cNvSpPr txBox="1">
+            <a:spLocks noGrp="1"/>
+          </p:cNvSpPr>
           <p:nvPr>
             <p:ph type="body" sz="quarter" idx="1"/>
           </p:nvPr>
@@ -9859,6 +10067,7 @@
                 <a:sym typeface="Abadi"/>
               </a:defRPr>
             </a:pPr>
+            <a:endParaRPr/>
           </a:p>
           <a:p>
             <a:pPr marL="285750" indent="-285750">
@@ -9888,6 +10097,7 @@
                 <a:sym typeface="Abadi"/>
               </a:defRPr>
             </a:pPr>
+            <a:endParaRPr/>
           </a:p>
           <a:p>
             <a:pPr marL="285750" indent="-285750">
@@ -9926,7 +10136,7 @@
           </a:ln>
           <a:extLst>
             <a:ext uri="{C572A759-6A51-4108-AA02-DFA0A04FC94B}">
-              <ma14:wrappingTextBoxFlag xmlns:ma14="http://schemas.microsoft.com/office/mac/drawingml/2011/main" val="1"/>
+              <ma14:wrappingTextBoxFlag xmlns:ma14="http://schemas.microsoft.com/office/mac/drawingml/2011/main" xmlns:a14="http://schemas.microsoft.com/office/drawing/2010/main" xmlns:m="http://schemas.openxmlformats.org/officeDocument/2006/math" xmlns="" val="1"/>
             </a:ext>
           </a:extLst>
         </p:spPr>
@@ -9948,7 +10158,6 @@
             </a:lvl1pPr>
           </a:lstStyle>
           <a:p>
-            <a:pPr/>
             <a:r>
               <a:t>2026</a:t>
             </a:r>
@@ -9958,7 +10167,9 @@
       <p:sp>
         <p:nvSpPr>
           <p:cNvPr id="336" name="Slide Number Placeholder 5"/>
-          <p:cNvSpPr txBox="1"/>
+          <p:cNvSpPr txBox="1">
+            <a:spLocks noGrp="1"/>
+          </p:cNvSpPr>
           <p:nvPr>
             <p:ph type="sldNum" sz="quarter" idx="2"/>
           </p:nvPr>
@@ -9973,7 +10184,7 @@
           </a:prstGeom>
           <a:extLst>
             <a:ext uri="{C572A759-6A51-4108-AA02-DFA0A04FC94B}">
-              <ma14:wrappingTextBoxFlag xmlns:ma14="http://schemas.microsoft.com/office/mac/drawingml/2011/main" val="1"/>
+              <ma14:wrappingTextBoxFlag xmlns:ma14="http://schemas.microsoft.com/office/mac/drawingml/2011/main" xmlns:a14="http://schemas.microsoft.com/office/drawing/2010/main" xmlns:m="http://schemas.openxmlformats.org/officeDocument/2006/math" xmlns="" val="1"/>
             </a:ext>
           </a:extLst>
         </p:spPr>
@@ -9981,8 +10192,10 @@
           <a:bodyPr/>
           <a:lstStyle/>
           <a:p>
-            <a:pPr/>
-            <a:fld id="{86CB4B4D-7CA3-9044-876B-883B54F8677D}" type="slidenum"/>
+            <a:fld id="{86CB4B4D-7CA3-9044-876B-883B54F8677D}" type="slidenum">
+              <a:t>3</a:t>
+            </a:fld>
+            <a:endParaRPr/>
           </a:p>
         </p:txBody>
       </p:sp>
@@ -9995,9 +10208,7 @@
           <p:nvPr/>
         </p:nvPicPr>
         <p:blipFill>
-          <a:blip r:embed="rId2">
-            <a:extLst/>
-          </a:blip>
+          <a:blip r:embed="rId2"/>
           <a:stretch>
             <a:fillRect/>
           </a:stretch>
@@ -10020,12 +10231,12 @@
   <p:clrMapOvr>
     <a:masterClrMapping/>
   </p:clrMapOvr>
-  <p:transition xmlns:p14="http://schemas.microsoft.com/office/powerpoint/2010/main" spd="med" advClick="1"/>
+  <p:transition spd="med"/>
 </p:sld>
 </file>
 
 <file path=ppt/slides/slide4.xml><?xml version="1.0" encoding="utf-8"?>
-<p:sld xmlns:a="http://schemas.openxmlformats.org/drawingml/2006/main" xmlns:r="http://schemas.openxmlformats.org/officeDocument/2006/relationships" xmlns:p="http://schemas.openxmlformats.org/presentationml/2006/main" xmlns:m="http://schemas.openxmlformats.org/officeDocument/2006/math" xmlns:a14="http://schemas.microsoft.com/office/drawing/2010/main" showMasterSp="1" showMasterPhAnim="1">
+<p:sld xmlns:a="http://schemas.openxmlformats.org/drawingml/2006/main" xmlns:r="http://schemas.openxmlformats.org/officeDocument/2006/relationships" xmlns:p="http://schemas.openxmlformats.org/presentationml/2006/main">
   <p:cSld>
     <p:spTree>
       <p:nvGrpSpPr>
@@ -10044,7 +10255,9 @@
       <p:sp>
         <p:nvSpPr>
           <p:cNvPr id="339" name="Challenges faced"/>
-          <p:cNvSpPr txBox="1"/>
+          <p:cNvSpPr txBox="1">
+            <a:spLocks noGrp="1"/>
+          </p:cNvSpPr>
           <p:nvPr>
             <p:ph type="title"/>
           </p:nvPr>
@@ -10059,7 +10272,7 @@
           <a:lstStyle/>
           <a:p>
             <a:pPr defTabSz="740663">
-              <a:defRPr spc="121" sz="2268"/>
+              <a:defRPr sz="2268" spc="121"/>
             </a:pPr>
             <a:r>
               <a:t>Challenges faced</a:t>
@@ -10067,15 +10280,18 @@
           </a:p>
           <a:p>
             <a:pPr defTabSz="740663">
-              <a:defRPr spc="121" sz="2268"/>
+              <a:defRPr sz="2268" spc="121"/>
             </a:pPr>
+            <a:endParaRPr/>
           </a:p>
         </p:txBody>
       </p:sp>
       <p:sp>
         <p:nvSpPr>
           <p:cNvPr id="340" name="Some challenges we faced were,…"/>
-          <p:cNvSpPr txBox="1"/>
+          <p:cNvSpPr txBox="1">
+            <a:spLocks noGrp="1"/>
+          </p:cNvSpPr>
           <p:nvPr>
             <p:ph type="body" sz="quarter" idx="1"/>
           </p:nvPr>
@@ -10089,25 +10305,21 @@
           <a:bodyPr/>
           <a:lstStyle/>
           <a:p>
-            <a:pPr/>
             <a:r>
               <a:t>Some challenges we faced were,</a:t>
             </a:r>
           </a:p>
           <a:p>
-            <a:pPr/>
             <a:r>
               <a:t>Handling invalid input</a:t>
             </a:r>
           </a:p>
           <a:p>
-            <a:pPr/>
             <a:r>
               <a:t>Fixing the remove button logic</a:t>
             </a:r>
           </a:p>
           <a:p>
-            <a:pPr/>
             <a:r>
               <a:t>Working on GitHub as a team.</a:t>
             </a:r>
@@ -10117,7 +10329,9 @@
       <p:sp>
         <p:nvSpPr>
           <p:cNvPr id="341" name="Slide Number"/>
-          <p:cNvSpPr txBox="1"/>
+          <p:cNvSpPr txBox="1">
+            <a:spLocks noGrp="1"/>
+          </p:cNvSpPr>
           <p:nvPr>
             <p:ph type="sldNum" sz="quarter" idx="2"/>
           </p:nvPr>
@@ -10132,7 +10346,7 @@
           </a:prstGeom>
           <a:extLst>
             <a:ext uri="{C572A759-6A51-4108-AA02-DFA0A04FC94B}">
-              <ma14:wrappingTextBoxFlag xmlns:ma14="http://schemas.microsoft.com/office/mac/drawingml/2011/main" val="1"/>
+              <ma14:wrappingTextBoxFlag xmlns:ma14="http://schemas.microsoft.com/office/mac/drawingml/2011/main" xmlns:a14="http://schemas.microsoft.com/office/drawing/2010/main" xmlns:m="http://schemas.openxmlformats.org/officeDocument/2006/math" xmlns="" val="1"/>
             </a:ext>
           </a:extLst>
         </p:spPr>
@@ -10140,8 +10354,11 @@
           <a:bodyPr/>
           <a:lstStyle/>
           <a:p>
-            <a:pPr/>
-            <a:fld id="{86CB4B4D-7CA3-9044-876B-883B54F8677D}" type="slidenum"/>
+            <a:fld id="{86CB4B4D-7CA3-9044-876B-883B54F8677D}" type="slidenum">
+              <a:rPr/>
+              <a:t>4</a:t>
+            </a:fld>
+            <a:endParaRPr/>
           </a:p>
         </p:txBody>
       </p:sp>
@@ -10164,7 +10381,7 @@
           </a:ln>
           <a:extLst>
             <a:ext uri="{C572A759-6A51-4108-AA02-DFA0A04FC94B}">
-              <ma14:wrappingTextBoxFlag xmlns:ma14="http://schemas.microsoft.com/office/mac/drawingml/2011/main" val="1"/>
+              <ma14:wrappingTextBoxFlag xmlns:ma14="http://schemas.microsoft.com/office/mac/drawingml/2011/main" xmlns:a14="http://schemas.microsoft.com/office/drawing/2010/main" xmlns:m="http://schemas.openxmlformats.org/officeDocument/2006/math" xmlns="" val="1"/>
             </a:ext>
           </a:extLst>
         </p:spPr>
@@ -10174,7 +10391,6 @@
           </a:bodyPr>
           <a:lstStyle/>
           <a:p>
-            <a:pPr/>
             <a:r>
               <a:t>Kevin Alabi</a:t>
             </a:r>
@@ -10186,12 +10402,12 @@
   <p:clrMapOvr>
     <a:masterClrMapping/>
   </p:clrMapOvr>
-  <p:transition xmlns:p14="http://schemas.microsoft.com/office/powerpoint/2010/main" spd="med" advClick="1"/>
+  <p:transition spd="med"/>
 </p:sld>
 </file>
 
 <file path=ppt/slides/slide5.xml><?xml version="1.0" encoding="utf-8"?>
-<p:sld xmlns:a="http://schemas.openxmlformats.org/drawingml/2006/main" xmlns:r="http://schemas.openxmlformats.org/officeDocument/2006/relationships" xmlns:p="http://schemas.openxmlformats.org/presentationml/2006/main" xmlns:m="http://schemas.openxmlformats.org/officeDocument/2006/math" xmlns:a14="http://schemas.microsoft.com/office/drawing/2010/main" showMasterSp="1" showMasterPhAnim="1">
+<p:sld xmlns:a="http://schemas.openxmlformats.org/drawingml/2006/main" xmlns:r="http://schemas.openxmlformats.org/officeDocument/2006/relationships" xmlns:p="http://schemas.openxmlformats.org/presentationml/2006/main">
   <p:cSld>
     <p:spTree>
       <p:nvGrpSpPr>
@@ -10209,6 +10425,107 @@
       </p:grpSpPr>
       <p:sp>
         <p:nvSpPr>
+          <p:cNvPr id="2" name="Title 1">
+            <a:extLst>
+              <a:ext uri="{FF2B5EF4-FFF2-40B4-BE49-F238E27FC236}">
+                <a16:creationId xmlns:a16="http://schemas.microsoft.com/office/drawing/2014/main" id="{636DD14C-603D-0526-7293-C1CF9E2B4D18}"/>
+              </a:ext>
+            </a:extLst>
+          </p:cNvPr>
+          <p:cNvSpPr>
+            <a:spLocks noGrp="1"/>
+          </p:cNvSpPr>
+          <p:nvPr>
+            <p:ph type="title"/>
+          </p:nvPr>
+        </p:nvSpPr>
+        <p:spPr/>
+        <p:txBody>
+          <a:bodyPr/>
+          <a:lstStyle/>
+          <a:p>
+            <a:r>
+              <a:rPr lang="en-US" dirty="0"/>
+              <a:t>Scrum application</a:t>
+            </a:r>
+            <a:endParaRPr lang="en-GB" dirty="0"/>
+          </a:p>
+        </p:txBody>
+      </p:sp>
+      <p:sp>
+        <p:nvSpPr>
+          <p:cNvPr id="3" name="Text Placeholder 2">
+            <a:extLst>
+              <a:ext uri="{FF2B5EF4-FFF2-40B4-BE49-F238E27FC236}">
+                <a16:creationId xmlns:a16="http://schemas.microsoft.com/office/drawing/2014/main" id="{89C30586-4049-47F7-D1CB-3A2696329ED6}"/>
+              </a:ext>
+            </a:extLst>
+          </p:cNvPr>
+          <p:cNvSpPr>
+            <a:spLocks noGrp="1"/>
+          </p:cNvSpPr>
+          <p:nvPr>
+            <p:ph type="body" sz="quarter" idx="1"/>
+          </p:nvPr>
+        </p:nvSpPr>
+        <p:spPr/>
+        <p:txBody>
+          <a:bodyPr/>
+          <a:lstStyle/>
+          <a:p>
+            <a:r>
+              <a:rPr lang="en-US" dirty="0"/>
+              <a:t>Product roles</a:t>
+            </a:r>
+          </a:p>
+          <a:p>
+            <a:r>
+              <a:rPr lang="en-US" dirty="0"/>
+              <a:t>Sprint meetings</a:t>
+            </a:r>
+          </a:p>
+          <a:p>
+            <a:r>
+              <a:rPr lang="en-US" dirty="0"/>
+              <a:t>Scaling</a:t>
+            </a:r>
+            <a:endParaRPr lang="en-GB" dirty="0"/>
+          </a:p>
+        </p:txBody>
+      </p:sp>
+    </p:spTree>
+    <p:extLst>
+      <p:ext uri="{BB962C8B-B14F-4D97-AF65-F5344CB8AC3E}">
+        <p14:creationId xmlns:p14="http://schemas.microsoft.com/office/powerpoint/2010/main" val="3371590908"/>
+      </p:ext>
+    </p:extLst>
+  </p:cSld>
+  <p:clrMapOvr>
+    <a:masterClrMapping/>
+  </p:clrMapOvr>
+  <p:transition spd="med"/>
+</p:sld>
+</file>
+
+<file path=ppt/slides/slide6.xml><?xml version="1.0" encoding="utf-8"?>
+<p:sld xmlns:a="http://schemas.openxmlformats.org/drawingml/2006/main" xmlns:r="http://schemas.openxmlformats.org/officeDocument/2006/relationships" xmlns:p="http://schemas.openxmlformats.org/presentationml/2006/main">
+  <p:cSld>
+    <p:spTree>
+      <p:nvGrpSpPr>
+        <p:cNvPr id="1" name=""/>
+        <p:cNvGrpSpPr/>
+        <p:nvPr/>
+      </p:nvGrpSpPr>
+      <p:grpSpPr>
+        <a:xfrm>
+          <a:off x="0" y="0"/>
+          <a:ext cx="0" cy="0"/>
+          <a:chOff x="0" y="0"/>
+          <a:chExt cx="0" cy="0"/>
+        </a:xfrm>
+      </p:grpSpPr>
+      <p:sp>
+        <p:nvSpPr>
           <p:cNvPr id="344" name="Footer Placeholder 4"/>
           <p:cNvSpPr txBox="1"/>
           <p:nvPr/>
@@ -10226,7 +10543,7 @@
           </a:ln>
           <a:extLst>
             <a:ext uri="{C572A759-6A51-4108-AA02-DFA0A04FC94B}">
-              <ma14:wrappingTextBoxFlag xmlns:ma14="http://schemas.microsoft.com/office/mac/drawingml/2011/main" val="1"/>
+              <ma14:wrappingTextBoxFlag xmlns:ma14="http://schemas.microsoft.com/office/mac/drawingml/2011/main" xmlns:a14="http://schemas.microsoft.com/office/drawing/2010/main" xmlns:m="http://schemas.openxmlformats.org/officeDocument/2006/math" xmlns="" val="1"/>
             </a:ext>
           </a:extLst>
         </p:spPr>
@@ -10245,7 +10562,6 @@
             </a:lvl1pPr>
           </a:lstStyle>
           <a:p>
-            <a:pPr/>
             <a:r>
               <a:t>Group A</a:t>
             </a:r>
@@ -10255,7 +10571,9 @@
       <p:sp>
         <p:nvSpPr>
           <p:cNvPr id="345" name="Title 1"/>
-          <p:cNvSpPr txBox="1"/>
+          <p:cNvSpPr txBox="1">
+            <a:spLocks noGrp="1"/>
+          </p:cNvSpPr>
           <p:nvPr>
             <p:ph type="title"/>
           </p:nvPr>
@@ -10277,7 +10595,6 @@
             </a:lvl1pPr>
           </a:lstStyle>
           <a:p>
-            <a:pPr/>
             <a:r>
               <a:t>Thanks For Watching</a:t>
             </a:r>
@@ -10287,7 +10604,9 @@
       <p:sp>
         <p:nvSpPr>
           <p:cNvPr id="346" name="Content Placeholder 2"/>
-          <p:cNvSpPr txBox="1"/>
+          <p:cNvSpPr txBox="1">
+            <a:spLocks noGrp="1"/>
+          </p:cNvSpPr>
           <p:nvPr>
             <p:ph type="body" sz="quarter" idx="1"/>
           </p:nvPr>
@@ -10357,7 +10676,7 @@
           </a:ln>
           <a:extLst>
             <a:ext uri="{C572A759-6A51-4108-AA02-DFA0A04FC94B}">
-              <ma14:wrappingTextBoxFlag xmlns:ma14="http://schemas.microsoft.com/office/mac/drawingml/2011/main" val="1"/>
+              <ma14:wrappingTextBoxFlag xmlns:ma14="http://schemas.microsoft.com/office/mac/drawingml/2011/main" xmlns:a14="http://schemas.microsoft.com/office/drawing/2010/main" xmlns:m="http://schemas.openxmlformats.org/officeDocument/2006/math" xmlns="" val="1"/>
             </a:ext>
           </a:extLst>
         </p:spPr>
@@ -10379,7 +10698,6 @@
             </a:lvl1pPr>
           </a:lstStyle>
           <a:p>
-            <a:pPr/>
             <a:r>
               <a:t>2026</a:t>
             </a:r>
@@ -10389,7 +10707,9 @@
       <p:sp>
         <p:nvSpPr>
           <p:cNvPr id="348" name="Slide Number Placeholder 5"/>
-          <p:cNvSpPr txBox="1"/>
+          <p:cNvSpPr txBox="1">
+            <a:spLocks noGrp="1"/>
+          </p:cNvSpPr>
           <p:nvPr>
             <p:ph type="sldNum" sz="quarter" idx="2"/>
           </p:nvPr>
@@ -10404,7 +10724,7 @@
           </a:prstGeom>
           <a:extLst>
             <a:ext uri="{C572A759-6A51-4108-AA02-DFA0A04FC94B}">
-              <ma14:wrappingTextBoxFlag xmlns:ma14="http://schemas.microsoft.com/office/mac/drawingml/2011/main" val="1"/>
+              <ma14:wrappingTextBoxFlag xmlns:ma14="http://schemas.microsoft.com/office/mac/drawingml/2011/main" xmlns:a14="http://schemas.microsoft.com/office/drawing/2010/main" xmlns:m="http://schemas.openxmlformats.org/officeDocument/2006/math" xmlns="" val="1"/>
             </a:ext>
           </a:extLst>
         </p:spPr>
@@ -10412,8 +10732,11 @@
           <a:bodyPr/>
           <a:lstStyle/>
           <a:p>
-            <a:pPr/>
-            <a:fld id="{86CB4B4D-7CA3-9044-876B-883B54F8677D}" type="slidenum"/>
+            <a:fld id="{86CB4B4D-7CA3-9044-876B-883B54F8677D}" type="slidenum">
+              <a:rPr/>
+              <a:t>6</a:t>
+            </a:fld>
+            <a:endParaRPr/>
           </a:p>
         </p:txBody>
       </p:sp>
@@ -10422,12 +10745,116 @@
   <p:clrMapOvr>
     <a:masterClrMapping/>
   </p:clrMapOvr>
-  <p:transition xmlns:p14="http://schemas.microsoft.com/office/powerpoint/2010/main" spd="med" advClick="1"/>
+  <p:transition spd="med"/>
+</p:sld>
+</file>
+
+<file path=ppt/slides/slide7.xml><?xml version="1.0" encoding="utf-8"?>
+<p:sld xmlns:a="http://schemas.openxmlformats.org/drawingml/2006/main" xmlns:r="http://schemas.openxmlformats.org/officeDocument/2006/relationships" xmlns:p="http://schemas.openxmlformats.org/presentationml/2006/main">
+  <p:cSld>
+    <p:spTree>
+      <p:nvGrpSpPr>
+        <p:cNvPr id="1" name=""/>
+        <p:cNvGrpSpPr/>
+        <p:nvPr/>
+      </p:nvGrpSpPr>
+      <p:grpSpPr>
+        <a:xfrm>
+          <a:off x="0" y="0"/>
+          <a:ext cx="0" cy="0"/>
+          <a:chOff x="0" y="0"/>
+          <a:chExt cx="0" cy="0"/>
+        </a:xfrm>
+      </p:grpSpPr>
+      <p:sp>
+        <p:nvSpPr>
+          <p:cNvPr id="2" name="Title 1">
+            <a:extLst>
+              <a:ext uri="{FF2B5EF4-FFF2-40B4-BE49-F238E27FC236}">
+                <a16:creationId xmlns:a16="http://schemas.microsoft.com/office/drawing/2014/main" id="{A86C8A0A-38B2-FDC9-961C-42D793C2BCCB}"/>
+              </a:ext>
+            </a:extLst>
+          </p:cNvPr>
+          <p:cNvSpPr>
+            <a:spLocks noGrp="1"/>
+          </p:cNvSpPr>
+          <p:nvPr>
+            <p:ph type="title"/>
+          </p:nvPr>
+        </p:nvSpPr>
+        <p:spPr/>
+        <p:txBody>
+          <a:bodyPr/>
+          <a:lstStyle/>
+          <a:p>
+            <a:r>
+              <a:rPr lang="en-US" dirty="0"/>
+              <a:t>Appropriate Links</a:t>
+            </a:r>
+            <a:endParaRPr lang="en-GB" dirty="0"/>
+          </a:p>
+        </p:txBody>
+      </p:sp>
+      <p:sp>
+        <p:nvSpPr>
+          <p:cNvPr id="3" name="Text Placeholder 2">
+            <a:extLst>
+              <a:ext uri="{FF2B5EF4-FFF2-40B4-BE49-F238E27FC236}">
+                <a16:creationId xmlns:a16="http://schemas.microsoft.com/office/drawing/2014/main" id="{B995E8E6-8731-D993-014E-DF9F7849CC6C}"/>
+              </a:ext>
+            </a:extLst>
+          </p:cNvPr>
+          <p:cNvSpPr>
+            <a:spLocks noGrp="1"/>
+          </p:cNvSpPr>
+          <p:nvPr>
+            <p:ph type="body" sz="quarter" idx="1"/>
+          </p:nvPr>
+        </p:nvSpPr>
+        <p:spPr/>
+        <p:txBody>
+          <a:bodyPr/>
+          <a:lstStyle/>
+          <a:p>
+            <a:r>
+              <a:rPr lang="en-US" dirty="0"/>
+              <a:t>GitHub-</a:t>
+            </a:r>
+            <a:r>
+              <a:rPr lang="en-US" dirty="0">
+                <a:hlinkClick r:id="rId2"/>
+              </a:rPr>
+              <a:t>https://github.com/X24378823/SE-Project-Repo</a:t>
+            </a:r>
+            <a:endParaRPr lang="en-US" dirty="0"/>
+          </a:p>
+          <a:p>
+            <a:endParaRPr lang="en-US" dirty="0"/>
+          </a:p>
+          <a:p>
+            <a:r>
+              <a:rPr lang="en-GB" dirty="0"/>
+              <a:t>Teams-</a:t>
+            </a:r>
+          </a:p>
+        </p:txBody>
+      </p:sp>
+    </p:spTree>
+    <p:extLst>
+      <p:ext uri="{BB962C8B-B14F-4D97-AF65-F5344CB8AC3E}">
+        <p14:creationId xmlns:p14="http://schemas.microsoft.com/office/powerpoint/2010/main" val="3590883194"/>
+      </p:ext>
+    </p:extLst>
+  </p:cSld>
+  <p:clrMapOvr>
+    <a:masterClrMapping/>
+  </p:clrMapOvr>
+  <p:transition spd="med"/>
 </p:sld>
 </file>
 
 <file path=ppt/theme/theme1.xml><?xml version="1.0" encoding="utf-8"?>
-<a:theme xmlns:a="http://schemas.openxmlformats.org/drawingml/2006/main" xmlns:r="http://schemas.openxmlformats.org/officeDocument/2006/relationships" name="Monoline">
+<a:theme xmlns:a="http://schemas.openxmlformats.org/drawingml/2006/main" name="Monoline">
   <a:themeElements>
     <a:clrScheme name="Monoline">
       <a:dk1>
@@ -10633,7 +11060,7 @@
         <a:effectLst/>
         <a:sp3d/>
       </a:spPr>
-      <a:bodyPr rot="0" spcFirstLastPara="1" vertOverflow="overflow" horzOverflow="overflow" vert="horz" wrap="square" lIns="45719" tIns="45719" rIns="45719" bIns="45719" numCol="1" spcCol="38100" rtlCol="0" anchor="ctr" upright="0">
+      <a:bodyPr rot="0" spcFirstLastPara="1" vertOverflow="overflow" horzOverflow="overflow" vert="horz" wrap="square" lIns="45719" tIns="45719" rIns="45719" bIns="45719" numCol="1" spcCol="38100" rtlCol="0" anchor="ctr">
         <a:spAutoFit/>
       </a:bodyPr>
       <a:lstStyle>
@@ -10652,7 +11079,7 @@
           <a:buFontTx/>
           <a:buNone/>
           <a:tabLst/>
-          <a:defRPr b="0" baseline="0" cap="none" i="0" spc="0" strike="noStrike" sz="1800" u="none" kumimoji="0" normalizeH="0">
+          <a:defRPr kumimoji="0" sz="1800" b="0" i="0" u="none" strike="noStrike" cap="none" spc="0" normalizeH="0" baseline="0">
             <a:ln>
               <a:noFill/>
             </a:ln>
@@ -10682,7 +11109,7 @@
           <a:buFontTx/>
           <a:buNone/>
           <a:tabLst/>
-          <a:defRPr b="0" baseline="0" cap="none" i="0" spc="0" strike="noStrike" sz="1800" u="none" kumimoji="0" normalizeH="0">
+          <a:defRPr kumimoji="0" sz="1800" b="0" i="0" u="none" strike="noStrike" cap="none" spc="0" normalizeH="0" baseline="0">
             <a:ln>
               <a:noFill/>
             </a:ln>
@@ -10708,7 +11135,7 @@
           <a:buFontTx/>
           <a:buNone/>
           <a:tabLst/>
-          <a:defRPr b="0" baseline="0" cap="none" i="0" spc="0" strike="noStrike" sz="1800" u="none" kumimoji="0" normalizeH="0">
+          <a:defRPr kumimoji="0" sz="1800" b="0" i="0" u="none" strike="noStrike" cap="none" spc="0" normalizeH="0" baseline="0">
             <a:ln>
               <a:noFill/>
             </a:ln>
@@ -10734,7 +11161,7 @@
           <a:buFontTx/>
           <a:buNone/>
           <a:tabLst/>
-          <a:defRPr b="0" baseline="0" cap="none" i="0" spc="0" strike="noStrike" sz="1800" u="none" kumimoji="0" normalizeH="0">
+          <a:defRPr kumimoji="0" sz="1800" b="0" i="0" u="none" strike="noStrike" cap="none" spc="0" normalizeH="0" baseline="0">
             <a:ln>
               <a:noFill/>
             </a:ln>
@@ -10760,7 +11187,7 @@
           <a:buFontTx/>
           <a:buNone/>
           <a:tabLst/>
-          <a:defRPr b="0" baseline="0" cap="none" i="0" spc="0" strike="noStrike" sz="1800" u="none" kumimoji="0" normalizeH="0">
+          <a:defRPr kumimoji="0" sz="1800" b="0" i="0" u="none" strike="noStrike" cap="none" spc="0" normalizeH="0" baseline="0">
             <a:ln>
               <a:noFill/>
             </a:ln>
@@ -10786,7 +11213,7 @@
           <a:buFontTx/>
           <a:buNone/>
           <a:tabLst/>
-          <a:defRPr b="0" baseline="0" cap="none" i="0" spc="0" strike="noStrike" sz="1800" u="none" kumimoji="0" normalizeH="0">
+          <a:defRPr kumimoji="0" sz="1800" b="0" i="0" u="none" strike="noStrike" cap="none" spc="0" normalizeH="0" baseline="0">
             <a:ln>
               <a:noFill/>
             </a:ln>
@@ -10812,7 +11239,7 @@
           <a:buFontTx/>
           <a:buNone/>
           <a:tabLst/>
-          <a:defRPr b="0" baseline="0" cap="none" i="0" spc="0" strike="noStrike" sz="1800" u="none" kumimoji="0" normalizeH="0">
+          <a:defRPr kumimoji="0" sz="1800" b="0" i="0" u="none" strike="noStrike" cap="none" spc="0" normalizeH="0" baseline="0">
             <a:ln>
               <a:noFill/>
             </a:ln>
@@ -10838,7 +11265,7 @@
           <a:buFontTx/>
           <a:buNone/>
           <a:tabLst/>
-          <a:defRPr b="0" baseline="0" cap="none" i="0" spc="0" strike="noStrike" sz="1800" u="none" kumimoji="0" normalizeH="0">
+          <a:defRPr kumimoji="0" sz="1800" b="0" i="0" u="none" strike="noStrike" cap="none" spc="0" normalizeH="0" baseline="0">
             <a:ln>
               <a:noFill/>
             </a:ln>
@@ -10864,7 +11291,7 @@
           <a:buFontTx/>
           <a:buNone/>
           <a:tabLst/>
-          <a:defRPr b="0" baseline="0" cap="none" i="0" spc="0" strike="noStrike" sz="1800" u="none" kumimoji="0" normalizeH="0">
+          <a:defRPr kumimoji="0" sz="1800" b="0" i="0" u="none" strike="noStrike" cap="none" spc="0" normalizeH="0" baseline="0">
             <a:ln>
               <a:noFill/>
             </a:ln>
@@ -10890,7 +11317,7 @@
           <a:buFontTx/>
           <a:buNone/>
           <a:tabLst/>
-          <a:defRPr b="0" baseline="0" cap="none" i="0" spc="0" strike="noStrike" sz="1800" u="none" kumimoji="0" normalizeH="0">
+          <a:defRPr kumimoji="0" sz="1800" b="0" i="0" u="none" strike="noStrike" cap="none" spc="0" normalizeH="0" baseline="0">
             <a:ln>
               <a:noFill/>
             </a:ln>
@@ -10903,9 +11330,15 @@
         </a:lvl9pPr>
       </a:lstStyle>
       <a:style>
-        <a:lnRef idx="0"/>
-        <a:fillRef idx="0"/>
-        <a:effectRef idx="0"/>
+        <a:lnRef idx="0">
+          <a:scrgbClr r="0" g="0" b="0"/>
+        </a:lnRef>
+        <a:fillRef idx="0">
+          <a:scrgbClr r="0" g="0" b="0"/>
+        </a:fillRef>
+        <a:effectRef idx="0">
+          <a:scrgbClr r="0" g="0" b="0"/>
+        </a:effectRef>
         <a:fontRef idx="none"/>
       </a:style>
     </a:spDef>
@@ -10922,7 +11355,7 @@
         <a:effectLst/>
         <a:sp3d/>
       </a:spPr>
-      <a:bodyPr rot="0" spcFirstLastPara="1" vertOverflow="overflow" horzOverflow="overflow" vert="horz" wrap="square" lIns="91439" tIns="45719" rIns="91439" bIns="45719" numCol="1" spcCol="38100" rtlCol="0" anchor="t" upright="0">
+      <a:bodyPr rot="0" spcFirstLastPara="1" vertOverflow="overflow" horzOverflow="overflow" vert="horz" wrap="square" lIns="91439" tIns="45719" rIns="91439" bIns="45719" numCol="1" spcCol="38100" rtlCol="0" anchor="t">
         <a:noAutofit/>
       </a:bodyPr>
       <a:lstStyle>
@@ -10941,7 +11374,7 @@
           <a:buFontTx/>
           <a:buNone/>
           <a:tabLst/>
-          <a:defRPr b="0" baseline="0" cap="none" i="0" spc="0" strike="noStrike" sz="1800" u="none" kumimoji="0" normalizeH="0">
+          <a:defRPr kumimoji="0" sz="1800" b="0" i="0" u="none" strike="noStrike" cap="none" spc="0" normalizeH="0" baseline="0">
             <a:ln>
               <a:noFill/>
             </a:ln>
@@ -10967,7 +11400,7 @@
           <a:buFontTx/>
           <a:buNone/>
           <a:tabLst/>
-          <a:defRPr b="0" baseline="0" cap="none" i="0" spc="0" strike="noStrike" sz="1800" u="none" kumimoji="0" normalizeH="0">
+          <a:defRPr kumimoji="0" sz="1800" b="0" i="0" u="none" strike="noStrike" cap="none" spc="0" normalizeH="0" baseline="0">
             <a:ln>
               <a:noFill/>
             </a:ln>
@@ -10993,7 +11426,7 @@
           <a:buFontTx/>
           <a:buNone/>
           <a:tabLst/>
-          <a:defRPr b="0" baseline="0" cap="none" i="0" spc="0" strike="noStrike" sz="1800" u="none" kumimoji="0" normalizeH="0">
+          <a:defRPr kumimoji="0" sz="1800" b="0" i="0" u="none" strike="noStrike" cap="none" spc="0" normalizeH="0" baseline="0">
             <a:ln>
               <a:noFill/>
             </a:ln>
@@ -11019,7 +11452,7 @@
           <a:buFontTx/>
           <a:buNone/>
           <a:tabLst/>
-          <a:defRPr b="0" baseline="0" cap="none" i="0" spc="0" strike="noStrike" sz="1800" u="none" kumimoji="0" normalizeH="0">
+          <a:defRPr kumimoji="0" sz="1800" b="0" i="0" u="none" strike="noStrike" cap="none" spc="0" normalizeH="0" baseline="0">
             <a:ln>
               <a:noFill/>
             </a:ln>
@@ -11045,7 +11478,7 @@
           <a:buFontTx/>
           <a:buNone/>
           <a:tabLst/>
-          <a:defRPr b="0" baseline="0" cap="none" i="0" spc="0" strike="noStrike" sz="1800" u="none" kumimoji="0" normalizeH="0">
+          <a:defRPr kumimoji="0" sz="1800" b="0" i="0" u="none" strike="noStrike" cap="none" spc="0" normalizeH="0" baseline="0">
             <a:ln>
               <a:noFill/>
             </a:ln>
@@ -11071,7 +11504,7 @@
           <a:buFontTx/>
           <a:buNone/>
           <a:tabLst/>
-          <a:defRPr b="0" baseline="0" cap="none" i="0" spc="0" strike="noStrike" sz="1800" u="none" kumimoji="0" normalizeH="0">
+          <a:defRPr kumimoji="0" sz="1800" b="0" i="0" u="none" strike="noStrike" cap="none" spc="0" normalizeH="0" baseline="0">
             <a:ln>
               <a:noFill/>
             </a:ln>
@@ -11097,7 +11530,7 @@
           <a:buFontTx/>
           <a:buNone/>
           <a:tabLst/>
-          <a:defRPr b="0" baseline="0" cap="none" i="0" spc="0" strike="noStrike" sz="1800" u="none" kumimoji="0" normalizeH="0">
+          <a:defRPr kumimoji="0" sz="1800" b="0" i="0" u="none" strike="noStrike" cap="none" spc="0" normalizeH="0" baseline="0">
             <a:ln>
               <a:noFill/>
             </a:ln>
@@ -11123,7 +11556,7 @@
           <a:buFontTx/>
           <a:buNone/>
           <a:tabLst/>
-          <a:defRPr b="0" baseline="0" cap="none" i="0" spc="0" strike="noStrike" sz="1800" u="none" kumimoji="0" normalizeH="0">
+          <a:defRPr kumimoji="0" sz="1800" b="0" i="0" u="none" strike="noStrike" cap="none" spc="0" normalizeH="0" baseline="0">
             <a:ln>
               <a:noFill/>
             </a:ln>
@@ -11149,7 +11582,7 @@
           <a:buFontTx/>
           <a:buNone/>
           <a:tabLst/>
-          <a:defRPr b="0" baseline="0" cap="none" i="0" spc="0" strike="noStrike" sz="1800" u="none" kumimoji="0" normalizeH="0">
+          <a:defRPr kumimoji="0" sz="1800" b="0" i="0" u="none" strike="noStrike" cap="none" spc="0" normalizeH="0" baseline="0">
             <a:ln>
               <a:noFill/>
             </a:ln>
@@ -11175,7 +11608,7 @@
           <a:buFontTx/>
           <a:buNone/>
           <a:tabLst/>
-          <a:defRPr b="0" baseline="0" cap="none" i="0" spc="0" strike="noStrike" sz="1800" u="none" kumimoji="0" normalizeH="0">
+          <a:defRPr kumimoji="0" sz="1800" b="0" i="0" u="none" strike="noStrike" cap="none" spc="0" normalizeH="0" baseline="0">
             <a:ln>
               <a:noFill/>
             </a:ln>
@@ -11188,9 +11621,15 @@
         </a:lvl9pPr>
       </a:lstStyle>
       <a:style>
-        <a:lnRef idx="0"/>
-        <a:fillRef idx="0"/>
-        <a:effectRef idx="0"/>
+        <a:lnRef idx="0">
+          <a:scrgbClr r="0" g="0" b="0"/>
+        </a:lnRef>
+        <a:fillRef idx="0">
+          <a:scrgbClr r="0" g="0" b="0"/>
+        </a:fillRef>
+        <a:effectRef idx="0">
+          <a:scrgbClr r="0" g="0" b="0"/>
+        </a:effectRef>
         <a:fontRef idx="none"/>
       </a:style>
     </a:lnDef>
@@ -11204,7 +11643,7 @@
         <a:effectLst/>
         <a:sp3d/>
       </a:spPr>
-      <a:bodyPr rot="0" spcFirstLastPara="1" vertOverflow="overflow" horzOverflow="overflow" vert="horz" wrap="square" lIns="45719" tIns="45719" rIns="45719" bIns="45719" numCol="1" spcCol="38100" rtlCol="0" anchor="t" upright="0">
+      <a:bodyPr rot="0" spcFirstLastPara="1" vertOverflow="overflow" horzOverflow="overflow" vert="horz" wrap="square" lIns="45719" tIns="45719" rIns="45719" bIns="45719" numCol="1" spcCol="38100" rtlCol="0" anchor="t">
         <a:spAutoFit/>
       </a:bodyPr>
       <a:lstStyle>
@@ -11223,7 +11662,7 @@
           <a:buFontTx/>
           <a:buNone/>
           <a:tabLst/>
-          <a:defRPr b="0" baseline="0" cap="none" i="0" spc="0" strike="noStrike" sz="1800" u="none" kumimoji="0" normalizeH="0">
+          <a:defRPr kumimoji="0" sz="1800" b="0" i="0" u="none" strike="noStrike" cap="none" spc="0" normalizeH="0" baseline="0">
             <a:ln>
               <a:noFill/>
             </a:ln>
@@ -11253,7 +11692,7 @@
           <a:buFontTx/>
           <a:buNone/>
           <a:tabLst/>
-          <a:defRPr b="0" baseline="0" cap="none" i="0" spc="0" strike="noStrike" sz="1800" u="none" kumimoji="0" normalizeH="0">
+          <a:defRPr kumimoji="0" sz="1800" b="0" i="0" u="none" strike="noStrike" cap="none" spc="0" normalizeH="0" baseline="0">
             <a:ln>
               <a:noFill/>
             </a:ln>
@@ -11279,7 +11718,7 @@
           <a:buFontTx/>
           <a:buNone/>
           <a:tabLst/>
-          <a:defRPr b="0" baseline="0" cap="none" i="0" spc="0" strike="noStrike" sz="1800" u="none" kumimoji="0" normalizeH="0">
+          <a:defRPr kumimoji="0" sz="1800" b="0" i="0" u="none" strike="noStrike" cap="none" spc="0" normalizeH="0" baseline="0">
             <a:ln>
               <a:noFill/>
             </a:ln>
@@ -11305,7 +11744,7 @@
           <a:buFontTx/>
           <a:buNone/>
           <a:tabLst/>
-          <a:defRPr b="0" baseline="0" cap="none" i="0" spc="0" strike="noStrike" sz="1800" u="none" kumimoji="0" normalizeH="0">
+          <a:defRPr kumimoji="0" sz="1800" b="0" i="0" u="none" strike="noStrike" cap="none" spc="0" normalizeH="0" baseline="0">
             <a:ln>
               <a:noFill/>
             </a:ln>
@@ -11331,7 +11770,7 @@
           <a:buFontTx/>
           <a:buNone/>
           <a:tabLst/>
-          <a:defRPr b="0" baseline="0" cap="none" i="0" spc="0" strike="noStrike" sz="1800" u="none" kumimoji="0" normalizeH="0">
+          <a:defRPr kumimoji="0" sz="1800" b="0" i="0" u="none" strike="noStrike" cap="none" spc="0" normalizeH="0" baseline="0">
             <a:ln>
               <a:noFill/>
             </a:ln>
@@ -11357,7 +11796,7 @@
           <a:buFontTx/>
           <a:buNone/>
           <a:tabLst/>
-          <a:defRPr b="0" baseline="0" cap="none" i="0" spc="0" strike="noStrike" sz="1800" u="none" kumimoji="0" normalizeH="0">
+          <a:defRPr kumimoji="0" sz="1800" b="0" i="0" u="none" strike="noStrike" cap="none" spc="0" normalizeH="0" baseline="0">
             <a:ln>
               <a:noFill/>
             </a:ln>
@@ -11383,7 +11822,7 @@
           <a:buFontTx/>
           <a:buNone/>
           <a:tabLst/>
-          <a:defRPr b="0" baseline="0" cap="none" i="0" spc="0" strike="noStrike" sz="1800" u="none" kumimoji="0" normalizeH="0">
+          <a:defRPr kumimoji="0" sz="1800" b="0" i="0" u="none" strike="noStrike" cap="none" spc="0" normalizeH="0" baseline="0">
             <a:ln>
               <a:noFill/>
             </a:ln>
@@ -11409,7 +11848,7 @@
           <a:buFontTx/>
           <a:buNone/>
           <a:tabLst/>
-          <a:defRPr b="0" baseline="0" cap="none" i="0" spc="0" strike="noStrike" sz="1800" u="none" kumimoji="0" normalizeH="0">
+          <a:defRPr kumimoji="0" sz="1800" b="0" i="0" u="none" strike="noStrike" cap="none" spc="0" normalizeH="0" baseline="0">
             <a:ln>
               <a:noFill/>
             </a:ln>
@@ -11435,7 +11874,7 @@
           <a:buFontTx/>
           <a:buNone/>
           <a:tabLst/>
-          <a:defRPr b="0" baseline="0" cap="none" i="0" spc="0" strike="noStrike" sz="1800" u="none" kumimoji="0" normalizeH="0">
+          <a:defRPr kumimoji="0" sz="1800" b="0" i="0" u="none" strike="noStrike" cap="none" spc="0" normalizeH="0" baseline="0">
             <a:ln>
               <a:noFill/>
             </a:ln>
@@ -11461,7 +11900,7 @@
           <a:buFontTx/>
           <a:buNone/>
           <a:tabLst/>
-          <a:defRPr b="0" baseline="0" cap="none" i="0" spc="0" strike="noStrike" sz="1800" u="none" kumimoji="0" normalizeH="0">
+          <a:defRPr kumimoji="0" sz="1800" b="0" i="0" u="none" strike="noStrike" cap="none" spc="0" normalizeH="0" baseline="0">
             <a:ln>
               <a:noFill/>
             </a:ln>
@@ -11474,18 +11913,25 @@
         </a:lvl9pPr>
       </a:lstStyle>
       <a:style>
-        <a:lnRef idx="0"/>
-        <a:fillRef idx="0"/>
-        <a:effectRef idx="0"/>
+        <a:lnRef idx="0">
+          <a:scrgbClr r="0" g="0" b="0"/>
+        </a:lnRef>
+        <a:fillRef idx="0">
+          <a:scrgbClr r="0" g="0" b="0"/>
+        </a:fillRef>
+        <a:effectRef idx="0">
+          <a:scrgbClr r="0" g="0" b="0"/>
+        </a:effectRef>
         <a:fontRef idx="none"/>
       </a:style>
     </a:txDef>
   </a:objectDefaults>
+  <a:extraClrSchemeLst/>
 </a:theme>
 </file>
 
 <file path=ppt/theme/theme2.xml><?xml version="1.0" encoding="utf-8"?>
-<a:theme xmlns:a="http://schemas.openxmlformats.org/drawingml/2006/main" xmlns:r="http://schemas.openxmlformats.org/officeDocument/2006/relationships" name="Monoline">
+<a:theme xmlns:a="http://schemas.openxmlformats.org/drawingml/2006/main" name="Monoline">
   <a:themeElements>
     <a:clrScheme name="Monoline">
       <a:dk1>
@@ -11691,7 +12137,7 @@
         <a:effectLst/>
         <a:sp3d/>
       </a:spPr>
-      <a:bodyPr rot="0" spcFirstLastPara="1" vertOverflow="overflow" horzOverflow="overflow" vert="horz" wrap="square" lIns="45719" tIns="45719" rIns="45719" bIns="45719" numCol="1" spcCol="38100" rtlCol="0" anchor="ctr" upright="0">
+      <a:bodyPr rot="0" spcFirstLastPara="1" vertOverflow="overflow" horzOverflow="overflow" vert="horz" wrap="square" lIns="45719" tIns="45719" rIns="45719" bIns="45719" numCol="1" spcCol="38100" rtlCol="0" anchor="ctr">
         <a:spAutoFit/>
       </a:bodyPr>
       <a:lstStyle>
@@ -11710,7 +12156,7 @@
           <a:buFontTx/>
           <a:buNone/>
           <a:tabLst/>
-          <a:defRPr b="0" baseline="0" cap="none" i="0" spc="0" strike="noStrike" sz="1800" u="none" kumimoji="0" normalizeH="0">
+          <a:defRPr kumimoji="0" sz="1800" b="0" i="0" u="none" strike="noStrike" cap="none" spc="0" normalizeH="0" baseline="0">
             <a:ln>
               <a:noFill/>
             </a:ln>
@@ -11740,7 +12186,7 @@
           <a:buFontTx/>
           <a:buNone/>
           <a:tabLst/>
-          <a:defRPr b="0" baseline="0" cap="none" i="0" spc="0" strike="noStrike" sz="1800" u="none" kumimoji="0" normalizeH="0">
+          <a:defRPr kumimoji="0" sz="1800" b="0" i="0" u="none" strike="noStrike" cap="none" spc="0" normalizeH="0" baseline="0">
             <a:ln>
               <a:noFill/>
             </a:ln>
@@ -11766,7 +12212,7 @@
           <a:buFontTx/>
           <a:buNone/>
           <a:tabLst/>
-          <a:defRPr b="0" baseline="0" cap="none" i="0" spc="0" strike="noStrike" sz="1800" u="none" kumimoji="0" normalizeH="0">
+          <a:defRPr kumimoji="0" sz="1800" b="0" i="0" u="none" strike="noStrike" cap="none" spc="0" normalizeH="0" baseline="0">
             <a:ln>
               <a:noFill/>
             </a:ln>
@@ -11792,7 +12238,7 @@
           <a:buFontTx/>
           <a:buNone/>
           <a:tabLst/>
-          <a:defRPr b="0" baseline="0" cap="none" i="0" spc="0" strike="noStrike" sz="1800" u="none" kumimoji="0" normalizeH="0">
+          <a:defRPr kumimoji="0" sz="1800" b="0" i="0" u="none" strike="noStrike" cap="none" spc="0" normalizeH="0" baseline="0">
             <a:ln>
               <a:noFill/>
             </a:ln>
@@ -11818,7 +12264,7 @@
           <a:buFontTx/>
           <a:buNone/>
           <a:tabLst/>
-          <a:defRPr b="0" baseline="0" cap="none" i="0" spc="0" strike="noStrike" sz="1800" u="none" kumimoji="0" normalizeH="0">
+          <a:defRPr kumimoji="0" sz="1800" b="0" i="0" u="none" strike="noStrike" cap="none" spc="0" normalizeH="0" baseline="0">
             <a:ln>
               <a:noFill/>
             </a:ln>
@@ -11844,7 +12290,7 @@
           <a:buFontTx/>
           <a:buNone/>
           <a:tabLst/>
-          <a:defRPr b="0" baseline="0" cap="none" i="0" spc="0" strike="noStrike" sz="1800" u="none" kumimoji="0" normalizeH="0">
+          <a:defRPr kumimoji="0" sz="1800" b="0" i="0" u="none" strike="noStrike" cap="none" spc="0" normalizeH="0" baseline="0">
             <a:ln>
               <a:noFill/>
             </a:ln>
@@ -11870,7 +12316,7 @@
           <a:buFontTx/>
           <a:buNone/>
           <a:tabLst/>
-          <a:defRPr b="0" baseline="0" cap="none" i="0" spc="0" strike="noStrike" sz="1800" u="none" kumimoji="0" normalizeH="0">
+          <a:defRPr kumimoji="0" sz="1800" b="0" i="0" u="none" strike="noStrike" cap="none" spc="0" normalizeH="0" baseline="0">
             <a:ln>
               <a:noFill/>
             </a:ln>
@@ -11896,7 +12342,7 @@
           <a:buFontTx/>
           <a:buNone/>
           <a:tabLst/>
-          <a:defRPr b="0" baseline="0" cap="none" i="0" spc="0" strike="noStrike" sz="1800" u="none" kumimoji="0" normalizeH="0">
+          <a:defRPr kumimoji="0" sz="1800" b="0" i="0" u="none" strike="noStrike" cap="none" spc="0" normalizeH="0" baseline="0">
             <a:ln>
               <a:noFill/>
             </a:ln>
@@ -11922,7 +12368,7 @@
           <a:buFontTx/>
           <a:buNone/>
           <a:tabLst/>
-          <a:defRPr b="0" baseline="0" cap="none" i="0" spc="0" strike="noStrike" sz="1800" u="none" kumimoji="0" normalizeH="0">
+          <a:defRPr kumimoji="0" sz="1800" b="0" i="0" u="none" strike="noStrike" cap="none" spc="0" normalizeH="0" baseline="0">
             <a:ln>
               <a:noFill/>
             </a:ln>
@@ -11948,7 +12394,7 @@
           <a:buFontTx/>
           <a:buNone/>
           <a:tabLst/>
-          <a:defRPr b="0" baseline="0" cap="none" i="0" spc="0" strike="noStrike" sz="1800" u="none" kumimoji="0" normalizeH="0">
+          <a:defRPr kumimoji="0" sz="1800" b="0" i="0" u="none" strike="noStrike" cap="none" spc="0" normalizeH="0" baseline="0">
             <a:ln>
               <a:noFill/>
             </a:ln>
@@ -11961,9 +12407,15 @@
         </a:lvl9pPr>
       </a:lstStyle>
       <a:style>
-        <a:lnRef idx="0"/>
-        <a:fillRef idx="0"/>
-        <a:effectRef idx="0"/>
+        <a:lnRef idx="0">
+          <a:scrgbClr r="0" g="0" b="0"/>
+        </a:lnRef>
+        <a:fillRef idx="0">
+          <a:scrgbClr r="0" g="0" b="0"/>
+        </a:fillRef>
+        <a:effectRef idx="0">
+          <a:scrgbClr r="0" g="0" b="0"/>
+        </a:effectRef>
         <a:fontRef idx="none"/>
       </a:style>
     </a:spDef>
@@ -11980,7 +12432,7 @@
         <a:effectLst/>
         <a:sp3d/>
       </a:spPr>
-      <a:bodyPr rot="0" spcFirstLastPara="1" vertOverflow="overflow" horzOverflow="overflow" vert="horz" wrap="square" lIns="91439" tIns="45719" rIns="91439" bIns="45719" numCol="1" spcCol="38100" rtlCol="0" anchor="t" upright="0">
+      <a:bodyPr rot="0" spcFirstLastPara="1" vertOverflow="overflow" horzOverflow="overflow" vert="horz" wrap="square" lIns="91439" tIns="45719" rIns="91439" bIns="45719" numCol="1" spcCol="38100" rtlCol="0" anchor="t">
         <a:noAutofit/>
       </a:bodyPr>
       <a:lstStyle>
@@ -11999,7 +12451,7 @@
           <a:buFontTx/>
           <a:buNone/>
           <a:tabLst/>
-          <a:defRPr b="0" baseline="0" cap="none" i="0" spc="0" strike="noStrike" sz="1800" u="none" kumimoji="0" normalizeH="0">
+          <a:defRPr kumimoji="0" sz="1800" b="0" i="0" u="none" strike="noStrike" cap="none" spc="0" normalizeH="0" baseline="0">
             <a:ln>
               <a:noFill/>
             </a:ln>
@@ -12025,7 +12477,7 @@
           <a:buFontTx/>
           <a:buNone/>
           <a:tabLst/>
-          <a:defRPr b="0" baseline="0" cap="none" i="0" spc="0" strike="noStrike" sz="1800" u="none" kumimoji="0" normalizeH="0">
+          <a:defRPr kumimoji="0" sz="1800" b="0" i="0" u="none" strike="noStrike" cap="none" spc="0" normalizeH="0" baseline="0">
             <a:ln>
               <a:noFill/>
             </a:ln>
@@ -12051,7 +12503,7 @@
           <a:buFontTx/>
           <a:buNone/>
           <a:tabLst/>
-          <a:defRPr b="0" baseline="0" cap="none" i="0" spc="0" strike="noStrike" sz="1800" u="none" kumimoji="0" normalizeH="0">
+          <a:defRPr kumimoji="0" sz="1800" b="0" i="0" u="none" strike="noStrike" cap="none" spc="0" normalizeH="0" baseline="0">
             <a:ln>
               <a:noFill/>
             </a:ln>
@@ -12077,7 +12529,7 @@
           <a:buFontTx/>
           <a:buNone/>
           <a:tabLst/>
-          <a:defRPr b="0" baseline="0" cap="none" i="0" spc="0" strike="noStrike" sz="1800" u="none" kumimoji="0" normalizeH="0">
+          <a:defRPr kumimoji="0" sz="1800" b="0" i="0" u="none" strike="noStrike" cap="none" spc="0" normalizeH="0" baseline="0">
             <a:ln>
               <a:noFill/>
             </a:ln>
@@ -12103,7 +12555,7 @@
           <a:buFontTx/>
           <a:buNone/>
           <a:tabLst/>
-          <a:defRPr b="0" baseline="0" cap="none" i="0" spc="0" strike="noStrike" sz="1800" u="none" kumimoji="0" normalizeH="0">
+          <a:defRPr kumimoji="0" sz="1800" b="0" i="0" u="none" strike="noStrike" cap="none" spc="0" normalizeH="0" baseline="0">
             <a:ln>
               <a:noFill/>
             </a:ln>
@@ -12129,7 +12581,7 @@
           <a:buFontTx/>
           <a:buNone/>
           <a:tabLst/>
-          <a:defRPr b="0" baseline="0" cap="none" i="0" spc="0" strike="noStrike" sz="1800" u="none" kumimoji="0" normalizeH="0">
+          <a:defRPr kumimoji="0" sz="1800" b="0" i="0" u="none" strike="noStrike" cap="none" spc="0" normalizeH="0" baseline="0">
             <a:ln>
               <a:noFill/>
             </a:ln>
@@ -12155,7 +12607,7 @@
           <a:buFontTx/>
           <a:buNone/>
           <a:tabLst/>
-          <a:defRPr b="0" baseline="0" cap="none" i="0" spc="0" strike="noStrike" sz="1800" u="none" kumimoji="0" normalizeH="0">
+          <a:defRPr kumimoji="0" sz="1800" b="0" i="0" u="none" strike="noStrike" cap="none" spc="0" normalizeH="0" baseline="0">
             <a:ln>
               <a:noFill/>
             </a:ln>
@@ -12181,7 +12633,7 @@
           <a:buFontTx/>
           <a:buNone/>
           <a:tabLst/>
-          <a:defRPr b="0" baseline="0" cap="none" i="0" spc="0" strike="noStrike" sz="1800" u="none" kumimoji="0" normalizeH="0">
+          <a:defRPr kumimoji="0" sz="1800" b="0" i="0" u="none" strike="noStrike" cap="none" spc="0" normalizeH="0" baseline="0">
             <a:ln>
               <a:noFill/>
             </a:ln>
@@ -12207,7 +12659,7 @@
           <a:buFontTx/>
           <a:buNone/>
           <a:tabLst/>
-          <a:defRPr b="0" baseline="0" cap="none" i="0" spc="0" strike="noStrike" sz="1800" u="none" kumimoji="0" normalizeH="0">
+          <a:defRPr kumimoji="0" sz="1800" b="0" i="0" u="none" strike="noStrike" cap="none" spc="0" normalizeH="0" baseline="0">
             <a:ln>
               <a:noFill/>
             </a:ln>
@@ -12233,7 +12685,7 @@
           <a:buFontTx/>
           <a:buNone/>
           <a:tabLst/>
-          <a:defRPr b="0" baseline="0" cap="none" i="0" spc="0" strike="noStrike" sz="1800" u="none" kumimoji="0" normalizeH="0">
+          <a:defRPr kumimoji="0" sz="1800" b="0" i="0" u="none" strike="noStrike" cap="none" spc="0" normalizeH="0" baseline="0">
             <a:ln>
               <a:noFill/>
             </a:ln>
@@ -12246,9 +12698,15 @@
         </a:lvl9pPr>
       </a:lstStyle>
       <a:style>
-        <a:lnRef idx="0"/>
-        <a:fillRef idx="0"/>
-        <a:effectRef idx="0"/>
+        <a:lnRef idx="0">
+          <a:scrgbClr r="0" g="0" b="0"/>
+        </a:lnRef>
+        <a:fillRef idx="0">
+          <a:scrgbClr r="0" g="0" b="0"/>
+        </a:fillRef>
+        <a:effectRef idx="0">
+          <a:scrgbClr r="0" g="0" b="0"/>
+        </a:effectRef>
         <a:fontRef idx="none"/>
       </a:style>
     </a:lnDef>
@@ -12262,7 +12720,7 @@
         <a:effectLst/>
         <a:sp3d/>
       </a:spPr>
-      <a:bodyPr rot="0" spcFirstLastPara="1" vertOverflow="overflow" horzOverflow="overflow" vert="horz" wrap="square" lIns="45719" tIns="45719" rIns="45719" bIns="45719" numCol="1" spcCol="38100" rtlCol="0" anchor="t" upright="0">
+      <a:bodyPr rot="0" spcFirstLastPara="1" vertOverflow="overflow" horzOverflow="overflow" vert="horz" wrap="square" lIns="45719" tIns="45719" rIns="45719" bIns="45719" numCol="1" spcCol="38100" rtlCol="0" anchor="t">
         <a:spAutoFit/>
       </a:bodyPr>
       <a:lstStyle>
@@ -12281,7 +12739,7 @@
           <a:buFontTx/>
           <a:buNone/>
           <a:tabLst/>
-          <a:defRPr b="0" baseline="0" cap="none" i="0" spc="0" strike="noStrike" sz="1800" u="none" kumimoji="0" normalizeH="0">
+          <a:defRPr kumimoji="0" sz="1800" b="0" i="0" u="none" strike="noStrike" cap="none" spc="0" normalizeH="0" baseline="0">
             <a:ln>
               <a:noFill/>
             </a:ln>
@@ -12311,7 +12769,7 @@
           <a:buFontTx/>
           <a:buNone/>
           <a:tabLst/>
-          <a:defRPr b="0" baseline="0" cap="none" i="0" spc="0" strike="noStrike" sz="1800" u="none" kumimoji="0" normalizeH="0">
+          <a:defRPr kumimoji="0" sz="1800" b="0" i="0" u="none" strike="noStrike" cap="none" spc="0" normalizeH="0" baseline="0">
             <a:ln>
               <a:noFill/>
             </a:ln>
@@ -12337,7 +12795,7 @@
           <a:buFontTx/>
           <a:buNone/>
           <a:tabLst/>
-          <a:defRPr b="0" baseline="0" cap="none" i="0" spc="0" strike="noStrike" sz="1800" u="none" kumimoji="0" normalizeH="0">
+          <a:defRPr kumimoji="0" sz="1800" b="0" i="0" u="none" strike="noStrike" cap="none" spc="0" normalizeH="0" baseline="0">
             <a:ln>
               <a:noFill/>
             </a:ln>
@@ -12363,7 +12821,7 @@
           <a:buFontTx/>
           <a:buNone/>
           <a:tabLst/>
-          <a:defRPr b="0" baseline="0" cap="none" i="0" spc="0" strike="noStrike" sz="1800" u="none" kumimoji="0" normalizeH="0">
+          <a:defRPr kumimoji="0" sz="1800" b="0" i="0" u="none" strike="noStrike" cap="none" spc="0" normalizeH="0" baseline="0">
             <a:ln>
               <a:noFill/>
             </a:ln>
@@ -12389,7 +12847,7 @@
           <a:buFontTx/>
           <a:buNone/>
           <a:tabLst/>
-          <a:defRPr b="0" baseline="0" cap="none" i="0" spc="0" strike="noStrike" sz="1800" u="none" kumimoji="0" normalizeH="0">
+          <a:defRPr kumimoji="0" sz="1800" b="0" i="0" u="none" strike="noStrike" cap="none" spc="0" normalizeH="0" baseline="0">
             <a:ln>
               <a:noFill/>
             </a:ln>
@@ -12415,7 +12873,7 @@
           <a:buFontTx/>
           <a:buNone/>
           <a:tabLst/>
-          <a:defRPr b="0" baseline="0" cap="none" i="0" spc="0" strike="noStrike" sz="1800" u="none" kumimoji="0" normalizeH="0">
+          <a:defRPr kumimoji="0" sz="1800" b="0" i="0" u="none" strike="noStrike" cap="none" spc="0" normalizeH="0" baseline="0">
             <a:ln>
               <a:noFill/>
             </a:ln>
@@ -12441,7 +12899,7 @@
           <a:buFontTx/>
           <a:buNone/>
           <a:tabLst/>
-          <a:defRPr b="0" baseline="0" cap="none" i="0" spc="0" strike="noStrike" sz="1800" u="none" kumimoji="0" normalizeH="0">
+          <a:defRPr kumimoji="0" sz="1800" b="0" i="0" u="none" strike="noStrike" cap="none" spc="0" normalizeH="0" baseline="0">
             <a:ln>
               <a:noFill/>
             </a:ln>
@@ -12467,7 +12925,7 @@
           <a:buFontTx/>
           <a:buNone/>
           <a:tabLst/>
-          <a:defRPr b="0" baseline="0" cap="none" i="0" spc="0" strike="noStrike" sz="1800" u="none" kumimoji="0" normalizeH="0">
+          <a:defRPr kumimoji="0" sz="1800" b="0" i="0" u="none" strike="noStrike" cap="none" spc="0" normalizeH="0" baseline="0">
             <a:ln>
               <a:noFill/>
             </a:ln>
@@ -12493,7 +12951,7 @@
           <a:buFontTx/>
           <a:buNone/>
           <a:tabLst/>
-          <a:defRPr b="0" baseline="0" cap="none" i="0" spc="0" strike="noStrike" sz="1800" u="none" kumimoji="0" normalizeH="0">
+          <a:defRPr kumimoji="0" sz="1800" b="0" i="0" u="none" strike="noStrike" cap="none" spc="0" normalizeH="0" baseline="0">
             <a:ln>
               <a:noFill/>
             </a:ln>
@@ -12519,7 +12977,7 @@
           <a:buFontTx/>
           <a:buNone/>
           <a:tabLst/>
-          <a:defRPr b="0" baseline="0" cap="none" i="0" spc="0" strike="noStrike" sz="1800" u="none" kumimoji="0" normalizeH="0">
+          <a:defRPr kumimoji="0" sz="1800" b="0" i="0" u="none" strike="noStrike" cap="none" spc="0" normalizeH="0" baseline="0">
             <a:ln>
               <a:noFill/>
             </a:ln>
@@ -12532,12 +12990,19 @@
         </a:lvl9pPr>
       </a:lstStyle>
       <a:style>
-        <a:lnRef idx="0"/>
-        <a:fillRef idx="0"/>
-        <a:effectRef idx="0"/>
+        <a:lnRef idx="0">
+          <a:scrgbClr r="0" g="0" b="0"/>
+        </a:lnRef>
+        <a:fillRef idx="0">
+          <a:scrgbClr r="0" g="0" b="0"/>
+        </a:fillRef>
+        <a:effectRef idx="0">
+          <a:scrgbClr r="0" g="0" b="0"/>
+        </a:effectRef>
         <a:fontRef idx="none"/>
       </a:style>
     </a:txDef>
   </a:objectDefaults>
+  <a:extraClrSchemeLst/>
 </a:theme>
 </file>